--- a/slide/pratica/12/Aula12 - Introducao a Grafos.pptx
+++ b/slide/pratica/12/Aula12 - Introducao a Grafos.pptx
@@ -4,6 +4,9 @@
   <p:sldMasterIdLst>
     <p:sldMasterId id="2147483648" r:id="rId1"/>
   </p:sldMasterIdLst>
+  <p:notesMasterIdLst>
+    <p:notesMasterId r:id="rId31"/>
+  </p:notesMasterIdLst>
   <p:sldIdLst>
     <p:sldId id="256" r:id="rId2"/>
     <p:sldId id="257" r:id="rId3"/>
@@ -35,9 +38,6 @@
     <p:sldId id="283" r:id="rId29"/>
     <p:sldId id="284" r:id="rId30"/>
   </p:sldIdLst>
-  <p:notesMasterIdLst>
-    <p:notesMasterId r:id="rId31"/>
-  </p:notesMasterIdLst>
   <p:sldSz cx="12192000" cy="6858000"/>
   <p:notesSz cx="6858000" cy="12192000"/>
   <p:defaultTextStyle>
@@ -132,6 +132,11 @@
       </a:defRPr>
     </a:lvl9pPr>
   </p:defaultTextStyle>
+  <p:extLst>
+    <p:ext uri="{EFAFB233-063F-42B5-8137-9DF3F51BA10A}">
+      <p15:sldGuideLst xmlns:p15="http://schemas.microsoft.com/office/powerpoint/2012/main"/>
+    </p:ext>
+  </p:extLst>
 </p:presentation>
 </file>
 
@@ -157,234 +162,10 @@
           <a:chExt cx="0" cy="0"/>
         </a:xfrm>
       </p:grpSpPr>
-      <p:sp>
-        <p:nvSpPr>
-          <p:cNvPr id="2" name="Header Placeholder 1"/>
-          <p:cNvSpPr>
-            <a:spLocks noGrp="1"/>
-          </p:cNvSpPr>
-          <p:nvPr>
-            <p:ph type="hdr" sz="quarter"/>
-          </p:nvPr>
-        </p:nvSpPr>
-        <p:spPr>
-          <a:xfrm>
-            <a:off x="0" y="0"/>
-            <a:ext cx="2971800" cy="458788"/>
-          </a:xfrm>
-          <a:prstGeom prst="rect">
-            <a:avLst/>
-          </a:prstGeom>
-        </p:spPr>
-        <p:txBody>
-          <a:bodyPr vert="horz" lIns="91440" tIns="45720" rIns="91440" bIns="45720" rtlCol="0"/>
-          <a:lstStyle>
-            <a:lvl1pPr algn="l">
-              <a:defRPr sz="1200"/>
-            </a:lvl1pPr>
-          </a:lstStyle>
-          <a:p>
-            <a:endParaRPr lang="en-US"/>
-          </a:p>
-        </p:txBody>
-      </p:sp>
-      <p:sp>
-        <p:nvSpPr>
-          <p:cNvPr id="3" name="Date Placeholder 2"/>
-          <p:cNvSpPr>
-            <a:spLocks noGrp="1"/>
-          </p:cNvSpPr>
-          <p:nvPr>
-            <p:ph type="dt" idx="1"/>
-          </p:nvPr>
-        </p:nvSpPr>
-        <p:spPr>
-          <a:xfrm>
-            <a:off x="3884613" y="0"/>
-            <a:ext cx="2971800" cy="458788"/>
-          </a:xfrm>
-          <a:prstGeom prst="rect">
-            <a:avLst/>
-          </a:prstGeom>
-        </p:spPr>
-        <p:txBody>
-          <a:bodyPr vert="horz" lIns="91440" tIns="45720" rIns="91440" bIns="45720" rtlCol="0"/>
-          <a:lstStyle>
-            <a:lvl1pPr algn="r">
-              <a:defRPr sz="1200"/>
-            </a:lvl1pPr>
-          </a:lstStyle>
-          <a:p>
-            <a:fld id="{5282F153-3F37-0F45-9E97-73ACFA13230C}" type="datetimeFigureOut">
-              <a:rPr lang="en-US"/>
-              <a:t>7/23/19</a:t>
-            </a:fld>
-            <a:endParaRPr lang="en-US"/>
-          </a:p>
-        </p:txBody>
-      </p:sp>
-      <p:sp>
-        <p:nvSpPr>
-          <p:cNvPr id="4" name="Slide Image Placeholder 3"/>
-          <p:cNvSpPr>
-            <a:spLocks noGrp="1" noRot="1" noChangeAspect="1"/>
-          </p:cNvSpPr>
-          <p:nvPr>
-            <p:ph type="sldImg" idx="2"/>
-          </p:nvPr>
-        </p:nvSpPr>
-        <p:spPr>
-          <a:xfrm>
-            <a:off x="685800" y="1143000"/>
-            <a:ext cx="5486400" cy="3086100"/>
-          </a:xfrm>
-          <a:prstGeom prst="rect">
-            <a:avLst/>
-          </a:prstGeom>
-          <a:noFill/>
-          <a:ln w="12700">
-            <a:solidFill>
-              <a:prstClr val="black"/>
-            </a:solidFill>
-          </a:ln>
-        </p:spPr>
-        <p:txBody>
-          <a:bodyPr vert="horz" lIns="91440" tIns="45720" rIns="91440" bIns="45720" rtlCol="0" anchor="ctr"/>
-          <a:lstStyle/>
-          <a:p>
-            <a:endParaRPr lang="en-US"/>
-          </a:p>
-        </p:txBody>
-      </p:sp>
-      <p:sp>
-        <p:nvSpPr>
-          <p:cNvPr id="5" name="Notes Placeholder 4"/>
-          <p:cNvSpPr>
-            <a:spLocks noGrp="1"/>
-          </p:cNvSpPr>
-          <p:nvPr>
-            <p:ph type="body" sz="quarter" idx="3"/>
-          </p:nvPr>
-        </p:nvSpPr>
-        <p:spPr>
-          <a:xfrm>
-            <a:off x="685800" y="4400550"/>
-            <a:ext cx="5486400" cy="3600450"/>
-          </a:xfrm>
-          <a:prstGeom prst="rect">
-            <a:avLst/>
-          </a:prstGeom>
-        </p:spPr>
-        <p:txBody>
-          <a:bodyPr vert="horz" lIns="91440" tIns="45720" rIns="91440" bIns="45720" rtlCol="0"/>
-          <a:lstStyle/>
-          <a:p>
-            <a:pPr lvl="0"/>
-            <a:r>
-              <a:rPr lang="en-US"/>
-              <a:t>Click to edit Master text styles</a:t>
-            </a:r>
-          </a:p>
-          <a:p>
-            <a:pPr lvl="1"/>
-            <a:r>
-              <a:rPr lang="en-US"/>
-              <a:t>Second level</a:t>
-            </a:r>
-          </a:p>
-          <a:p>
-            <a:pPr lvl="2"/>
-            <a:r>
-              <a:rPr lang="en-US"/>
-              <a:t>Third level</a:t>
-            </a:r>
-          </a:p>
-          <a:p>
-            <a:pPr lvl="3"/>
-            <a:r>
-              <a:rPr lang="en-US"/>
-              <a:t>Fourth level</a:t>
-            </a:r>
-          </a:p>
-          <a:p>
-            <a:pPr lvl="4"/>
-            <a:r>
-              <a:rPr lang="en-US"/>
-              <a:t>Fifth level</a:t>
-            </a:r>
-          </a:p>
-        </p:txBody>
-      </p:sp>
-      <p:sp>
-        <p:nvSpPr>
-          <p:cNvPr id="6" name="Footer Placeholder 5"/>
-          <p:cNvSpPr>
-            <a:spLocks noGrp="1"/>
-          </p:cNvSpPr>
-          <p:nvPr>
-            <p:ph type="ftr" sz="quarter" idx="4"/>
-          </p:nvPr>
-        </p:nvSpPr>
-        <p:spPr>
-          <a:xfrm>
-            <a:off x="0" y="8685213"/>
-            <a:ext cx="2971800" cy="458787"/>
-          </a:xfrm>
-          <a:prstGeom prst="rect">
-            <a:avLst/>
-          </a:prstGeom>
-        </p:spPr>
-        <p:txBody>
-          <a:bodyPr vert="horz" lIns="91440" tIns="45720" rIns="91440" bIns="45720" rtlCol="0" anchor="b"/>
-          <a:lstStyle>
-            <a:lvl1pPr algn="l">
-              <a:defRPr sz="1200"/>
-            </a:lvl1pPr>
-          </a:lstStyle>
-          <a:p>
-            <a:endParaRPr lang="en-US"/>
-          </a:p>
-        </p:txBody>
-      </p:sp>
-      <p:sp>
-        <p:nvSpPr>
-          <p:cNvPr id="7" name="Slide Number Placeholder 6"/>
-          <p:cNvSpPr>
-            <a:spLocks noGrp="1"/>
-          </p:cNvSpPr>
-          <p:nvPr>
-            <p:ph type="sldNum" sz="quarter" idx="5"/>
-          </p:nvPr>
-        </p:nvSpPr>
-        <p:spPr>
-          <a:xfrm>
-            <a:off x="3884613" y="8685213"/>
-            <a:ext cx="2971800" cy="458787"/>
-          </a:xfrm>
-          <a:prstGeom prst="rect">
-            <a:avLst/>
-          </a:prstGeom>
-        </p:spPr>
-        <p:txBody>
-          <a:bodyPr vert="horz" lIns="91440" tIns="45720" rIns="91440" bIns="45720" rtlCol="0" anchor="b"/>
-          <a:lstStyle>
-            <a:lvl1pPr algn="r">
-              <a:defRPr sz="1200"/>
-            </a:lvl1pPr>
-          </a:lstStyle>
-          <a:p>
-            <a:fld id="{CE5E9CC1-C706-0F49-92D6-E571CC5EEA8F}" type="slidenum">
-              <a:rPr lang="en-US"/>
-              <a:t>‹#›</a:t>
-            </a:fld>
-            <a:endParaRPr lang="en-US"/>
-          </a:p>
-        </p:txBody>
-      </p:sp>
     </p:spTree>
     <p:extLst>
       <p:ext uri="{BB962C8B-B14F-4D97-AF65-F5344CB8AC3E}">
-        <p14:creationId xmlns:p14="http://schemas.microsoft.com/office/powerpoint/2010/main" val="1024086991"/>
+        <p14:creationId xmlns:p14="http://schemas.microsoft.com/office/powerpoint/2010/main" val="2987947137"/>
       </p:ext>
     </p:extLst>
   </p:cSld>
@@ -532,7 +313,6 @@
               <a:rPr lang="en-US" dirty="0"/>
               <a:t>Aula sem elo de continuidade visual — as Aulas 10 e 11 não fazem parte desta série de slides.</a:t>
             </a:r>
-            <a:endParaRPr lang="en-US" dirty="0"/>
           </a:p>
         </p:txBody>
       </p:sp>
@@ -620,7 +400,6 @@
               <a:rPr lang="en-US" dirty="0"/>
               <a:t>Vale para qualquer grafo não dirigido, não importa a forma — é pura contagem.</a:t>
             </a:r>
-            <a:endParaRPr lang="en-US" dirty="0"/>
           </a:p>
         </p:txBody>
       </p:sp>
@@ -708,7 +487,6 @@
               <a:rPr lang="en-US" dirty="0"/>
               <a:t>Guardar este grafo — ele volta nos Exercícios 1 e 2, mais adiante.</a:t>
             </a:r>
-            <a:endParaRPr lang="en-US" dirty="0"/>
           </a:p>
         </p:txBody>
       </p:sp>
@@ -796,7 +574,6 @@
               <a:rPr lang="en-US" dirty="0"/>
               <a:t>Este é o mesmo grafo A-B-C-D do Slide 4, agora em código.</a:t>
             </a:r>
-            <a:endParaRPr lang="en-US" dirty="0"/>
           </a:p>
         </p:txBody>
       </p:sp>
@@ -884,7 +661,6 @@
               <a:rPr lang="en-US" dirty="0"/>
               <a:t>Mesmo grafo A-B-C-D novamente — a diagonal principal é sempre 0 (nenhum vértice tem aresta para si mesmo, aqui).</a:t>
             </a:r>
-            <a:endParaRPr lang="en-US" dirty="0"/>
           </a:p>
         </p:txBody>
       </p:sp>
@@ -972,7 +748,6 @@
               <a:rPr lang="en-US" dirty="0"/>
               <a:t>eh_conexo usa uma busca (DFS) — a mesma ideia volta reforçada no desafio do Exercício 4.</a:t>
             </a:r>
-            <a:endParaRPr lang="en-US" dirty="0"/>
           </a:p>
         </p:txBody>
       </p:sp>
@@ -1060,7 +835,6 @@
               <a:rPr lang="en-US" dirty="0"/>
               <a:t>C tem grau 3 no grafo A-B-C-D: está ligado a A, B e D.</a:t>
             </a:r>
-            <a:endParaRPr lang="en-US" dirty="0"/>
           </a:p>
         </p:txBody>
       </p:sp>
@@ -1148,7 +922,6 @@
               <a:rPr lang="en-US" dirty="0"/>
               <a:t>fronteira.pop() tira do final da lista — é uma pilha, então a busca é em profundidade (DFS).</a:t>
             </a:r>
-            <a:endParaRPr lang="en-US" dirty="0"/>
           </a:p>
         </p:txBody>
       </p:sp>
@@ -1236,7 +1009,6 @@
               <a:rPr lang="en-US" dirty="0"/>
               <a:t>Árvores como caso especial de grafo é um bom gancho — vale reforçar que o vocabulário de hoje (grau, ciclo, conexo) volta lá.</a:t>
             </a:r>
-            <a:endParaRPr lang="en-US" dirty="0"/>
           </a:p>
         </p:txBody>
       </p:sp>
@@ -1324,7 +1096,6 @@
               <a:rPr lang="en-US" dirty="0"/>
               <a:t>Cada exercício tem gabarito no slide seguinte — resolver antes de virar a página.</a:t>
             </a:r>
-            <a:endParaRPr lang="en-US" dirty="0"/>
           </a:p>
         </p:txBody>
       </p:sp>
@@ -1412,7 +1183,6 @@
               <a:rPr lang="en-US" dirty="0"/>
               <a:t>É o mesmo grafo do Slide 11 — a resposta de conexo/ciclo já foi discutida lá.</a:t>
             </a:r>
-            <a:endParaRPr lang="en-US" dirty="0"/>
           </a:p>
         </p:txBody>
       </p:sp>
@@ -1500,7 +1270,6 @@
               <a:rPr lang="en-US" dirty="0"/>
               <a:t>Grafos são o assunto mais visual do curso até aqui — bom momento para desenhar bastante no quadro também.</a:t>
             </a:r>
-            <a:endParaRPr lang="en-US" dirty="0"/>
           </a:p>
         </p:txBody>
       </p:sp>
@@ -1588,7 +1357,6 @@
               <a:rPr lang="en-US" dirty="0"/>
               <a:t>O próprio desenho já mostra o ciclo: é literalmente um quadrado fechado.</a:t>
             </a:r>
-            <a:endParaRPr lang="en-US" dirty="0"/>
           </a:p>
         </p:txBody>
       </p:sp>
@@ -1676,7 +1444,6 @@
               <a:rPr lang="en-US" dirty="0"/>
               <a:t>Deixar a turma preencher e somar as linhas antes de revelar o gabarito.</a:t>
             </a:r>
-            <a:endParaRPr lang="en-US" dirty="0"/>
           </a:p>
         </p:txBody>
       </p:sp>
@@ -1764,7 +1531,6 @@
               <a:rPr lang="en-US" dirty="0"/>
               <a:t>Idêntico ao exemplo do Slide 11 — o mesmo grafo, agora derivado pela turma.</a:t>
             </a:r>
-            <a:endParaRPr lang="en-US" dirty="0"/>
           </a:p>
         </p:txBody>
       </p:sp>
@@ -1852,7 +1618,6 @@
               <a:rPr lang="en-US" dirty="0"/>
               <a:t>Note que aqui, diferente do Slide 8, o grafo fecha em ciclo — mas isso não muda a resposta sobre simetria.</a:t>
             </a:r>
-            <a:endParaRPr lang="en-US" dirty="0"/>
           </a:p>
         </p:txBody>
       </p:sp>
@@ -1940,7 +1705,6 @@
               <a:rPr lang="en-US" dirty="0"/>
               <a:t>Conecta direto com a definição do Slide 3: pares ordenados não são intercambiáveis.</a:t>
             </a:r>
-            <a:endParaRPr lang="en-US" dirty="0"/>
           </a:p>
         </p:txBody>
       </p:sp>
@@ -2028,7 +1792,6 @@
               <a:rPr lang="en-US" dirty="0"/>
               <a:t>O gabarito está no próximo slide — o pulo do gato é o parâmetro 'pai' evitando o falso-positivo de voltar pela mesma aresta.</a:t>
             </a:r>
-            <a:endParaRPr lang="en-US" dirty="0"/>
           </a:p>
         </p:txBody>
       </p:sp>
@@ -2116,7 +1879,6 @@
               <a:rPr lang="en-US" dirty="0"/>
               <a:t>O parâmetro 'pai' é a chave: sem ele, toda aresta pareceria formar um ciclo de tamanho 2 (ida e volta).</a:t>
             </a:r>
-            <a:endParaRPr lang="en-US" dirty="0"/>
           </a:p>
         </p:txBody>
       </p:sp>
@@ -2204,7 +1966,6 @@
               <a:rPr lang="en-US" dirty="0"/>
               <a:t>Goodrich &amp; Tamassia entra pela primeira vez — referência muito prática de estruturas de dados em Python.</a:t>
             </a:r>
-            <a:endParaRPr lang="en-US" dirty="0"/>
           </a:p>
         </p:txBody>
       </p:sp>
@@ -2292,7 +2053,6 @@
               <a:rPr lang="en-US" dirty="0"/>
               <a:t>Links exatamente como fornecidos pelo professor — nenhuma URL foi inventada.</a:t>
             </a:r>
-            <a:endParaRPr lang="en-US" dirty="0"/>
           </a:p>
         </p:txBody>
       </p:sp>
@@ -2380,7 +2140,6 @@
               <a:rPr lang="en-US" dirty="0"/>
               <a:t>Fechamento sem teaser de próxima aula — Aula 12 não deixa pista textual sobre o conteúdo específico da Aula 13.</a:t>
             </a:r>
-            <a:endParaRPr lang="en-US" dirty="0"/>
           </a:p>
         </p:txBody>
       </p:sp>
@@ -2468,7 +2227,6 @@
               <a:rPr lang="en-US" dirty="0"/>
               <a:t>Essa ponte (relação = arestas) é a ideia central que vai justificar tudo o resto da aula.</a:t>
             </a:r>
-            <a:endParaRPr lang="en-US" dirty="0"/>
           </a:p>
         </p:txBody>
       </p:sp>
@@ -2556,7 +2314,6 @@
               <a:rPr lang="en-US" dirty="0"/>
               <a:t>Guardar este diagrama — ele volta com nomes de pessoas no próximo slide.</a:t>
             </a:r>
-            <a:endParaRPr lang="en-US" dirty="0"/>
           </a:p>
         </p:txBody>
       </p:sp>
@@ -2644,7 +2401,6 @@
               <a:rPr lang="en-US" dirty="0"/>
               <a:t>Os três tipos combinam entre si — um grafo pode ser dirigido E ponderado ao mesmo tempo, por exemplo.</a:t>
             </a:r>
-            <a:endParaRPr lang="en-US" dirty="0"/>
           </a:p>
         </p:txBody>
       </p:sp>
@@ -2732,7 +2488,6 @@
               <a:rPr lang="en-US" dirty="0"/>
               <a:t>Essa lista de arestas é o formato mais comum de arquivo de entrada para algoritmos de grafo.</a:t>
             </a:r>
-            <a:endParaRPr lang="en-US" dirty="0"/>
           </a:p>
         </p:txBody>
       </p:sp>
@@ -2820,7 +2575,6 @@
               <a:rPr lang="en-US" dirty="0"/>
               <a:t>É exatamente esse tipo de soma que algoritmos como o de Dijkstra otimizam para achar o caminho mais curto.</a:t>
             </a:r>
-            <a:endParaRPr lang="en-US" dirty="0"/>
           </a:p>
         </p:txBody>
       </p:sp>
@@ -2908,7 +2662,6 @@
               <a:rPr lang="en-US" dirty="0"/>
               <a:t>Este exemplo volta quase igual no Exercício 3, só que fechando um ciclo A→B→C→A.</a:t>
             </a:r>
-            <a:endParaRPr lang="en-US" dirty="0"/>
           </a:p>
         </p:txBody>
       </p:sp>
@@ -2996,7 +2749,6 @@
               <a:rPr lang="en-US" dirty="0"/>
               <a:t>Estes quatro termos aparecem em praticamente todo algoritmo de grafo do resto do curso.</a:t>
             </a:r>
-            <a:endParaRPr lang="en-US" dirty="0"/>
           </a:p>
         </p:txBody>
       </p:sp>
@@ -3069,6 +2821,11 @@
 <file path=ppt/slideMasters/slideMaster1.xml><?xml version="1.0" encoding="utf-8"?>
 <p:sldMaster xmlns:a="http://schemas.openxmlformats.org/drawingml/2006/main" xmlns:r="http://schemas.openxmlformats.org/officeDocument/2006/relationships" xmlns:p="http://schemas.openxmlformats.org/presentationml/2006/main">
   <p:cSld>
+    <p:bg>
+      <p:bgRef idx="1001">
+        <a:schemeClr val="bg1"/>
+      </p:bgRef>
+    </p:bg>
     <p:spTree>
       <p:nvGrpSpPr>
         <p:cNvPr id="1" name=""/>
@@ -3351,6 +3108,7 @@
         <a:solidFill>
           <a:srgbClr val="141B41"/>
         </a:solidFill>
+        <a:effectLst/>
       </p:bgPr>
     </p:bg>
     <p:spTree>
@@ -3417,14 +3175,14 @@
       </p:sp>
       <p:pic>
         <p:nvPicPr>
-          <p:cNvPr id="4" name="Image 0" descr="preencoded.png">    </p:cNvPr>
+          <p:cNvPr id="4" name="Image 0" descr="preencoded.png"/>
           <p:cNvPicPr>
             <a:picLocks noChangeAspect="1"/>
           </p:cNvPicPr>
           <p:nvPr/>
         </p:nvPicPr>
         <p:blipFill>
-          <a:blip r:embed="rId1">
+          <a:blip r:embed="rId3">
             <a:alphaModFix amt="22000"/>
           </a:blip>
           <a:stretch>
@@ -3462,11 +3220,11 @@
           <a:bodyPr wrap="square" lIns="0" tIns="0" rIns="0" bIns="0" rtlCol="0" anchor="ctr"/>
           <a:lstStyle/>
           <a:p>
-            <a:pPr indent="0" marL="0">
-              <a:buNone/>
-            </a:pPr>
-            <a:r>
-              <a:rPr lang="en-US" sz="1400" b="1" spc="300" kern="0" dirty="0">
+            <a:pPr marL="0" indent="0">
+              <a:buNone/>
+            </a:pPr>
+            <a:r>
+              <a:rPr lang="en-US" sz="1400" b="1" kern="0" spc="300" dirty="0">
                 <a:solidFill>
                   <a:srgbClr val="2FE6C7"/>
                 </a:solidFill>
@@ -3501,7 +3259,7 @@
           <a:bodyPr wrap="square" lIns="0" tIns="0" rIns="0" bIns="0" rtlCol="0" anchor="ctr"/>
           <a:lstStyle/>
           <a:p>
-            <a:pPr indent="0" marL="0">
+            <a:pPr marL="0" indent="0">
               <a:buNone/>
             </a:pPr>
             <a:r>
@@ -3540,7 +3298,7 @@
           <a:bodyPr wrap="square" lIns="0" tIns="0" rIns="0" bIns="0" rtlCol="0" anchor="ctr"/>
           <a:lstStyle/>
           <a:p>
-            <a:pPr indent="0" marL="0">
+            <a:pPr marL="0" indent="0">
               <a:buNone/>
             </a:pPr>
             <a:r>
@@ -3579,7 +3337,7 @@
           <a:bodyPr wrap="square" lIns="0" tIns="0" rIns="0" bIns="0" rtlCol="0" anchor="ctr"/>
           <a:lstStyle/>
           <a:p>
-            <a:pPr indent="0" marL="0">
+            <a:pPr marL="0" indent="0">
               <a:lnSpc>
                 <a:spcPts val="1800"/>
               </a:lnSpc>
@@ -3621,7 +3379,7 @@
           <a:bodyPr wrap="square" lIns="0" tIns="0" rIns="0" bIns="0" rtlCol="0" anchor="ctr"/>
           <a:lstStyle/>
           <a:p>
-            <a:pPr indent="0" marL="0">
+            <a:pPr marL="0" indent="0">
               <a:buNone/>
             </a:pPr>
             <a:r>
@@ -3655,6 +3413,7 @@
         <a:solidFill>
           <a:srgbClr val="141B41"/>
         </a:solidFill>
+        <a:effectLst/>
       </p:bgPr>
     </p:bg>
     <p:spTree>
@@ -3716,11 +3475,11 @@
           <a:bodyPr wrap="square" lIns="0" tIns="0" rIns="0" bIns="0" rtlCol="0" anchor="ctr"/>
           <a:lstStyle/>
           <a:p>
-            <a:pPr algn="l" indent="0" marL="0">
-              <a:buNone/>
-            </a:pPr>
-            <a:r>
-              <a:rPr lang="en-US" sz="1200" b="1" spc="200" kern="0" dirty="0">
+            <a:pPr marL="0" indent="0" algn="l">
+              <a:buNone/>
+            </a:pPr>
+            <a:r>
+              <a:rPr lang="en-US" sz="1200" b="1" kern="0" spc="200" dirty="0">
                 <a:solidFill>
                   <a:srgbClr val="2FE6C7"/>
                 </a:solidFill>
@@ -3756,14 +3515,14 @@
       </p:sp>
       <p:pic>
         <p:nvPicPr>
-          <p:cNvPr id="5" name="Image 0" descr="preencoded.png">    </p:cNvPr>
+          <p:cNvPr id="5" name="Image 0" descr="preencoded.png"/>
           <p:cNvPicPr>
             <a:picLocks noChangeAspect="1"/>
           </p:cNvPicPr>
           <p:nvPr/>
         </p:nvPicPr>
         <p:blipFill>
-          <a:blip r:embed="rId1"/>
+          <a:blip r:embed="rId3"/>
           <a:stretch>
             <a:fillRect/>
           </a:stretch>
@@ -3799,7 +3558,7 @@
           <a:bodyPr wrap="square" lIns="0" tIns="0" rIns="0" bIns="0" rtlCol="0" anchor="ctr"/>
           <a:lstStyle/>
           <a:p>
-            <a:pPr algn="ctr" indent="0" marL="0">
+            <a:pPr marL="0" indent="0" algn="ctr">
               <a:buNone/>
             </a:pPr>
             <a:r>
@@ -3865,7 +3624,7 @@
           <a:bodyPr wrap="square" lIns="0" tIns="0" rIns="0" bIns="0" rtlCol="0" anchor="ctr"/>
           <a:lstStyle/>
           <a:p>
-            <a:pPr algn="ctr" indent="0" marL="0">
+            <a:pPr marL="0" indent="0" algn="ctr">
               <a:buNone/>
             </a:pPr>
             <a:r>
@@ -3904,7 +3663,7 @@
           <a:bodyPr wrap="square" lIns="0" tIns="0" rIns="0" bIns="0" rtlCol="0" anchor="ctr"/>
           <a:lstStyle/>
           <a:p>
-            <a:pPr algn="ctr" indent="0" marL="0">
+            <a:pPr marL="0" indent="0" algn="ctr">
               <a:lnSpc>
                 <a:spcPts val="2100"/>
               </a:lnSpc>
@@ -3941,6 +3700,7 @@
         <a:solidFill>
           <a:srgbClr val="FFFFFF"/>
         </a:solidFill>
+        <a:effectLst/>
       </p:bgPr>
     </p:bg>
     <p:spTree>
@@ -3978,11 +3738,11 @@
           <a:bodyPr wrap="square" lIns="0" tIns="0" rIns="0" bIns="0" rtlCol="0" anchor="ctr"/>
           <a:lstStyle/>
           <a:p>
-            <a:pPr algn="l" indent="0" marL="0">
-              <a:buNone/>
-            </a:pPr>
-            <a:r>
-              <a:rPr lang="en-US" sz="1200" b="1" spc="200" kern="0" dirty="0">
+            <a:pPr marL="0" indent="0" algn="l">
+              <a:buNone/>
+            </a:pPr>
+            <a:r>
+              <a:rPr lang="en-US" sz="1200" b="1" kern="0" spc="200" dirty="0">
                 <a:solidFill>
                   <a:srgbClr val="6C4BC1"/>
                 </a:solidFill>
@@ -4017,7 +3777,7 @@
           <a:bodyPr wrap="square" lIns="0" tIns="0" rIns="0" bIns="0" rtlCol="0" anchor="ctr"/>
           <a:lstStyle/>
           <a:p>
-            <a:pPr indent="0" marL="0">
+            <a:pPr marL="0" indent="0">
               <a:buNone/>
             </a:pPr>
             <a:r>
@@ -4056,7 +3816,7 @@
           <a:bodyPr wrap="square" lIns="0" tIns="0" rIns="0" bIns="0" rtlCol="0" anchor="ctr"/>
           <a:lstStyle/>
           <a:p>
-            <a:pPr indent="0" marL="0">
+            <a:pPr marL="0" indent="0">
               <a:buNone/>
             </a:pPr>
             <a:r>
@@ -4212,7 +3972,7 @@
           <a:bodyPr wrap="square" lIns="0" tIns="0" rIns="0" bIns="0" rtlCol="0" anchor="ctr"/>
           <a:lstStyle/>
           <a:p>
-            <a:pPr algn="ctr" indent="0" marL="0">
+            <a:pPr marL="0" indent="0" algn="ctr">
               <a:buNone/>
             </a:pPr>
             <a:r>
@@ -4276,7 +4036,7 @@
           <a:bodyPr wrap="square" lIns="0" tIns="0" rIns="0" bIns="0" rtlCol="0" anchor="ctr"/>
           <a:lstStyle/>
           <a:p>
-            <a:pPr algn="ctr" indent="0" marL="0">
+            <a:pPr marL="0" indent="0" algn="ctr">
               <a:buNone/>
             </a:pPr>
             <a:r>
@@ -4340,7 +4100,7 @@
           <a:bodyPr wrap="square" lIns="0" tIns="0" rIns="0" bIns="0" rtlCol="0" anchor="ctr"/>
           <a:lstStyle/>
           <a:p>
-            <a:pPr algn="ctr" indent="0" marL="0">
+            <a:pPr marL="0" indent="0" algn="ctr">
               <a:buNone/>
             </a:pPr>
             <a:r>
@@ -4404,7 +4164,7 @@
           <a:bodyPr wrap="square" lIns="0" tIns="0" rIns="0" bIns="0" rtlCol="0" anchor="ctr"/>
           <a:lstStyle/>
           <a:p>
-            <a:pPr algn="ctr" indent="0" marL="0">
+            <a:pPr marL="0" indent="0" algn="ctr">
               <a:buNone/>
             </a:pPr>
             <a:r>
@@ -4465,7 +4225,7 @@
           <a:bodyPr wrap="square" lIns="0" tIns="0" rIns="0" bIns="0" rtlCol="0" anchor="ctr"/>
           <a:lstStyle/>
           <a:p>
-            <a:pPr indent="0" marL="0">
+            <a:pPr marL="0" indent="0">
               <a:lnSpc>
                 <a:spcPts val="1600"/>
               </a:lnSpc>
@@ -4485,7 +4245,7 @@
             <a:endParaRPr lang="en-US" sz="1200" dirty="0"/>
           </a:p>
           <a:p>
-            <a:pPr indent="0" marL="0">
+            <a:pPr marL="0" indent="0">
               <a:lnSpc>
                 <a:spcPts val="1600"/>
               </a:lnSpc>
@@ -4505,7 +4265,7 @@
             <a:endParaRPr lang="en-US" sz="1200" dirty="0"/>
           </a:p>
           <a:p>
-            <a:pPr indent="0" marL="0">
+            <a:pPr marL="0" indent="0">
               <a:lnSpc>
                 <a:spcPts val="1600"/>
               </a:lnSpc>
@@ -4569,7 +4329,7 @@
           <a:bodyPr wrap="square" lIns="0" tIns="0" rIns="0" bIns="0" rtlCol="0" anchor="ctr"/>
           <a:lstStyle/>
           <a:p>
-            <a:pPr algn="ctr" indent="0" marL="0">
+            <a:pPr marL="0" indent="0" algn="ctr">
               <a:buNone/>
             </a:pPr>
             <a:r>
@@ -4608,7 +4368,7 @@
           <a:bodyPr wrap="square" lIns="0" tIns="0" rIns="0" bIns="0" rtlCol="0" anchor="ctr"/>
           <a:lstStyle/>
           <a:p>
-            <a:pPr algn="r" indent="0" marL="0">
+            <a:pPr marL="0" indent="0" algn="r">
               <a:buNone/>
             </a:pPr>
             <a:r>
@@ -4642,6 +4402,7 @@
         <a:solidFill>
           <a:srgbClr val="FFFFFF"/>
         </a:solidFill>
+        <a:effectLst/>
       </p:bgPr>
     </p:bg>
     <p:spTree>
@@ -4679,11 +4440,11 @@
           <a:bodyPr wrap="square" lIns="0" tIns="0" rIns="0" bIns="0" rtlCol="0" anchor="ctr"/>
           <a:lstStyle/>
           <a:p>
-            <a:pPr algn="l" indent="0" marL="0">
-              <a:buNone/>
-            </a:pPr>
-            <a:r>
-              <a:rPr lang="en-US" sz="1200" b="1" spc="200" kern="0" dirty="0">
+            <a:pPr marL="0" indent="0" algn="l">
+              <a:buNone/>
+            </a:pPr>
+            <a:r>
+              <a:rPr lang="en-US" sz="1200" b="1" kern="0" spc="200" dirty="0">
                 <a:solidFill>
                   <a:srgbClr val="6C4BC1"/>
                 </a:solidFill>
@@ -4718,7 +4479,7 @@
           <a:bodyPr wrap="square" lIns="0" tIns="0" rIns="0" bIns="0" rtlCol="0" anchor="ctr"/>
           <a:lstStyle/>
           <a:p>
-            <a:pPr indent="0" marL="0">
+            <a:pPr marL="0" indent="0">
               <a:buNone/>
             </a:pPr>
             <a:r>
@@ -4757,7 +4518,7 @@
           <a:bodyPr wrap="square" lIns="0" tIns="0" rIns="0" bIns="0" rtlCol="0" anchor="ctr"/>
           <a:lstStyle/>
           <a:p>
-            <a:pPr indent="0" marL="0">
+            <a:pPr marL="0" indent="0">
               <a:buNone/>
             </a:pPr>
             <a:r>
@@ -4878,7 +4639,7 @@
           <a:bodyPr wrap="square" lIns="0" tIns="0" rIns="0" bIns="0" rtlCol="0" anchor="ctr"/>
           <a:lstStyle/>
           <a:p>
-            <a:pPr indent="0" marL="0">
+            <a:pPr marL="0" indent="0">
               <a:buNone/>
             </a:pPr>
             <a:r>
@@ -4898,14 +4659,14 @@
       </p:sp>
       <p:pic>
         <p:nvPicPr>
-          <p:cNvPr id="10" name="Image 0" descr="preencoded.png">    </p:cNvPr>
+          <p:cNvPr id="10" name="Image 0" descr="preencoded.png"/>
           <p:cNvPicPr>
             <a:picLocks noChangeAspect="1"/>
           </p:cNvPicPr>
           <p:nvPr/>
         </p:nvPicPr>
         <p:blipFill>
-          <a:blip r:embed="rId1"/>
+          <a:blip r:embed="rId3"/>
           <a:stretch>
             <a:fillRect/>
           </a:stretch>
@@ -4941,7 +4702,7 @@
           <a:bodyPr wrap="square" lIns="0" tIns="0" rIns="0" bIns="0" rtlCol="0" anchor="ctr"/>
           <a:lstStyle/>
           <a:p>
-            <a:pPr indent="0" marL="0">
+            <a:pPr marL="0" indent="0">
               <a:buNone/>
             </a:pPr>
             <a:r>
@@ -4955,9 +4716,6 @@
               </a:rPr>
               <a:t>var </a:t>
             </a:r>
-            <a:pPr indent="0" marL="0">
-              <a:buNone/>
-            </a:pPr>
             <a:r>
               <a:rPr lang="en-US" sz="1150" dirty="0">
                 <a:solidFill>
@@ -4969,9 +4727,6 @@
               </a:rPr>
               <a:t>grafo = </a:t>
             </a:r>
-            <a:pPr indent="0" marL="0">
-              <a:buNone/>
-            </a:pPr>
             <a:r>
               <a:rPr lang="en-US" sz="1150" dirty="0">
                 <a:solidFill>
@@ -4983,9 +4738,6 @@
               </a:rPr>
               <a:t>new </a:t>
             </a:r>
-            <a:pPr indent="0" marL="0">
-              <a:buNone/>
-            </a:pPr>
             <a:r>
               <a:rPr lang="en-US" sz="1150" dirty="0">
                 <a:solidFill>
@@ -5022,7 +4774,7 @@
           <a:bodyPr wrap="square" lIns="0" tIns="0" rIns="0" bIns="0" rtlCol="0" anchor="ctr"/>
           <a:lstStyle/>
           <a:p>
-            <a:pPr indent="0" marL="0">
+            <a:pPr marL="0" indent="0">
               <a:buNone/>
             </a:pPr>
             <a:r>
@@ -5036,9 +4788,6 @@
               </a:rPr>
               <a:t>    ["A"] = </a:t>
             </a:r>
-            <a:pPr indent="0" marL="0">
-              <a:buNone/>
-            </a:pPr>
             <a:r>
               <a:rPr lang="en-US" sz="1150" dirty="0">
                 <a:solidFill>
@@ -5050,9 +4799,6 @@
               </a:rPr>
               <a:t>new </a:t>
             </a:r>
-            <a:pPr indent="0" marL="0">
-              <a:buNone/>
-            </a:pPr>
             <a:r>
               <a:rPr lang="en-US" sz="1150" dirty="0">
                 <a:solidFill>
@@ -5089,7 +4835,7 @@
           <a:bodyPr wrap="square" lIns="0" tIns="0" rIns="0" bIns="0" rtlCol="0" anchor="ctr"/>
           <a:lstStyle/>
           <a:p>
-            <a:pPr indent="0" marL="0">
+            <a:pPr marL="0" indent="0">
               <a:buNone/>
             </a:pPr>
             <a:r>
@@ -5103,9 +4849,6 @@
               </a:rPr>
               <a:t>    ["B"] = </a:t>
             </a:r>
-            <a:pPr indent="0" marL="0">
-              <a:buNone/>
-            </a:pPr>
             <a:r>
               <a:rPr lang="en-US" sz="1150" dirty="0">
                 <a:solidFill>
@@ -5117,9 +4860,6 @@
               </a:rPr>
               <a:t>new </a:t>
             </a:r>
-            <a:pPr indent="0" marL="0">
-              <a:buNone/>
-            </a:pPr>
             <a:r>
               <a:rPr lang="en-US" sz="1150" dirty="0">
                 <a:solidFill>
@@ -5156,7 +4896,7 @@
           <a:bodyPr wrap="square" lIns="0" tIns="0" rIns="0" bIns="0" rtlCol="0" anchor="ctr"/>
           <a:lstStyle/>
           <a:p>
-            <a:pPr indent="0" marL="0">
+            <a:pPr marL="0" indent="0">
               <a:buNone/>
             </a:pPr>
             <a:r>
@@ -5170,9 +4910,6 @@
               </a:rPr>
               <a:t>    ["C"] = </a:t>
             </a:r>
-            <a:pPr indent="0" marL="0">
-              <a:buNone/>
-            </a:pPr>
             <a:r>
               <a:rPr lang="en-US" sz="1150" dirty="0">
                 <a:solidFill>
@@ -5184,9 +4921,6 @@
               </a:rPr>
               <a:t>new </a:t>
             </a:r>
-            <a:pPr indent="0" marL="0">
-              <a:buNone/>
-            </a:pPr>
             <a:r>
               <a:rPr lang="en-US" sz="1150" dirty="0">
                 <a:solidFill>
@@ -5223,7 +4957,7 @@
           <a:bodyPr wrap="square" lIns="0" tIns="0" rIns="0" bIns="0" rtlCol="0" anchor="ctr"/>
           <a:lstStyle/>
           <a:p>
-            <a:pPr indent="0" marL="0">
+            <a:pPr marL="0" indent="0">
               <a:buNone/>
             </a:pPr>
             <a:r>
@@ -5237,9 +4971,6 @@
               </a:rPr>
               <a:t>    ["D"] = </a:t>
             </a:r>
-            <a:pPr indent="0" marL="0">
-              <a:buNone/>
-            </a:pPr>
             <a:r>
               <a:rPr lang="en-US" sz="1150" dirty="0">
                 <a:solidFill>
@@ -5251,9 +4982,6 @@
               </a:rPr>
               <a:t>new </a:t>
             </a:r>
-            <a:pPr indent="0" marL="0">
-              <a:buNone/>
-            </a:pPr>
             <a:r>
               <a:rPr lang="en-US" sz="1150" dirty="0">
                 <a:solidFill>
@@ -5290,7 +5018,7 @@
           <a:bodyPr wrap="square" lIns="0" tIns="0" rIns="0" bIns="0" rtlCol="0" anchor="ctr"/>
           <a:lstStyle/>
           <a:p>
-            <a:pPr indent="0" marL="0">
+            <a:pPr marL="0" indent="0">
               <a:buNone/>
             </a:pPr>
             <a:r>
@@ -5411,7 +5139,7 @@
           <a:bodyPr wrap="square" lIns="0" tIns="0" rIns="0" bIns="0" rtlCol="0" anchor="ctr"/>
           <a:lstStyle/>
           <a:p>
-            <a:pPr indent="0" marL="0">
+            <a:pPr marL="0" indent="0">
               <a:buNone/>
             </a:pPr>
             <a:r>
@@ -5431,14 +5159,14 @@
       </p:sp>
       <p:pic>
         <p:nvPicPr>
-          <p:cNvPr id="22" name="Image 1" descr="preencoded.png">    </p:cNvPr>
+          <p:cNvPr id="22" name="Image 1" descr="preencoded.png"/>
           <p:cNvPicPr>
             <a:picLocks noChangeAspect="1"/>
           </p:cNvPicPr>
           <p:nvPr/>
         </p:nvPicPr>
         <p:blipFill>
-          <a:blip r:embed="rId2"/>
+          <a:blip r:embed="rId4"/>
           <a:stretch>
             <a:fillRect/>
           </a:stretch>
@@ -5474,7 +5202,7 @@
           <a:bodyPr wrap="square" lIns="0" tIns="0" rIns="0" bIns="0" rtlCol="0" anchor="ctr"/>
           <a:lstStyle/>
           <a:p>
-            <a:pPr indent="0" marL="0">
+            <a:pPr marL="0" indent="0">
               <a:buNone/>
             </a:pPr>
             <a:r>
@@ -5513,7 +5241,7 @@
           <a:bodyPr wrap="square" lIns="0" tIns="0" rIns="0" bIns="0" rtlCol="0" anchor="ctr"/>
           <a:lstStyle/>
           <a:p>
-            <a:pPr indent="0" marL="0">
+            <a:pPr marL="0" indent="0">
               <a:buNone/>
             </a:pPr>
             <a:r>
@@ -5552,7 +5280,7 @@
           <a:bodyPr wrap="square" lIns="0" tIns="0" rIns="0" bIns="0" rtlCol="0" anchor="ctr"/>
           <a:lstStyle/>
           <a:p>
-            <a:pPr indent="0" marL="0">
+            <a:pPr marL="0" indent="0">
               <a:buNone/>
             </a:pPr>
             <a:r>
@@ -5591,7 +5319,7 @@
           <a:bodyPr wrap="square" lIns="0" tIns="0" rIns="0" bIns="0" rtlCol="0" anchor="ctr"/>
           <a:lstStyle/>
           <a:p>
-            <a:pPr indent="0" marL="0">
+            <a:pPr marL="0" indent="0">
               <a:buNone/>
             </a:pPr>
             <a:r>
@@ -5630,7 +5358,7 @@
           <a:bodyPr wrap="square" lIns="0" tIns="0" rIns="0" bIns="0" rtlCol="0" anchor="ctr"/>
           <a:lstStyle/>
           <a:p>
-            <a:pPr indent="0" marL="0">
+            <a:pPr marL="0" indent="0">
               <a:buNone/>
             </a:pPr>
             <a:r>
@@ -5669,7 +5397,7 @@
           <a:bodyPr wrap="square" lIns="0" tIns="0" rIns="0" bIns="0" rtlCol="0" anchor="ctr"/>
           <a:lstStyle/>
           <a:p>
-            <a:pPr indent="0" marL="0">
+            <a:pPr marL="0" indent="0">
               <a:buNone/>
             </a:pPr>
             <a:r>
@@ -5708,7 +5436,7 @@
           <a:bodyPr wrap="square" lIns="0" tIns="0" rIns="0" bIns="0" rtlCol="0" anchor="ctr"/>
           <a:lstStyle/>
           <a:p>
-            <a:pPr algn="r" indent="0" marL="0">
+            <a:pPr marL="0" indent="0" algn="r">
               <a:buNone/>
             </a:pPr>
             <a:r>
@@ -5742,6 +5470,7 @@
         <a:solidFill>
           <a:srgbClr val="FFFFFF"/>
         </a:solidFill>
+        <a:effectLst/>
       </p:bgPr>
     </p:bg>
     <p:spTree>
@@ -5779,11 +5508,11 @@
           <a:bodyPr wrap="square" lIns="0" tIns="0" rIns="0" bIns="0" rtlCol="0" anchor="ctr"/>
           <a:lstStyle/>
           <a:p>
-            <a:pPr algn="l" indent="0" marL="0">
-              <a:buNone/>
-            </a:pPr>
-            <a:r>
-              <a:rPr lang="en-US" sz="1200" b="1" spc="200" kern="0" dirty="0">
+            <a:pPr marL="0" indent="0" algn="l">
+              <a:buNone/>
+            </a:pPr>
+            <a:r>
+              <a:rPr lang="en-US" sz="1200" b="1" kern="0" spc="200" dirty="0">
                 <a:solidFill>
                   <a:srgbClr val="6C4BC1"/>
                 </a:solidFill>
@@ -5818,7 +5547,7 @@
           <a:bodyPr wrap="square" lIns="0" tIns="0" rIns="0" bIns="0" rtlCol="0" anchor="ctr"/>
           <a:lstStyle/>
           <a:p>
-            <a:pPr indent="0" marL="0">
+            <a:pPr marL="0" indent="0">
               <a:buNone/>
             </a:pPr>
             <a:r>
@@ -5857,7 +5586,7 @@
           <a:bodyPr wrap="square" lIns="0" tIns="0" rIns="0" bIns="0" rtlCol="0" anchor="ctr"/>
           <a:lstStyle/>
           <a:p>
-            <a:pPr indent="0" marL="0">
+            <a:pPr marL="0" indent="0">
               <a:buNone/>
             </a:pPr>
             <a:r>
@@ -5898,11 +5627,41 @@
             <a:tbl>
               <a:tblPr/>
               <a:tblGrid>
-                <a:gridCol w="1005840"/>
-                <a:gridCol w="1005840"/>
-                <a:gridCol w="1005840"/>
-                <a:gridCol w="1005840"/>
-                <a:gridCol w="1005840"/>
+                <a:gridCol w="1005840">
+                  <a:extLst>
+                    <a:ext uri="{9D8B030D-6E8A-4147-A177-3AD203B41FA5}">
+                      <a16:colId xmlns:a16="http://schemas.microsoft.com/office/drawing/2014/main" val="20000"/>
+                    </a:ext>
+                  </a:extLst>
+                </a:gridCol>
+                <a:gridCol w="1005840">
+                  <a:extLst>
+                    <a:ext uri="{9D8B030D-6E8A-4147-A177-3AD203B41FA5}">
+                      <a16:colId xmlns:a16="http://schemas.microsoft.com/office/drawing/2014/main" val="20001"/>
+                    </a:ext>
+                  </a:extLst>
+                </a:gridCol>
+                <a:gridCol w="1005840">
+                  <a:extLst>
+                    <a:ext uri="{9D8B030D-6E8A-4147-A177-3AD203B41FA5}">
+                      <a16:colId xmlns:a16="http://schemas.microsoft.com/office/drawing/2014/main" val="20002"/>
+                    </a:ext>
+                  </a:extLst>
+                </a:gridCol>
+                <a:gridCol w="1005840">
+                  <a:extLst>
+                    <a:ext uri="{9D8B030D-6E8A-4147-A177-3AD203B41FA5}">
+                      <a16:colId xmlns:a16="http://schemas.microsoft.com/office/drawing/2014/main" val="20003"/>
+                    </a:ext>
+                  </a:extLst>
+                </a:gridCol>
+                <a:gridCol w="1005840">
+                  <a:extLst>
+                    <a:ext uri="{9D8B030D-6E8A-4147-A177-3AD203B41FA5}">
+                      <a16:colId xmlns:a16="http://schemas.microsoft.com/office/drawing/2014/main" val="20004"/>
+                    </a:ext>
+                  </a:extLst>
+                </a:gridCol>
               </a:tblGrid>
               <a:tr h="502920">
                 <a:tc>
@@ -5910,7 +5669,7 @@
                     <a:bodyPr/>
                     <a:lstStyle/>
                     <a:p>
-                      <a:pPr algn="ctr" indent="0" marL="0">
+                      <a:pPr marL="0" indent="0" algn="ctr">
                         <a:buNone/>
                       </a:pPr>
                       <a:endParaRPr lang="en-US" sz="1100" dirty="0">
@@ -5920,7 +5679,7 @@
                       </a:endParaRPr>
                     </a:p>
                   </a:txBody>
-                  <a:tcPr marL="91440" marR="91440" marT="45720" marB="45720" anchor="ctr">
+                  <a:tcPr anchor="ctr">
                     <a:lnL w="38100" cap="flat" cmpd="sng" algn="ctr">
                       <a:solidFill>
                         <a:srgbClr val="FFFFFF"/>
@@ -5967,7 +5726,7 @@
                     <a:bodyPr/>
                     <a:lstStyle/>
                     <a:p>
-                      <a:pPr algn="ctr" indent="0" marL="0">
+                      <a:pPr marL="0" indent="0" algn="ctr">
                         <a:buNone/>
                       </a:pPr>
                       <a:r>
@@ -5988,7 +5747,7 @@
                       </a:endParaRPr>
                     </a:p>
                   </a:txBody>
-                  <a:tcPr marL="91440" marR="91440" marT="45720" marB="45720" anchor="ctr">
+                  <a:tcPr anchor="ctr">
                     <a:lnL w="38100" cap="flat" cmpd="sng" algn="ctr">
                       <a:solidFill>
                         <a:srgbClr val="FFFFFF"/>
@@ -6035,7 +5794,7 @@
                     <a:bodyPr/>
                     <a:lstStyle/>
                     <a:p>
-                      <a:pPr algn="ctr" indent="0" marL="0">
+                      <a:pPr marL="0" indent="0" algn="ctr">
                         <a:buNone/>
                       </a:pPr>
                       <a:r>
@@ -6056,7 +5815,7 @@
                       </a:endParaRPr>
                     </a:p>
                   </a:txBody>
-                  <a:tcPr marL="91440" marR="91440" marT="45720" marB="45720" anchor="ctr">
+                  <a:tcPr anchor="ctr">
                     <a:lnL w="38100" cap="flat" cmpd="sng" algn="ctr">
                       <a:solidFill>
                         <a:srgbClr val="FFFFFF"/>
@@ -6103,7 +5862,7 @@
                     <a:bodyPr/>
                     <a:lstStyle/>
                     <a:p>
-                      <a:pPr algn="ctr" indent="0" marL="0">
+                      <a:pPr marL="0" indent="0" algn="ctr">
                         <a:buNone/>
                       </a:pPr>
                       <a:r>
@@ -6124,7 +5883,7 @@
                       </a:endParaRPr>
                     </a:p>
                   </a:txBody>
-                  <a:tcPr marL="91440" marR="91440" marT="45720" marB="45720" anchor="ctr">
+                  <a:tcPr anchor="ctr">
                     <a:lnL w="38100" cap="flat" cmpd="sng" algn="ctr">
                       <a:solidFill>
                         <a:srgbClr val="FFFFFF"/>
@@ -6171,7 +5930,7 @@
                     <a:bodyPr/>
                     <a:lstStyle/>
                     <a:p>
-                      <a:pPr algn="ctr" indent="0" marL="0">
+                      <a:pPr marL="0" indent="0" algn="ctr">
                         <a:buNone/>
                       </a:pPr>
                       <a:r>
@@ -6192,7 +5951,7 @@
                       </a:endParaRPr>
                     </a:p>
                   </a:txBody>
-                  <a:tcPr marL="91440" marR="91440" marT="45720" marB="45720" anchor="ctr">
+                  <a:tcPr anchor="ctr">
                     <a:lnL w="38100" cap="flat" cmpd="sng" algn="ctr">
                       <a:solidFill>
                         <a:srgbClr val="FFFFFF"/>
@@ -6234,6 +5993,11 @@
                     </a:solidFill>
                   </a:tcPr>
                 </a:tc>
+                <a:extLst>
+                  <a:ext uri="{0D108BD9-81ED-4DB2-BD59-A6C34878D82A}">
+                    <a16:rowId xmlns:a16="http://schemas.microsoft.com/office/drawing/2014/main" val="10000"/>
+                  </a:ext>
+                </a:extLst>
               </a:tr>
               <a:tr h="685800">
                 <a:tc>
@@ -6241,7 +6005,7 @@
                     <a:bodyPr/>
                     <a:lstStyle/>
                     <a:p>
-                      <a:pPr algn="ctr" indent="0" marL="0">
+                      <a:pPr marL="0" indent="0" algn="ctr">
                         <a:buNone/>
                       </a:pPr>
                       <a:r>
@@ -6262,7 +6026,7 @@
                       </a:endParaRPr>
                     </a:p>
                   </a:txBody>
-                  <a:tcPr marL="91440" marR="91440" marT="45720" marB="45720" anchor="ctr">
+                  <a:tcPr anchor="ctr">
                     <a:lnL w="38100" cap="flat" cmpd="sng" algn="ctr">
                       <a:solidFill>
                         <a:srgbClr val="FFFFFF"/>
@@ -6309,7 +6073,7 @@
                     <a:bodyPr/>
                     <a:lstStyle/>
                     <a:p>
-                      <a:pPr algn="ctr" indent="0" marL="0">
+                      <a:pPr marL="0" indent="0" algn="ctr">
                         <a:buNone/>
                       </a:pPr>
                       <a:r>
@@ -6330,7 +6094,7 @@
                       </a:endParaRPr>
                     </a:p>
                   </a:txBody>
-                  <a:tcPr marL="91440" marR="91440" marT="45720" marB="45720" anchor="ctr">
+                  <a:tcPr anchor="ctr">
                     <a:lnL w="38100" cap="flat" cmpd="sng" algn="ctr">
                       <a:solidFill>
                         <a:srgbClr val="FFFFFF"/>
@@ -6377,7 +6141,7 @@
                     <a:bodyPr/>
                     <a:lstStyle/>
                     <a:p>
-                      <a:pPr algn="ctr" indent="0" marL="0">
+                      <a:pPr marL="0" indent="0" algn="ctr">
                         <a:buNone/>
                       </a:pPr>
                       <a:r>
@@ -6398,7 +6162,7 @@
                       </a:endParaRPr>
                     </a:p>
                   </a:txBody>
-                  <a:tcPr marL="91440" marR="91440" marT="45720" marB="45720" anchor="ctr">
+                  <a:tcPr anchor="ctr">
                     <a:lnL w="38100" cap="flat" cmpd="sng" algn="ctr">
                       <a:solidFill>
                         <a:srgbClr val="FFFFFF"/>
@@ -6445,7 +6209,7 @@
                     <a:bodyPr/>
                     <a:lstStyle/>
                     <a:p>
-                      <a:pPr algn="ctr" indent="0" marL="0">
+                      <a:pPr marL="0" indent="0" algn="ctr">
                         <a:buNone/>
                       </a:pPr>
                       <a:r>
@@ -6466,7 +6230,7 @@
                       </a:endParaRPr>
                     </a:p>
                   </a:txBody>
-                  <a:tcPr marL="91440" marR="91440" marT="45720" marB="45720" anchor="ctr">
+                  <a:tcPr anchor="ctr">
                     <a:lnL w="38100" cap="flat" cmpd="sng" algn="ctr">
                       <a:solidFill>
                         <a:srgbClr val="FFFFFF"/>
@@ -6513,7 +6277,7 @@
                     <a:bodyPr/>
                     <a:lstStyle/>
                     <a:p>
-                      <a:pPr algn="ctr" indent="0" marL="0">
+                      <a:pPr marL="0" indent="0" algn="ctr">
                         <a:buNone/>
                       </a:pPr>
                       <a:r>
@@ -6534,7 +6298,7 @@
                       </a:endParaRPr>
                     </a:p>
                   </a:txBody>
-                  <a:tcPr marL="91440" marR="91440" marT="45720" marB="45720" anchor="ctr">
+                  <a:tcPr anchor="ctr">
                     <a:lnL w="38100" cap="flat" cmpd="sng" algn="ctr">
                       <a:solidFill>
                         <a:srgbClr val="FFFFFF"/>
@@ -6576,6 +6340,11 @@
                     </a:solidFill>
                   </a:tcPr>
                 </a:tc>
+                <a:extLst>
+                  <a:ext uri="{0D108BD9-81ED-4DB2-BD59-A6C34878D82A}">
+                    <a16:rowId xmlns:a16="http://schemas.microsoft.com/office/drawing/2014/main" val="10001"/>
+                  </a:ext>
+                </a:extLst>
               </a:tr>
               <a:tr h="685800">
                 <a:tc>
@@ -6583,7 +6352,7 @@
                     <a:bodyPr/>
                     <a:lstStyle/>
                     <a:p>
-                      <a:pPr algn="ctr" indent="0" marL="0">
+                      <a:pPr marL="0" indent="0" algn="ctr">
                         <a:buNone/>
                       </a:pPr>
                       <a:r>
@@ -6604,7 +6373,7 @@
                       </a:endParaRPr>
                     </a:p>
                   </a:txBody>
-                  <a:tcPr marL="91440" marR="91440" marT="45720" marB="45720" anchor="ctr">
+                  <a:tcPr anchor="ctr">
                     <a:lnL w="38100" cap="flat" cmpd="sng" algn="ctr">
                       <a:solidFill>
                         <a:srgbClr val="FFFFFF"/>
@@ -6651,7 +6420,7 @@
                     <a:bodyPr/>
                     <a:lstStyle/>
                     <a:p>
-                      <a:pPr algn="ctr" indent="0" marL="0">
+                      <a:pPr marL="0" indent="0" algn="ctr">
                         <a:buNone/>
                       </a:pPr>
                       <a:r>
@@ -6672,7 +6441,7 @@
                       </a:endParaRPr>
                     </a:p>
                   </a:txBody>
-                  <a:tcPr marL="91440" marR="91440" marT="45720" marB="45720" anchor="ctr">
+                  <a:tcPr anchor="ctr">
                     <a:lnL w="38100" cap="flat" cmpd="sng" algn="ctr">
                       <a:solidFill>
                         <a:srgbClr val="FFFFFF"/>
@@ -6719,7 +6488,7 @@
                     <a:bodyPr/>
                     <a:lstStyle/>
                     <a:p>
-                      <a:pPr algn="ctr" indent="0" marL="0">
+                      <a:pPr marL="0" indent="0" algn="ctr">
                         <a:buNone/>
                       </a:pPr>
                       <a:r>
@@ -6740,7 +6509,7 @@
                       </a:endParaRPr>
                     </a:p>
                   </a:txBody>
-                  <a:tcPr marL="91440" marR="91440" marT="45720" marB="45720" anchor="ctr">
+                  <a:tcPr anchor="ctr">
                     <a:lnL w="38100" cap="flat" cmpd="sng" algn="ctr">
                       <a:solidFill>
                         <a:srgbClr val="FFFFFF"/>
@@ -6787,7 +6556,7 @@
                     <a:bodyPr/>
                     <a:lstStyle/>
                     <a:p>
-                      <a:pPr algn="ctr" indent="0" marL="0">
+                      <a:pPr marL="0" indent="0" algn="ctr">
                         <a:buNone/>
                       </a:pPr>
                       <a:r>
@@ -6808,7 +6577,7 @@
                       </a:endParaRPr>
                     </a:p>
                   </a:txBody>
-                  <a:tcPr marL="91440" marR="91440" marT="45720" marB="45720" anchor="ctr">
+                  <a:tcPr anchor="ctr">
                     <a:lnL w="38100" cap="flat" cmpd="sng" algn="ctr">
                       <a:solidFill>
                         <a:srgbClr val="FFFFFF"/>
@@ -6855,7 +6624,7 @@
                     <a:bodyPr/>
                     <a:lstStyle/>
                     <a:p>
-                      <a:pPr algn="ctr" indent="0" marL="0">
+                      <a:pPr marL="0" indent="0" algn="ctr">
                         <a:buNone/>
                       </a:pPr>
                       <a:r>
@@ -6876,7 +6645,7 @@
                       </a:endParaRPr>
                     </a:p>
                   </a:txBody>
-                  <a:tcPr marL="91440" marR="91440" marT="45720" marB="45720" anchor="ctr">
+                  <a:tcPr anchor="ctr">
                     <a:lnL w="38100" cap="flat" cmpd="sng" algn="ctr">
                       <a:solidFill>
                         <a:srgbClr val="FFFFFF"/>
@@ -6918,6 +6687,11 @@
                     </a:solidFill>
                   </a:tcPr>
                 </a:tc>
+                <a:extLst>
+                  <a:ext uri="{0D108BD9-81ED-4DB2-BD59-A6C34878D82A}">
+                    <a16:rowId xmlns:a16="http://schemas.microsoft.com/office/drawing/2014/main" val="10002"/>
+                  </a:ext>
+                </a:extLst>
               </a:tr>
               <a:tr h="685800">
                 <a:tc>
@@ -6925,7 +6699,7 @@
                     <a:bodyPr/>
                     <a:lstStyle/>
                     <a:p>
-                      <a:pPr algn="ctr" indent="0" marL="0">
+                      <a:pPr marL="0" indent="0" algn="ctr">
                         <a:buNone/>
                       </a:pPr>
                       <a:r>
@@ -6946,7 +6720,7 @@
                       </a:endParaRPr>
                     </a:p>
                   </a:txBody>
-                  <a:tcPr marL="91440" marR="91440" marT="45720" marB="45720" anchor="ctr">
+                  <a:tcPr anchor="ctr">
                     <a:lnL w="38100" cap="flat" cmpd="sng" algn="ctr">
                       <a:solidFill>
                         <a:srgbClr val="FFFFFF"/>
@@ -6993,7 +6767,7 @@
                     <a:bodyPr/>
                     <a:lstStyle/>
                     <a:p>
-                      <a:pPr algn="ctr" indent="0" marL="0">
+                      <a:pPr marL="0" indent="0" algn="ctr">
                         <a:buNone/>
                       </a:pPr>
                       <a:r>
@@ -7014,7 +6788,7 @@
                       </a:endParaRPr>
                     </a:p>
                   </a:txBody>
-                  <a:tcPr marL="91440" marR="91440" marT="45720" marB="45720" anchor="ctr">
+                  <a:tcPr anchor="ctr">
                     <a:lnL w="38100" cap="flat" cmpd="sng" algn="ctr">
                       <a:solidFill>
                         <a:srgbClr val="FFFFFF"/>
@@ -7061,7 +6835,7 @@
                     <a:bodyPr/>
                     <a:lstStyle/>
                     <a:p>
-                      <a:pPr algn="ctr" indent="0" marL="0">
+                      <a:pPr marL="0" indent="0" algn="ctr">
                         <a:buNone/>
                       </a:pPr>
                       <a:r>
@@ -7082,7 +6856,7 @@
                       </a:endParaRPr>
                     </a:p>
                   </a:txBody>
-                  <a:tcPr marL="91440" marR="91440" marT="45720" marB="45720" anchor="ctr">
+                  <a:tcPr anchor="ctr">
                     <a:lnL w="38100" cap="flat" cmpd="sng" algn="ctr">
                       <a:solidFill>
                         <a:srgbClr val="FFFFFF"/>
@@ -7129,7 +6903,7 @@
                     <a:bodyPr/>
                     <a:lstStyle/>
                     <a:p>
-                      <a:pPr algn="ctr" indent="0" marL="0">
+                      <a:pPr marL="0" indent="0" algn="ctr">
                         <a:buNone/>
                       </a:pPr>
                       <a:r>
@@ -7150,7 +6924,7 @@
                       </a:endParaRPr>
                     </a:p>
                   </a:txBody>
-                  <a:tcPr marL="91440" marR="91440" marT="45720" marB="45720" anchor="ctr">
+                  <a:tcPr anchor="ctr">
                     <a:lnL w="38100" cap="flat" cmpd="sng" algn="ctr">
                       <a:solidFill>
                         <a:srgbClr val="FFFFFF"/>
@@ -7197,7 +6971,7 @@
                     <a:bodyPr/>
                     <a:lstStyle/>
                     <a:p>
-                      <a:pPr algn="ctr" indent="0" marL="0">
+                      <a:pPr marL="0" indent="0" algn="ctr">
                         <a:buNone/>
                       </a:pPr>
                       <a:r>
@@ -7218,7 +6992,7 @@
                       </a:endParaRPr>
                     </a:p>
                   </a:txBody>
-                  <a:tcPr marL="91440" marR="91440" marT="45720" marB="45720" anchor="ctr">
+                  <a:tcPr anchor="ctr">
                     <a:lnL w="38100" cap="flat" cmpd="sng" algn="ctr">
                       <a:solidFill>
                         <a:srgbClr val="FFFFFF"/>
@@ -7260,6 +7034,11 @@
                     </a:solidFill>
                   </a:tcPr>
                 </a:tc>
+                <a:extLst>
+                  <a:ext uri="{0D108BD9-81ED-4DB2-BD59-A6C34878D82A}">
+                    <a16:rowId xmlns:a16="http://schemas.microsoft.com/office/drawing/2014/main" val="10003"/>
+                  </a:ext>
+                </a:extLst>
               </a:tr>
               <a:tr h="685800">
                 <a:tc>
@@ -7267,7 +7046,7 @@
                     <a:bodyPr/>
                     <a:lstStyle/>
                     <a:p>
-                      <a:pPr algn="ctr" indent="0" marL="0">
+                      <a:pPr marL="0" indent="0" algn="ctr">
                         <a:buNone/>
                       </a:pPr>
                       <a:r>
@@ -7288,7 +7067,7 @@
                       </a:endParaRPr>
                     </a:p>
                   </a:txBody>
-                  <a:tcPr marL="91440" marR="91440" marT="45720" marB="45720" anchor="ctr">
+                  <a:tcPr anchor="ctr">
                     <a:lnL w="38100" cap="flat" cmpd="sng" algn="ctr">
                       <a:solidFill>
                         <a:srgbClr val="FFFFFF"/>
@@ -7335,7 +7114,7 @@
                     <a:bodyPr/>
                     <a:lstStyle/>
                     <a:p>
-                      <a:pPr algn="ctr" indent="0" marL="0">
+                      <a:pPr marL="0" indent="0" algn="ctr">
                         <a:buNone/>
                       </a:pPr>
                       <a:r>
@@ -7356,7 +7135,7 @@
                       </a:endParaRPr>
                     </a:p>
                   </a:txBody>
-                  <a:tcPr marL="91440" marR="91440" marT="45720" marB="45720" anchor="ctr">
+                  <a:tcPr anchor="ctr">
                     <a:lnL w="38100" cap="flat" cmpd="sng" algn="ctr">
                       <a:solidFill>
                         <a:srgbClr val="FFFFFF"/>
@@ -7403,7 +7182,7 @@
                     <a:bodyPr/>
                     <a:lstStyle/>
                     <a:p>
-                      <a:pPr algn="ctr" indent="0" marL="0">
+                      <a:pPr marL="0" indent="0" algn="ctr">
                         <a:buNone/>
                       </a:pPr>
                       <a:r>
@@ -7424,7 +7203,7 @@
                       </a:endParaRPr>
                     </a:p>
                   </a:txBody>
-                  <a:tcPr marL="91440" marR="91440" marT="45720" marB="45720" anchor="ctr">
+                  <a:tcPr anchor="ctr">
                     <a:lnL w="38100" cap="flat" cmpd="sng" algn="ctr">
                       <a:solidFill>
                         <a:srgbClr val="FFFFFF"/>
@@ -7471,7 +7250,7 @@
                     <a:bodyPr/>
                     <a:lstStyle/>
                     <a:p>
-                      <a:pPr algn="ctr" indent="0" marL="0">
+                      <a:pPr marL="0" indent="0" algn="ctr">
                         <a:buNone/>
                       </a:pPr>
                       <a:r>
@@ -7492,7 +7271,7 @@
                       </a:endParaRPr>
                     </a:p>
                   </a:txBody>
-                  <a:tcPr marL="91440" marR="91440" marT="45720" marB="45720" anchor="ctr">
+                  <a:tcPr anchor="ctr">
                     <a:lnL w="38100" cap="flat" cmpd="sng" algn="ctr">
                       <a:solidFill>
                         <a:srgbClr val="FFFFFF"/>
@@ -7539,7 +7318,7 @@
                     <a:bodyPr/>
                     <a:lstStyle/>
                     <a:p>
-                      <a:pPr algn="ctr" indent="0" marL="0">
+                      <a:pPr marL="0" indent="0" algn="ctr">
                         <a:buNone/>
                       </a:pPr>
                       <a:r>
@@ -7560,7 +7339,7 @@
                       </a:endParaRPr>
                     </a:p>
                   </a:txBody>
-                  <a:tcPr marL="91440" marR="91440" marT="45720" marB="45720" anchor="ctr">
+                  <a:tcPr anchor="ctr">
                     <a:lnL w="38100" cap="flat" cmpd="sng" algn="ctr">
                       <a:solidFill>
                         <a:srgbClr val="FFFFFF"/>
@@ -7602,6 +7381,11 @@
                     </a:solidFill>
                   </a:tcPr>
                 </a:tc>
+                <a:extLst>
+                  <a:ext uri="{0D108BD9-81ED-4DB2-BD59-A6C34878D82A}">
+                    <a16:rowId xmlns:a16="http://schemas.microsoft.com/office/drawing/2014/main" val="10004"/>
+                  </a:ext>
+                </a:extLst>
               </a:tr>
             </a:tbl>
           </a:graphicData>
@@ -7628,7 +7412,7 @@
           <a:bodyPr wrap="square" lIns="0" tIns="0" rIns="0" bIns="0" rtlCol="0" anchor="ctr"/>
           <a:lstStyle/>
           <a:p>
-            <a:pPr algn="ctr" indent="0" marL="0">
+            <a:pPr marL="0" indent="0" algn="ctr">
               <a:buNone/>
             </a:pPr>
             <a:r>
@@ -7667,7 +7451,7 @@
           <a:bodyPr wrap="square" lIns="0" tIns="0" rIns="0" bIns="0" rtlCol="0" anchor="ctr"/>
           <a:lstStyle/>
           <a:p>
-            <a:pPr algn="r" indent="0" marL="0">
+            <a:pPr marL="0" indent="0" algn="r">
               <a:buNone/>
             </a:pPr>
             <a:r>
@@ -7701,6 +7485,7 @@
         <a:solidFill>
           <a:srgbClr val="6C4BC1"/>
         </a:solidFill>
+        <a:effectLst/>
       </p:bgPr>
     </p:bg>
     <p:spTree>
@@ -7787,14 +7572,14 @@
       </p:sp>
       <p:pic>
         <p:nvPicPr>
-          <p:cNvPr id="5" name="Image 0" descr="preencoded.png">    </p:cNvPr>
+          <p:cNvPr id="5" name="Image 0" descr="preencoded.png"/>
           <p:cNvPicPr>
             <a:picLocks noChangeAspect="1"/>
           </p:cNvPicPr>
           <p:nvPr/>
         </p:nvPicPr>
         <p:blipFill>
-          <a:blip r:embed="rId1"/>
+          <a:blip r:embed="rId3"/>
           <a:stretch>
             <a:fillRect/>
           </a:stretch>
@@ -7830,7 +7615,7 @@
           <a:bodyPr wrap="square" lIns="0" tIns="0" rIns="0" bIns="0" rtlCol="0" anchor="ctr"/>
           <a:lstStyle/>
           <a:p>
-            <a:pPr algn="ctr" indent="0" marL="0">
+            <a:pPr marL="0" indent="0" algn="ctr">
               <a:buNone/>
             </a:pPr>
             <a:r>
@@ -7869,7 +7654,7 @@
           <a:bodyPr wrap="square" lIns="0" tIns="0" rIns="0" bIns="0" rtlCol="0" anchor="ctr"/>
           <a:lstStyle/>
           <a:p>
-            <a:pPr algn="ctr" indent="0" marL="0">
+            <a:pPr marL="0" indent="0" algn="ctr">
               <a:lnSpc>
                 <a:spcPts val="2200"/>
               </a:lnSpc>
@@ -7906,6 +7691,7 @@
         <a:solidFill>
           <a:srgbClr val="FFFFFF"/>
         </a:solidFill>
+        <a:effectLst/>
       </p:bgPr>
     </p:bg>
     <p:spTree>
@@ -7943,11 +7729,11 @@
           <a:bodyPr wrap="square" lIns="0" tIns="0" rIns="0" bIns="0" rtlCol="0" anchor="ctr"/>
           <a:lstStyle/>
           <a:p>
-            <a:pPr algn="l" indent="0" marL="0">
-              <a:buNone/>
-            </a:pPr>
-            <a:r>
-              <a:rPr lang="en-US" sz="1200" b="1" spc="200" kern="0" dirty="0">
+            <a:pPr marL="0" indent="0" algn="l">
+              <a:buNone/>
+            </a:pPr>
+            <a:r>
+              <a:rPr lang="en-US" sz="1200" b="1" kern="0" spc="200" dirty="0">
                 <a:solidFill>
                   <a:srgbClr val="6C4BC1"/>
                 </a:solidFill>
@@ -7982,7 +7768,7 @@
           <a:bodyPr wrap="square" lIns="0" tIns="0" rIns="0" bIns="0" rtlCol="0" anchor="ctr"/>
           <a:lstStyle/>
           <a:p>
-            <a:pPr indent="0" marL="0">
+            <a:pPr marL="0" indent="0">
               <a:buNone/>
             </a:pPr>
             <a:r>
@@ -8021,7 +7807,7 @@
           <a:bodyPr wrap="square" lIns="0" tIns="0" rIns="0" bIns="0" rtlCol="0" anchor="ctr"/>
           <a:lstStyle/>
           <a:p>
-            <a:pPr indent="0" marL="0">
+            <a:pPr marL="0" indent="0">
               <a:buNone/>
             </a:pPr>
             <a:r>
@@ -8142,7 +7928,7 @@
           <a:bodyPr wrap="square" lIns="0" tIns="0" rIns="0" bIns="0" rtlCol="0" anchor="ctr"/>
           <a:lstStyle/>
           <a:p>
-            <a:pPr indent="0" marL="0">
+            <a:pPr marL="0" indent="0">
               <a:buNone/>
             </a:pPr>
             <a:r>
@@ -8162,14 +7948,14 @@
       </p:sp>
       <p:pic>
         <p:nvPicPr>
-          <p:cNvPr id="10" name="Image 0" descr="preencoded.png">    </p:cNvPr>
+          <p:cNvPr id="10" name="Image 0" descr="preencoded.png"/>
           <p:cNvPicPr>
             <a:picLocks noChangeAspect="1"/>
           </p:cNvPicPr>
           <p:nvPr/>
         </p:nvPicPr>
         <p:blipFill>
-          <a:blip r:embed="rId1"/>
+          <a:blip r:embed="rId3"/>
           <a:stretch>
             <a:fillRect/>
           </a:stretch>
@@ -8205,7 +7991,7 @@
           <a:bodyPr wrap="square" lIns="0" tIns="0" rIns="0" bIns="0" rtlCol="0" anchor="ctr"/>
           <a:lstStyle/>
           <a:p>
-            <a:pPr indent="0" marL="0">
+            <a:pPr marL="0" indent="0">
               <a:buNone/>
             </a:pPr>
             <a:r>
@@ -8219,9 +8005,6 @@
               </a:rPr>
               <a:t>static int </a:t>
             </a:r>
-            <a:pPr indent="0" marL="0">
-              <a:buNone/>
-            </a:pPr>
             <a:r>
               <a:rPr lang="en-US" sz="1250" dirty="0">
                 <a:solidFill>
@@ -8258,7 +8041,7 @@
           <a:bodyPr wrap="square" lIns="0" tIns="0" rIns="0" bIns="0" rtlCol="0" anchor="ctr"/>
           <a:lstStyle/>
           <a:p>
-            <a:pPr indent="0" marL="0">
+            <a:pPr marL="0" indent="0">
               <a:buNone/>
             </a:pPr>
             <a:r>
@@ -8297,7 +8080,7 @@
           <a:bodyPr wrap="square" lIns="0" tIns="0" rIns="0" bIns="0" rtlCol="0" anchor="ctr"/>
           <a:lstStyle/>
           <a:p>
-            <a:pPr indent="0" marL="0">
+            <a:pPr marL="0" indent="0">
               <a:buNone/>
             </a:pPr>
             <a:r>
@@ -8418,7 +8201,7 @@
           <a:bodyPr wrap="square" lIns="0" tIns="0" rIns="0" bIns="0" rtlCol="0" anchor="ctr"/>
           <a:lstStyle/>
           <a:p>
-            <a:pPr indent="0" marL="0">
+            <a:pPr marL="0" indent="0">
               <a:buNone/>
             </a:pPr>
             <a:r>
@@ -8438,14 +8221,14 @@
       </p:sp>
       <p:pic>
         <p:nvPicPr>
-          <p:cNvPr id="19" name="Image 1" descr="preencoded.png">    </p:cNvPr>
+          <p:cNvPr id="19" name="Image 1" descr="preencoded.png"/>
           <p:cNvPicPr>
             <a:picLocks noChangeAspect="1"/>
           </p:cNvPicPr>
           <p:nvPr/>
         </p:nvPicPr>
         <p:blipFill>
-          <a:blip r:embed="rId2"/>
+          <a:blip r:embed="rId4"/>
           <a:stretch>
             <a:fillRect/>
           </a:stretch>
@@ -8481,7 +8264,7 @@
           <a:bodyPr wrap="square" lIns="0" tIns="0" rIns="0" bIns="0" rtlCol="0" anchor="ctr"/>
           <a:lstStyle/>
           <a:p>
-            <a:pPr indent="0" marL="0">
+            <a:pPr marL="0" indent="0">
               <a:buNone/>
             </a:pPr>
             <a:r>
@@ -8495,9 +8278,6 @@
               </a:rPr>
               <a:t>def </a:t>
             </a:r>
-            <a:pPr indent="0" marL="0">
-              <a:buNone/>
-            </a:pPr>
             <a:r>
               <a:rPr lang="en-US" sz="1250" dirty="0">
                 <a:solidFill>
@@ -8534,7 +8314,7 @@
           <a:bodyPr wrap="square" lIns="0" tIns="0" rIns="0" bIns="0" rtlCol="0" anchor="ctr"/>
           <a:lstStyle/>
           <a:p>
-            <a:pPr indent="0" marL="0">
+            <a:pPr marL="0" indent="0">
               <a:buNone/>
             </a:pPr>
             <a:r>
@@ -8548,9 +8328,6 @@
               </a:rPr>
               <a:t>    return </a:t>
             </a:r>
-            <a:pPr indent="0" marL="0">
-              <a:buNone/>
-            </a:pPr>
             <a:r>
               <a:rPr lang="en-US" sz="1250" dirty="0">
                 <a:solidFill>
@@ -8587,7 +8364,7 @@
           <a:bodyPr wrap="square" lIns="0" tIns="0" rIns="0" bIns="0" rtlCol="0" anchor="ctr"/>
           <a:lstStyle/>
           <a:p>
-            <a:pPr algn="ctr" indent="0" marL="0">
+            <a:pPr marL="0" indent="0" algn="ctr">
               <a:buNone/>
             </a:pPr>
             <a:r>
@@ -8626,7 +8403,7 @@
           <a:bodyPr wrap="square" lIns="0" tIns="0" rIns="0" bIns="0" rtlCol="0" anchor="ctr"/>
           <a:lstStyle/>
           <a:p>
-            <a:pPr algn="r" indent="0" marL="0">
+            <a:pPr marL="0" indent="0" algn="r">
               <a:buNone/>
             </a:pPr>
             <a:r>
@@ -8660,6 +8437,7 @@
         <a:solidFill>
           <a:srgbClr val="FFFFFF"/>
         </a:solidFill>
+        <a:effectLst/>
       </p:bgPr>
     </p:bg>
     <p:spTree>
@@ -8697,11 +8475,11 @@
           <a:bodyPr wrap="square" lIns="0" tIns="0" rIns="0" bIns="0" rtlCol="0" anchor="ctr"/>
           <a:lstStyle/>
           <a:p>
-            <a:pPr algn="l" indent="0" marL="0">
-              <a:buNone/>
-            </a:pPr>
-            <a:r>
-              <a:rPr lang="en-US" sz="1200" b="1" spc="200" kern="0" dirty="0">
+            <a:pPr marL="0" indent="0" algn="l">
+              <a:buNone/>
+            </a:pPr>
+            <a:r>
+              <a:rPr lang="en-US" sz="1200" b="1" kern="0" spc="200" dirty="0">
                 <a:solidFill>
                   <a:srgbClr val="6C4BC1"/>
                 </a:solidFill>
@@ -8736,7 +8514,7 @@
           <a:bodyPr wrap="square" lIns="0" tIns="0" rIns="0" bIns="0" rtlCol="0" anchor="ctr"/>
           <a:lstStyle/>
           <a:p>
-            <a:pPr indent="0" marL="0">
+            <a:pPr marL="0" indent="0">
               <a:buNone/>
             </a:pPr>
             <a:r>
@@ -8775,7 +8553,7 @@
           <a:bodyPr wrap="square" lIns="0" tIns="0" rIns="0" bIns="0" rtlCol="0" anchor="ctr"/>
           <a:lstStyle/>
           <a:p>
-            <a:pPr indent="0" marL="0">
+            <a:pPr marL="0" indent="0">
               <a:buNone/>
             </a:pPr>
             <a:r>
@@ -8896,7 +8674,7 @@
           <a:bodyPr wrap="square" lIns="0" tIns="0" rIns="0" bIns="0" rtlCol="0" anchor="ctr"/>
           <a:lstStyle/>
           <a:p>
-            <a:pPr indent="0" marL="0">
+            <a:pPr marL="0" indent="0">
               <a:buNone/>
             </a:pPr>
             <a:r>
@@ -8916,14 +8694,14 @@
       </p:sp>
       <p:pic>
         <p:nvPicPr>
-          <p:cNvPr id="10" name="Image 0" descr="preencoded.png">    </p:cNvPr>
+          <p:cNvPr id="10" name="Image 0" descr="preencoded.png"/>
           <p:cNvPicPr>
             <a:picLocks noChangeAspect="1"/>
           </p:cNvPicPr>
           <p:nvPr/>
         </p:nvPicPr>
         <p:blipFill>
-          <a:blip r:embed="rId1"/>
+          <a:blip r:embed="rId3"/>
           <a:stretch>
             <a:fillRect/>
           </a:stretch>
@@ -8959,7 +8737,7 @@
           <a:bodyPr wrap="square" lIns="0" tIns="0" rIns="0" bIns="0" rtlCol="0" anchor="ctr"/>
           <a:lstStyle/>
           <a:p>
-            <a:pPr indent="0" marL="0">
+            <a:pPr marL="0" indent="0">
               <a:buNone/>
             </a:pPr>
             <a:r>
@@ -8973,9 +8751,6 @@
               </a:rPr>
               <a:t>static bool </a:t>
             </a:r>
-            <a:pPr indent="0" marL="0">
-              <a:buNone/>
-            </a:pPr>
             <a:r>
               <a:rPr lang="en-US" sz="1000" dirty="0">
                 <a:solidFill>
@@ -9012,7 +8787,7 @@
           <a:bodyPr wrap="square" lIns="0" tIns="0" rIns="0" bIns="0" rtlCol="0" anchor="ctr"/>
           <a:lstStyle/>
           <a:p>
-            <a:pPr indent="0" marL="0">
+            <a:pPr marL="0" indent="0">
               <a:buNone/>
             </a:pPr>
             <a:r>
@@ -9051,7 +8826,7 @@
           <a:bodyPr wrap="square" lIns="0" tIns="0" rIns="0" bIns="0" rtlCol="0" anchor="ctr"/>
           <a:lstStyle/>
           <a:p>
-            <a:pPr indent="0" marL="0">
+            <a:pPr marL="0" indent="0">
               <a:buNone/>
             </a:pPr>
             <a:r>
@@ -9090,7 +8865,7 @@
           <a:bodyPr wrap="square" lIns="0" tIns="0" rIns="0" bIns="0" rtlCol="0" anchor="ctr"/>
           <a:lstStyle/>
           <a:p>
-            <a:pPr indent="0" marL="0">
+            <a:pPr marL="0" indent="0">
               <a:buNone/>
             </a:pPr>
             <a:r>
@@ -9129,7 +8904,7 @@
           <a:bodyPr wrap="square" lIns="0" tIns="0" rIns="0" bIns="0" rtlCol="0" anchor="ctr"/>
           <a:lstStyle/>
           <a:p>
-            <a:pPr indent="0" marL="0">
+            <a:pPr marL="0" indent="0">
               <a:buNone/>
             </a:pPr>
             <a:r>
@@ -9143,9 +8918,6 @@
               </a:rPr>
               <a:t>    var visitados = </a:t>
             </a:r>
-            <a:pPr indent="0" marL="0">
-              <a:buNone/>
-            </a:pPr>
             <a:r>
               <a:rPr lang="en-US" sz="1000" dirty="0">
                 <a:solidFill>
@@ -9157,9 +8929,6 @@
               </a:rPr>
               <a:t>new </a:t>
             </a:r>
-            <a:pPr indent="0" marL="0">
-              <a:buNone/>
-            </a:pPr>
             <a:r>
               <a:rPr lang="en-US" sz="1000" dirty="0">
                 <a:solidFill>
@@ -9196,7 +8965,7 @@
           <a:bodyPr wrap="square" lIns="0" tIns="0" rIns="0" bIns="0" rtlCol="0" anchor="ctr"/>
           <a:lstStyle/>
           <a:p>
-            <a:pPr indent="0" marL="0">
+            <a:pPr marL="0" indent="0">
               <a:buNone/>
             </a:pPr>
             <a:r>
@@ -9210,9 +8979,6 @@
               </a:rPr>
               <a:t>    var fronteira = </a:t>
             </a:r>
-            <a:pPr indent="0" marL="0">
-              <a:buNone/>
-            </a:pPr>
             <a:r>
               <a:rPr lang="en-US" sz="1000" dirty="0">
                 <a:solidFill>
@@ -9224,9 +8990,6 @@
               </a:rPr>
               <a:t>new </a:t>
             </a:r>
-            <a:pPr indent="0" marL="0">
-              <a:buNone/>
-            </a:pPr>
             <a:r>
               <a:rPr lang="en-US" sz="1000" dirty="0">
                 <a:solidFill>
@@ -9263,7 +9026,7 @@
           <a:bodyPr wrap="square" lIns="0" tIns="0" rIns="0" bIns="0" rtlCol="0" anchor="ctr"/>
           <a:lstStyle/>
           <a:p>
-            <a:pPr indent="0" marL="0">
+            <a:pPr marL="0" indent="0">
               <a:buNone/>
             </a:pPr>
             <a:r>
@@ -9302,7 +9065,7 @@
           <a:bodyPr wrap="square" lIns="0" tIns="0" rIns="0" bIns="0" rtlCol="0" anchor="ctr"/>
           <a:lstStyle/>
           <a:p>
-            <a:pPr indent="0" marL="0">
+            <a:pPr marL="0" indent="0">
               <a:buNone/>
             </a:pPr>
             <a:r>
@@ -9316,9 +9079,6 @@
               </a:rPr>
               <a:t>    while </a:t>
             </a:r>
-            <a:pPr indent="0" marL="0">
-              <a:buNone/>
-            </a:pPr>
             <a:r>
               <a:rPr lang="en-US" sz="1000" dirty="0">
                 <a:solidFill>
@@ -9355,7 +9115,7 @@
           <a:bodyPr wrap="square" lIns="0" tIns="0" rIns="0" bIns="0" rtlCol="0" anchor="ctr"/>
           <a:lstStyle/>
           <a:p>
-            <a:pPr indent="0" marL="0">
+            <a:pPr marL="0" indent="0">
               <a:buNone/>
             </a:pPr>
             <a:r>
@@ -9394,7 +9154,7 @@
           <a:bodyPr wrap="square" lIns="0" tIns="0" rIns="0" bIns="0" rtlCol="0" anchor="ctr"/>
           <a:lstStyle/>
           <a:p>
-            <a:pPr indent="0" marL="0">
+            <a:pPr marL="0" indent="0">
               <a:buNone/>
             </a:pPr>
             <a:r>
@@ -9433,7 +9193,7 @@
           <a:bodyPr wrap="square" lIns="0" tIns="0" rIns="0" bIns="0" rtlCol="0" anchor="ctr"/>
           <a:lstStyle/>
           <a:p>
-            <a:pPr indent="0" marL="0">
+            <a:pPr marL="0" indent="0">
               <a:buNone/>
             </a:pPr>
             <a:r>
@@ -9447,9 +9207,6 @@
               </a:rPr>
               <a:t>        foreach </a:t>
             </a:r>
-            <a:pPr indent="0" marL="0">
-              <a:buNone/>
-            </a:pPr>
             <a:r>
               <a:rPr lang="en-US" sz="1000" dirty="0">
                 <a:solidFill>
@@ -9486,7 +9243,7 @@
           <a:bodyPr wrap="square" lIns="0" tIns="0" rIns="0" bIns="0" rtlCol="0" anchor="ctr"/>
           <a:lstStyle/>
           <a:p>
-            <a:pPr indent="0" marL="0">
+            <a:pPr marL="0" indent="0">
               <a:buNone/>
             </a:pPr>
             <a:r>
@@ -9500,9 +9257,6 @@
               </a:rPr>
               <a:t>            if </a:t>
             </a:r>
-            <a:pPr indent="0" marL="0">
-              <a:buNone/>
-            </a:pPr>
             <a:r>
               <a:rPr lang="en-US" sz="1000" dirty="0">
                 <a:solidFill>
@@ -9539,7 +9293,7 @@
           <a:bodyPr wrap="square" lIns="0" tIns="0" rIns="0" bIns="0" rtlCol="0" anchor="ctr"/>
           <a:lstStyle/>
           <a:p>
-            <a:pPr indent="0" marL="0">
+            <a:pPr marL="0" indent="0">
               <a:buNone/>
             </a:pPr>
             <a:r>
@@ -9578,7 +9332,7 @@
           <a:bodyPr wrap="square" lIns="0" tIns="0" rIns="0" bIns="0" rtlCol="0" anchor="ctr"/>
           <a:lstStyle/>
           <a:p>
-            <a:pPr indent="0" marL="0">
+            <a:pPr marL="0" indent="0">
               <a:buNone/>
             </a:pPr>
             <a:r>
@@ -9617,7 +9371,7 @@
           <a:bodyPr wrap="square" lIns="0" tIns="0" rIns="0" bIns="0" rtlCol="0" anchor="ctr"/>
           <a:lstStyle/>
           <a:p>
-            <a:pPr indent="0" marL="0">
+            <a:pPr marL="0" indent="0">
               <a:buNone/>
             </a:pPr>
             <a:r>
@@ -9631,9 +9385,6 @@
               </a:rPr>
               <a:t>    return </a:t>
             </a:r>
-            <a:pPr indent="0" marL="0">
-              <a:buNone/>
-            </a:pPr>
             <a:r>
               <a:rPr lang="en-US" sz="1000" dirty="0">
                 <a:solidFill>
@@ -9670,7 +9421,7 @@
           <a:bodyPr wrap="square" lIns="0" tIns="0" rIns="0" bIns="0" rtlCol="0" anchor="ctr"/>
           <a:lstStyle/>
           <a:p>
-            <a:pPr indent="0" marL="0">
+            <a:pPr marL="0" indent="0">
               <a:buNone/>
             </a:pPr>
             <a:r>
@@ -9791,7 +9542,7 @@
           <a:bodyPr wrap="square" lIns="0" tIns="0" rIns="0" bIns="0" rtlCol="0" anchor="ctr"/>
           <a:lstStyle/>
           <a:p>
-            <a:pPr indent="0" marL="0">
+            <a:pPr marL="0" indent="0">
               <a:buNone/>
             </a:pPr>
             <a:r>
@@ -9811,14 +9562,14 @@
       </p:sp>
       <p:pic>
         <p:nvPicPr>
-          <p:cNvPr id="32" name="Image 1" descr="preencoded.png">    </p:cNvPr>
+          <p:cNvPr id="32" name="Image 1" descr="preencoded.png"/>
           <p:cNvPicPr>
             <a:picLocks noChangeAspect="1"/>
           </p:cNvPicPr>
           <p:nvPr/>
         </p:nvPicPr>
         <p:blipFill>
-          <a:blip r:embed="rId2"/>
+          <a:blip r:embed="rId4"/>
           <a:stretch>
             <a:fillRect/>
           </a:stretch>
@@ -9854,7 +9605,7 @@
           <a:bodyPr wrap="square" lIns="0" tIns="0" rIns="0" bIns="0" rtlCol="0" anchor="ctr"/>
           <a:lstStyle/>
           <a:p>
-            <a:pPr indent="0" marL="0">
+            <a:pPr marL="0" indent="0">
               <a:buNone/>
             </a:pPr>
             <a:r>
@@ -9868,9 +9619,6 @@
               </a:rPr>
               <a:t>def </a:t>
             </a:r>
-            <a:pPr indent="0" marL="0">
-              <a:buNone/>
-            </a:pPr>
             <a:r>
               <a:rPr lang="en-US" sz="1000" dirty="0">
                 <a:solidFill>
@@ -9907,7 +9655,7 @@
           <a:bodyPr wrap="square" lIns="0" tIns="0" rIns="0" bIns="0" rtlCol="0" anchor="ctr"/>
           <a:lstStyle/>
           <a:p>
-            <a:pPr indent="0" marL="0">
+            <a:pPr marL="0" indent="0">
               <a:buNone/>
             </a:pPr>
             <a:r>
@@ -9921,9 +9669,6 @@
               </a:rPr>
               <a:t>    inicio = </a:t>
             </a:r>
-            <a:pPr indent="0" marL="0">
-              <a:buNone/>
-            </a:pPr>
             <a:r>
               <a:rPr lang="en-US" sz="1000" dirty="0">
                 <a:solidFill>
@@ -9935,9 +9680,6 @@
               </a:rPr>
               <a:t>next</a:t>
             </a:r>
-            <a:pPr indent="0" marL="0">
-              <a:buNone/>
-            </a:pPr>
             <a:r>
               <a:rPr lang="en-US" sz="1000" dirty="0">
                 <a:solidFill>
@@ -9949,9 +9691,6 @@
               </a:rPr>
               <a:t>(</a:t>
             </a:r>
-            <a:pPr indent="0" marL="0">
-              <a:buNone/>
-            </a:pPr>
             <a:r>
               <a:rPr lang="en-US" sz="1000" dirty="0">
                 <a:solidFill>
@@ -9963,9 +9702,6 @@
               </a:rPr>
               <a:t>iter</a:t>
             </a:r>
-            <a:pPr indent="0" marL="0">
-              <a:buNone/>
-            </a:pPr>
             <a:r>
               <a:rPr lang="en-US" sz="1000" dirty="0">
                 <a:solidFill>
@@ -10002,7 +9738,7 @@
           <a:bodyPr wrap="square" lIns="0" tIns="0" rIns="0" bIns="0" rtlCol="0" anchor="ctr"/>
           <a:lstStyle/>
           <a:p>
-            <a:pPr indent="0" marL="0">
+            <a:pPr marL="0" indent="0">
               <a:buNone/>
             </a:pPr>
             <a:r>
@@ -10041,7 +9777,7 @@
           <a:bodyPr wrap="square" lIns="0" tIns="0" rIns="0" bIns="0" rtlCol="0" anchor="ctr"/>
           <a:lstStyle/>
           <a:p>
-            <a:pPr indent="0" marL="0">
+            <a:pPr marL="0" indent="0">
               <a:buNone/>
             </a:pPr>
             <a:r>
@@ -10080,7 +9816,7 @@
           <a:bodyPr wrap="square" lIns="0" tIns="0" rIns="0" bIns="0" rtlCol="0" anchor="ctr"/>
           <a:lstStyle/>
           <a:p>
-            <a:pPr indent="0" marL="0">
+            <a:pPr marL="0" indent="0">
               <a:buNone/>
             </a:pPr>
             <a:r>
@@ -10094,9 +9830,6 @@
               </a:rPr>
               <a:t>    while </a:t>
             </a:r>
-            <a:pPr indent="0" marL="0">
-              <a:buNone/>
-            </a:pPr>
             <a:r>
               <a:rPr lang="en-US" sz="1000" dirty="0">
                 <a:solidFill>
@@ -10133,7 +9866,7 @@
           <a:bodyPr wrap="square" lIns="0" tIns="0" rIns="0" bIns="0" rtlCol="0" anchor="ctr"/>
           <a:lstStyle/>
           <a:p>
-            <a:pPr indent="0" marL="0">
+            <a:pPr marL="0" indent="0">
               <a:buNone/>
             </a:pPr>
             <a:r>
@@ -10172,7 +9905,7 @@
           <a:bodyPr wrap="square" lIns="0" tIns="0" rIns="0" bIns="0" rtlCol="0" anchor="ctr"/>
           <a:lstStyle/>
           <a:p>
-            <a:pPr indent="0" marL="0">
+            <a:pPr marL="0" indent="0">
               <a:buNone/>
             </a:pPr>
             <a:r>
@@ -10186,9 +9919,6 @@
               </a:rPr>
               <a:t>        for </a:t>
             </a:r>
-            <a:pPr indent="0" marL="0">
-              <a:buNone/>
-            </a:pPr>
             <a:r>
               <a:rPr lang="en-US" sz="1000" dirty="0">
                 <a:solidFill>
@@ -10200,9 +9930,6 @@
               </a:rPr>
               <a:t>vizinho </a:t>
             </a:r>
-            <a:pPr indent="0" marL="0">
-              <a:buNone/>
-            </a:pPr>
             <a:r>
               <a:rPr lang="en-US" sz="1000" dirty="0">
                 <a:solidFill>
@@ -10214,9 +9941,6 @@
               </a:rPr>
               <a:t>in </a:t>
             </a:r>
-            <a:pPr indent="0" marL="0">
-              <a:buNone/>
-            </a:pPr>
             <a:r>
               <a:rPr lang="en-US" sz="1000" dirty="0">
                 <a:solidFill>
@@ -10253,7 +9977,7 @@
           <a:bodyPr wrap="square" lIns="0" tIns="0" rIns="0" bIns="0" rtlCol="0" anchor="ctr"/>
           <a:lstStyle/>
           <a:p>
-            <a:pPr indent="0" marL="0">
+            <a:pPr marL="0" indent="0">
               <a:buNone/>
             </a:pPr>
             <a:r>
@@ -10267,9 +9991,6 @@
               </a:rPr>
               <a:t>            if </a:t>
             </a:r>
-            <a:pPr indent="0" marL="0">
-              <a:buNone/>
-            </a:pPr>
             <a:r>
               <a:rPr lang="en-US" sz="1000" dirty="0">
                 <a:solidFill>
@@ -10281,9 +10002,6 @@
               </a:rPr>
               <a:t>vizinho </a:t>
             </a:r>
-            <a:pPr indent="0" marL="0">
-              <a:buNone/>
-            </a:pPr>
             <a:r>
               <a:rPr lang="en-US" sz="1000" dirty="0">
                 <a:solidFill>
@@ -10295,9 +10013,6 @@
               </a:rPr>
               <a:t>not in </a:t>
             </a:r>
-            <a:pPr indent="0" marL="0">
-              <a:buNone/>
-            </a:pPr>
             <a:r>
               <a:rPr lang="en-US" sz="1000" dirty="0">
                 <a:solidFill>
@@ -10334,7 +10049,7 @@
           <a:bodyPr wrap="square" lIns="0" tIns="0" rIns="0" bIns="0" rtlCol="0" anchor="ctr"/>
           <a:lstStyle/>
           <a:p>
-            <a:pPr indent="0" marL="0">
+            <a:pPr marL="0" indent="0">
               <a:buNone/>
             </a:pPr>
             <a:r>
@@ -10373,7 +10088,7 @@
           <a:bodyPr wrap="square" lIns="0" tIns="0" rIns="0" bIns="0" rtlCol="0" anchor="ctr"/>
           <a:lstStyle/>
           <a:p>
-            <a:pPr indent="0" marL="0">
+            <a:pPr marL="0" indent="0">
               <a:buNone/>
             </a:pPr>
             <a:r>
@@ -10412,7 +10127,7 @@
           <a:bodyPr wrap="square" lIns="0" tIns="0" rIns="0" bIns="0" rtlCol="0" anchor="ctr"/>
           <a:lstStyle/>
           <a:p>
-            <a:pPr indent="0" marL="0">
+            <a:pPr marL="0" indent="0">
               <a:buNone/>
             </a:pPr>
             <a:r>
@@ -10426,9 +10141,6 @@
               </a:rPr>
               <a:t>    return </a:t>
             </a:r>
-            <a:pPr indent="0" marL="0">
-              <a:buNone/>
-            </a:pPr>
             <a:r>
               <a:rPr lang="en-US" sz="1000" dirty="0">
                 <a:solidFill>
@@ -10440,9 +10152,6 @@
               </a:rPr>
               <a:t>visitados == </a:t>
             </a:r>
-            <a:pPr indent="0" marL="0">
-              <a:buNone/>
-            </a:pPr>
             <a:r>
               <a:rPr lang="en-US" sz="1000" dirty="0">
                 <a:solidFill>
@@ -10454,9 +10163,6 @@
               </a:rPr>
               <a:t>set</a:t>
             </a:r>
-            <a:pPr indent="0" marL="0">
-              <a:buNone/>
-            </a:pPr>
             <a:r>
               <a:rPr lang="en-US" sz="1000" dirty="0">
                 <a:solidFill>
@@ -10493,7 +10199,7 @@
           <a:bodyPr wrap="square" lIns="0" tIns="0" rIns="0" bIns="0" rtlCol="0" anchor="ctr"/>
           <a:lstStyle/>
           <a:p>
-            <a:pPr indent="0" marL="0">
+            <a:pPr marL="0" indent="0">
               <a:buNone/>
             </a:pPr>
             <a:r>
@@ -10532,7 +10238,7 @@
           <a:bodyPr wrap="square" lIns="0" tIns="0" rIns="0" bIns="0" rtlCol="0" anchor="ctr"/>
           <a:lstStyle/>
           <a:p>
-            <a:pPr indent="0" marL="0">
+            <a:pPr marL="0" indent="0">
               <a:buNone/>
             </a:pPr>
             <a:r>
@@ -10546,9 +10252,6 @@
               </a:rPr>
               <a:t>print(eh_conexo(grafo))     </a:t>
             </a:r>
-            <a:pPr indent="0" marL="0">
-              <a:buNone/>
-            </a:pPr>
             <a:r>
               <a:rPr lang="en-US" sz="1000" dirty="0">
                 <a:solidFill>
@@ -10585,7 +10288,7 @@
           <a:bodyPr wrap="square" lIns="0" tIns="0" rIns="0" bIns="0" rtlCol="0" anchor="ctr"/>
           <a:lstStyle/>
           <a:p>
-            <a:pPr algn="r" indent="0" marL="0">
+            <a:pPr marL="0" indent="0" algn="r">
               <a:buNone/>
             </a:pPr>
             <a:r>
@@ -10619,6 +10322,7 @@
         <a:solidFill>
           <a:srgbClr val="FFFFFF"/>
         </a:solidFill>
+        <a:effectLst/>
       </p:bgPr>
     </p:bg>
     <p:spTree>
@@ -10656,11 +10360,11 @@
           <a:bodyPr wrap="square" lIns="0" tIns="0" rIns="0" bIns="0" rtlCol="0" anchor="ctr"/>
           <a:lstStyle/>
           <a:p>
-            <a:pPr algn="l" indent="0" marL="0">
-              <a:buNone/>
-            </a:pPr>
-            <a:r>
-              <a:rPr lang="en-US" sz="1200" b="1" spc="200" kern="0" dirty="0">
+            <a:pPr marL="0" indent="0" algn="l">
+              <a:buNone/>
+            </a:pPr>
+            <a:r>
+              <a:rPr lang="en-US" sz="1200" b="1" kern="0" spc="200" dirty="0">
                 <a:solidFill>
                   <a:srgbClr val="6C4BC1"/>
                 </a:solidFill>
@@ -10696,14 +10400,14 @@
       </p:sp>
       <p:pic>
         <p:nvPicPr>
-          <p:cNvPr id="4" name="Image 0" descr="preencoded.png">    </p:cNvPr>
+          <p:cNvPr id="4" name="Image 0" descr="preencoded.png"/>
           <p:cNvPicPr>
             <a:picLocks noChangeAspect="1"/>
           </p:cNvPicPr>
           <p:nvPr/>
         </p:nvPicPr>
         <p:blipFill>
-          <a:blip r:embed="rId1"/>
+          <a:blip r:embed="rId3"/>
           <a:stretch>
             <a:fillRect/>
           </a:stretch>
@@ -10739,7 +10443,7 @@
           <a:bodyPr wrap="square" lIns="0" tIns="0" rIns="0" bIns="0" rtlCol="0" anchor="ctr"/>
           <a:lstStyle/>
           <a:p>
-            <a:pPr indent="0" marL="0">
+            <a:pPr marL="0" indent="0">
               <a:buNone/>
             </a:pPr>
             <a:r>
@@ -10800,7 +10504,7 @@
           <a:bodyPr wrap="square" lIns="0" tIns="0" rIns="0" bIns="0" rtlCol="0" anchor="ctr"/>
           <a:lstStyle/>
           <a:p>
-            <a:pPr indent="0" marL="0">
+            <a:pPr marL="0" indent="0">
               <a:lnSpc>
                 <a:spcPts val="1900"/>
               </a:lnSpc>
@@ -10864,7 +10568,7 @@
           <a:bodyPr wrap="square" lIns="0" tIns="0" rIns="0" bIns="0" rtlCol="0" anchor="ctr"/>
           <a:lstStyle/>
           <a:p>
-            <a:pPr indent="0" marL="0">
+            <a:pPr marL="0" indent="0">
               <a:lnSpc>
                 <a:spcPts val="1900"/>
               </a:lnSpc>
@@ -10928,7 +10632,7 @@
           <a:bodyPr wrap="square" lIns="0" tIns="0" rIns="0" bIns="0" rtlCol="0" anchor="ctr"/>
           <a:lstStyle/>
           <a:p>
-            <a:pPr indent="0" marL="0">
+            <a:pPr marL="0" indent="0">
               <a:lnSpc>
                 <a:spcPts val="1900"/>
               </a:lnSpc>
@@ -10970,7 +10674,7 @@
           <a:bodyPr wrap="square" lIns="0" tIns="0" rIns="0" bIns="0" rtlCol="0" anchor="ctr"/>
           <a:lstStyle/>
           <a:p>
-            <a:pPr algn="r" indent="0" marL="0">
+            <a:pPr marL="0" indent="0" algn="r">
               <a:buNone/>
             </a:pPr>
             <a:r>
@@ -11004,6 +10708,7 @@
         <a:solidFill>
           <a:srgbClr val="6C4BC1"/>
         </a:solidFill>
+        <a:effectLst/>
       </p:bgPr>
     </p:bg>
     <p:spTree>
@@ -11090,14 +10795,14 @@
       </p:sp>
       <p:pic>
         <p:nvPicPr>
-          <p:cNvPr id="5" name="Image 0" descr="preencoded.png">    </p:cNvPr>
+          <p:cNvPr id="5" name="Image 0" descr="preencoded.png"/>
           <p:cNvPicPr>
             <a:picLocks noChangeAspect="1"/>
           </p:cNvPicPr>
           <p:nvPr/>
         </p:nvPicPr>
         <p:blipFill>
-          <a:blip r:embed="rId1"/>
+          <a:blip r:embed="rId3"/>
           <a:stretch>
             <a:fillRect/>
           </a:stretch>
@@ -11133,7 +10838,7 @@
           <a:bodyPr wrap="square" lIns="0" tIns="0" rIns="0" bIns="0" rtlCol="0" anchor="ctr"/>
           <a:lstStyle/>
           <a:p>
-            <a:pPr algn="ctr" indent="0" marL="0">
+            <a:pPr marL="0" indent="0" algn="ctr">
               <a:buNone/>
             </a:pPr>
             <a:r>
@@ -11172,7 +10877,7 @@
           <a:bodyPr wrap="square" lIns="0" tIns="0" rIns="0" bIns="0" rtlCol="0" anchor="ctr"/>
           <a:lstStyle/>
           <a:p>
-            <a:pPr algn="ctr" indent="0" marL="0">
+            <a:pPr marL="0" indent="0" algn="ctr">
               <a:buNone/>
             </a:pPr>
             <a:r>
@@ -11206,6 +10911,7 @@
         <a:solidFill>
           <a:srgbClr val="FFFFFF"/>
         </a:solidFill>
+        <a:effectLst/>
       </p:bgPr>
     </p:bg>
     <p:spTree>
@@ -11244,14 +10950,14 @@
       </p:sp>
       <p:pic>
         <p:nvPicPr>
-          <p:cNvPr id="3" name="Image 0" descr="preencoded.png">    </p:cNvPr>
+          <p:cNvPr id="3" name="Image 0" descr="preencoded.png"/>
           <p:cNvPicPr>
             <a:picLocks noChangeAspect="1"/>
           </p:cNvPicPr>
           <p:nvPr/>
         </p:nvPicPr>
         <p:blipFill>
-          <a:blip r:embed="rId1"/>
+          <a:blip r:embed="rId3"/>
           <a:stretch>
             <a:fillRect/>
           </a:stretch>
@@ -11287,11 +10993,11 @@
           <a:bodyPr wrap="square" lIns="0" tIns="0" rIns="0" bIns="0" rtlCol="0" anchor="ctr"/>
           <a:lstStyle/>
           <a:p>
-            <a:pPr indent="0" marL="0">
-              <a:buNone/>
-            </a:pPr>
-            <a:r>
-              <a:rPr lang="en-US" sz="1200" b="1" spc="150" kern="0" dirty="0">
+            <a:pPr marL="0" indent="0">
+              <a:buNone/>
+            </a:pPr>
+            <a:r>
+              <a:rPr lang="en-US" sz="1200" b="1" kern="0" spc="150" dirty="0">
                 <a:solidFill>
                   <a:srgbClr val="6C4BC1"/>
                 </a:solidFill>
@@ -11326,7 +11032,7 @@
           <a:bodyPr wrap="square" lIns="0" tIns="0" rIns="0" bIns="0" rtlCol="0" anchor="ctr"/>
           <a:lstStyle/>
           <a:p>
-            <a:pPr indent="0" marL="0">
+            <a:pPr marL="0" indent="0">
               <a:buNone/>
             </a:pPr>
             <a:r>
@@ -11365,7 +11071,7 @@
           <a:bodyPr wrap="square" lIns="0" tIns="0" rIns="0" bIns="0" rtlCol="0" anchor="ctr"/>
           <a:lstStyle/>
           <a:p>
-            <a:pPr indent="0" marL="0">
+            <a:pPr marL="0" indent="0">
               <a:lnSpc>
                 <a:spcPts val="1800"/>
               </a:lnSpc>
@@ -11434,7 +11140,7 @@
           <a:bodyPr wrap="square" lIns="0" tIns="0" rIns="0" bIns="0" rtlCol="0" anchor="ctr"/>
           <a:lstStyle/>
           <a:p>
-            <a:pPr indent="0" marL="0">
+            <a:pPr marL="0" indent="0">
               <a:buNone/>
             </a:pPr>
             <a:r>
@@ -11473,7 +11179,7 @@
           <a:bodyPr wrap="square" lIns="0" tIns="0" rIns="0" bIns="0" rtlCol="0" anchor="ctr"/>
           <a:lstStyle/>
           <a:p>
-            <a:pPr indent="0" marL="0">
+            <a:pPr marL="0" indent="0">
               <a:buNone/>
             </a:pPr>
             <a:r>
@@ -11512,7 +11218,7 @@
           <a:bodyPr wrap="square" lIns="0" tIns="0" rIns="0" bIns="0" rtlCol="0" anchor="ctr"/>
           <a:lstStyle/>
           <a:p>
-            <a:pPr indent="0" marL="0">
+            <a:pPr marL="0" indent="0">
               <a:buNone/>
             </a:pPr>
             <a:r>
@@ -11551,7 +11257,7 @@
           <a:bodyPr wrap="square" lIns="0" tIns="0" rIns="0" bIns="0" rtlCol="0" anchor="ctr"/>
           <a:lstStyle/>
           <a:p>
-            <a:pPr algn="r" indent="0" marL="0">
+            <a:pPr marL="0" indent="0" algn="r">
               <a:buNone/>
             </a:pPr>
             <a:r>
@@ -11585,6 +11291,7 @@
         <a:solidFill>
           <a:srgbClr val="FFFFFF"/>
         </a:solidFill>
+        <a:effectLst/>
       </p:bgPr>
     </p:bg>
     <p:spTree>
@@ -11622,11 +11329,11 @@
           <a:bodyPr wrap="square" lIns="0" tIns="0" rIns="0" bIns="0" rtlCol="0" anchor="ctr"/>
           <a:lstStyle/>
           <a:p>
-            <a:pPr algn="l" indent="0" marL="0">
-              <a:buNone/>
-            </a:pPr>
-            <a:r>
-              <a:rPr lang="en-US" sz="1200" b="1" spc="200" kern="0" dirty="0">
+            <a:pPr marL="0" indent="0" algn="l">
+              <a:buNone/>
+            </a:pPr>
+            <a:r>
+              <a:rPr lang="en-US" sz="1200" b="1" kern="0" spc="200" dirty="0">
                 <a:solidFill>
                   <a:srgbClr val="6C4BC1"/>
                 </a:solidFill>
@@ -11661,7 +11368,7 @@
           <a:bodyPr wrap="square" lIns="0" tIns="0" rIns="0" bIns="0" rtlCol="0" anchor="ctr"/>
           <a:lstStyle/>
           <a:p>
-            <a:pPr indent="0" marL="0">
+            <a:pPr marL="0" indent="0">
               <a:buNone/>
             </a:pPr>
             <a:r>
@@ -11701,257 +11408,7 @@
       </p:sp>
       <p:pic>
         <p:nvPicPr>
-          <p:cNvPr id="5" name="Image 0" descr="preencoded.png">    </p:cNvPr>
-          <p:cNvPicPr>
-            <a:picLocks noChangeAspect="1"/>
-          </p:cNvPicPr>
-          <p:nvPr/>
-        </p:nvPicPr>
-        <p:blipFill>
-          <a:blip r:embed="rId1"/>
-          <a:stretch>
-            <a:fillRect/>
-          </a:stretch>
-        </p:blipFill>
-        <p:spPr>
-          <a:xfrm>
-            <a:off x="786384" y="2112264"/>
-            <a:ext cx="310896" cy="310896"/>
-          </a:xfrm>
-          <a:prstGeom prst="rect">
-            <a:avLst/>
-          </a:prstGeom>
-        </p:spPr>
-      </p:pic>
-      <p:sp>
-        <p:nvSpPr>
-          <p:cNvPr id="6" name="Text 3"/>
-          <p:cNvSpPr/>
-          <p:nvPr/>
-        </p:nvSpPr>
-        <p:spPr>
-          <a:xfrm>
-            <a:off x="1508760" y="1920240"/>
-            <a:ext cx="9692640" cy="457200"/>
-          </a:xfrm>
-          <a:prstGeom prst="rect">
-            <a:avLst/>
-          </a:prstGeom>
-          <a:noFill/>
-          <a:ln/>
-        </p:spPr>
-        <p:txBody>
-          <a:bodyPr wrap="square" lIns="0" tIns="0" rIns="0" bIns="0" rtlCol="0" anchor="ctr"/>
-          <a:lstStyle/>
-          <a:p>
-            <a:pPr indent="0" marL="0">
-              <a:lnSpc>
-                <a:spcPts val="2000"/>
-              </a:lnSpc>
-              <a:buNone/>
-            </a:pPr>
-            <a:r>
-              <a:rPr lang="en-US" sz="1700" b="1" dirty="0">
-                <a:solidFill>
-                  <a:srgbClr val="1B1B2F"/>
-                </a:solidFill>
-                <a:latin typeface="Calibri" pitchFamily="34" charset="0"/>
-                <a:ea typeface="Calibri" pitchFamily="34" charset="-122"/>
-                <a:cs typeface="Calibri" pitchFamily="34" charset="-120"/>
-              </a:rPr>
-              <a:t>Pares ordenados e relações</a:t>
-            </a:r>
-            <a:endParaRPr lang="en-US" sz="1700" dirty="0"/>
-          </a:p>
-        </p:txBody>
-      </p:sp>
-      <p:sp>
-        <p:nvSpPr>
-          <p:cNvPr id="7" name="Text 4"/>
-          <p:cNvSpPr/>
-          <p:nvPr/>
-        </p:nvSpPr>
-        <p:spPr>
-          <a:xfrm>
-            <a:off x="1508760" y="2386584"/>
-            <a:ext cx="9692640" cy="411480"/>
-          </a:xfrm>
-          <a:prstGeom prst="rect">
-            <a:avLst/>
-          </a:prstGeom>
-          <a:noFill/>
-          <a:ln/>
-        </p:spPr>
-        <p:txBody>
-          <a:bodyPr wrap="square" lIns="0" tIns="0" rIns="0" bIns="0" rtlCol="0" anchor="ctr"/>
-          <a:lstStyle/>
-          <a:p>
-            <a:pPr indent="0" marL="0">
-              <a:buNone/>
-            </a:pPr>
-            <a:r>
-              <a:rPr lang="en-US" sz="1300" dirty="0">
-                <a:solidFill>
-                  <a:srgbClr val="6B6B80"/>
-                </a:solidFill>
-                <a:latin typeface="Calibri" pitchFamily="34" charset="0"/>
-                <a:ea typeface="Calibri" pitchFamily="34" charset="-122"/>
-                <a:cs typeface="Calibri" pitchFamily="34" charset="-120"/>
-              </a:rPr>
-              <a:t>O mínimo necessário para entender grafos.</a:t>
-            </a:r>
-            <a:endParaRPr lang="en-US" sz="1300" dirty="0"/>
-          </a:p>
-        </p:txBody>
-      </p:sp>
-      <p:sp>
-        <p:nvSpPr>
-          <p:cNvPr id="8" name="Shape 5"/>
-          <p:cNvSpPr/>
-          <p:nvPr/>
-        </p:nvSpPr>
-        <p:spPr>
-          <a:xfrm>
-            <a:off x="640080" y="3291840"/>
-            <a:ext cx="603504" cy="603504"/>
-          </a:xfrm>
-          <a:prstGeom prst="ellipse">
-            <a:avLst/>
-          </a:prstGeom>
-          <a:solidFill>
-            <a:srgbClr val="6C4BC1"/>
-          </a:solidFill>
-          <a:ln/>
-        </p:spPr>
-      </p:sp>
-      <p:pic>
-        <p:nvPicPr>
-          <p:cNvPr id="9" name="Image 1" descr="preencoded.png">    </p:cNvPr>
-          <p:cNvPicPr>
-            <a:picLocks noChangeAspect="1"/>
-          </p:cNvPicPr>
-          <p:nvPr/>
-        </p:nvPicPr>
-        <p:blipFill>
-          <a:blip r:embed="rId2"/>
-          <a:stretch>
-            <a:fillRect/>
-          </a:stretch>
-        </p:blipFill>
-        <p:spPr>
-          <a:xfrm>
-            <a:off x="786384" y="3438144"/>
-            <a:ext cx="310896" cy="310896"/>
-          </a:xfrm>
-          <a:prstGeom prst="rect">
-            <a:avLst/>
-          </a:prstGeom>
-        </p:spPr>
-      </p:pic>
-      <p:sp>
-        <p:nvSpPr>
-          <p:cNvPr id="10" name="Text 6"/>
-          <p:cNvSpPr/>
-          <p:nvPr/>
-        </p:nvSpPr>
-        <p:spPr>
-          <a:xfrm>
-            <a:off x="1508760" y="3246120"/>
-            <a:ext cx="9692640" cy="457200"/>
-          </a:xfrm>
-          <a:prstGeom prst="rect">
-            <a:avLst/>
-          </a:prstGeom>
-          <a:noFill/>
-          <a:ln/>
-        </p:spPr>
-        <p:txBody>
-          <a:bodyPr wrap="square" lIns="0" tIns="0" rIns="0" bIns="0" rtlCol="0" anchor="ctr"/>
-          <a:lstStyle/>
-          <a:p>
-            <a:pPr indent="0" marL="0">
-              <a:lnSpc>
-                <a:spcPts val="2000"/>
-              </a:lnSpc>
-              <a:buNone/>
-            </a:pPr>
-            <a:r>
-              <a:rPr lang="en-US" sz="1700" b="1" dirty="0">
-                <a:solidFill>
-                  <a:srgbClr val="1B1B2F"/>
-                </a:solidFill>
-                <a:latin typeface="Calibri" pitchFamily="34" charset="0"/>
-                <a:ea typeface="Calibri" pitchFamily="34" charset="-122"/>
-                <a:cs typeface="Calibri" pitchFamily="34" charset="-120"/>
-              </a:rPr>
-              <a:t>O que é um grafo</a:t>
-            </a:r>
-            <a:endParaRPr lang="en-US" sz="1700" dirty="0"/>
-          </a:p>
-        </p:txBody>
-      </p:sp>
-      <p:sp>
-        <p:nvSpPr>
-          <p:cNvPr id="11" name="Text 7"/>
-          <p:cNvSpPr/>
-          <p:nvPr/>
-        </p:nvSpPr>
-        <p:spPr>
-          <a:xfrm>
-            <a:off x="1508760" y="3712464"/>
-            <a:ext cx="9692640" cy="411480"/>
-          </a:xfrm>
-          <a:prstGeom prst="rect">
-            <a:avLst/>
-          </a:prstGeom>
-          <a:noFill/>
-          <a:ln/>
-        </p:spPr>
-        <p:txBody>
-          <a:bodyPr wrap="square" lIns="0" tIns="0" rIns="0" bIns="0" rtlCol="0" anchor="ctr"/>
-          <a:lstStyle/>
-          <a:p>
-            <a:pPr indent="0" marL="0">
-              <a:buNone/>
-            </a:pPr>
-            <a:r>
-              <a:rPr lang="en-US" sz="1300" dirty="0">
-                <a:solidFill>
-                  <a:srgbClr val="6B6B80"/>
-                </a:solidFill>
-                <a:latin typeface="Calibri" pitchFamily="34" charset="0"/>
-                <a:ea typeface="Calibri" pitchFamily="34" charset="-122"/>
-                <a:cs typeface="Calibri" pitchFamily="34" charset="-120"/>
-              </a:rPr>
-              <a:t>Vértices, arestas e os três tipos principais.</a:t>
-            </a:r>
-            <a:endParaRPr lang="en-US" sz="1300" dirty="0"/>
-          </a:p>
-        </p:txBody>
-      </p:sp>
-      <p:sp>
-        <p:nvSpPr>
-          <p:cNvPr id="12" name="Shape 8"/>
-          <p:cNvSpPr/>
-          <p:nvPr/>
-        </p:nvSpPr>
-        <p:spPr>
-          <a:xfrm>
-            <a:off x="640080" y="4617720"/>
-            <a:ext cx="603504" cy="603504"/>
-          </a:xfrm>
-          <a:prstGeom prst="ellipse">
-            <a:avLst/>
-          </a:prstGeom>
-          <a:solidFill>
-            <a:srgbClr val="6C4BC1"/>
-          </a:solidFill>
-          <a:ln/>
-        </p:spPr>
-      </p:sp>
-      <p:pic>
-        <p:nvPicPr>
-          <p:cNvPr id="13" name="Image 2" descr="preencoded.png">    </p:cNvPr>
+          <p:cNvPr id="5" name="Image 0" descr="preencoded.png"/>
           <p:cNvPicPr>
             <a:picLocks noChangeAspect="1"/>
           </p:cNvPicPr>
@@ -11965,7 +11422,7 @@
         </p:blipFill>
         <p:spPr>
           <a:xfrm>
-            <a:off x="786384" y="4764024"/>
+            <a:off x="786384" y="2112264"/>
             <a:ext cx="310896" cy="310896"/>
           </a:xfrm>
           <a:prstGeom prst="rect">
@@ -11975,13 +11432,13 @@
       </p:pic>
       <p:sp>
         <p:nvSpPr>
-          <p:cNvPr id="14" name="Text 9"/>
-          <p:cNvSpPr/>
-          <p:nvPr/>
-        </p:nvSpPr>
-        <p:spPr>
-          <a:xfrm>
-            <a:off x="1508760" y="4572000"/>
+          <p:cNvPr id="6" name="Text 3"/>
+          <p:cNvSpPr/>
+          <p:nvPr/>
+        </p:nvSpPr>
+        <p:spPr>
+          <a:xfrm>
+            <a:off x="1508760" y="1920240"/>
             <a:ext cx="9692640" cy="457200"/>
           </a:xfrm>
           <a:prstGeom prst="rect">
@@ -11994,7 +11451,7 @@
           <a:bodyPr wrap="square" lIns="0" tIns="0" rIns="0" bIns="0" rtlCol="0" anchor="ctr"/>
           <a:lstStyle/>
           <a:p>
-            <a:pPr indent="0" marL="0">
+            <a:pPr marL="0" indent="0">
               <a:lnSpc>
                 <a:spcPts val="2000"/>
               </a:lnSpc>
@@ -12009,7 +11466,7 @@
                 <a:ea typeface="Calibri" pitchFamily="34" charset="-122"/>
                 <a:cs typeface="Calibri" pitchFamily="34" charset="-120"/>
               </a:rPr>
-              <a:t>Representações</a:t>
+              <a:t>Pares ordenados e relações</a:t>
             </a:r>
             <a:endParaRPr lang="en-US" sz="1700" dirty="0"/>
           </a:p>
@@ -12017,13 +11474,13 @@
       </p:sp>
       <p:sp>
         <p:nvSpPr>
-          <p:cNvPr id="15" name="Text 10"/>
-          <p:cNvSpPr/>
-          <p:nvPr/>
-        </p:nvSpPr>
-        <p:spPr>
-          <a:xfrm>
-            <a:off x="1508760" y="5038344"/>
+          <p:cNvPr id="7" name="Text 4"/>
+          <p:cNvSpPr/>
+          <p:nvPr/>
+        </p:nvSpPr>
+        <p:spPr>
+          <a:xfrm>
+            <a:off x="1508760" y="2386584"/>
             <a:ext cx="9692640" cy="411480"/>
           </a:xfrm>
           <a:prstGeom prst="rect">
@@ -12036,7 +11493,7 @@
           <a:bodyPr wrap="square" lIns="0" tIns="0" rIns="0" bIns="0" rtlCol="0" anchor="ctr"/>
           <a:lstStyle/>
           <a:p>
-            <a:pPr indent="0" marL="0">
+            <a:pPr marL="0" indent="0">
               <a:buNone/>
             </a:pPr>
             <a:r>
@@ -12048,7 +11505,7 @@
                 <a:ea typeface="Calibri" pitchFamily="34" charset="-122"/>
                 <a:cs typeface="Calibri" pitchFamily="34" charset="-120"/>
               </a:rPr>
-              <a:t>Lista e matriz de adjacência.</a:t>
+              <a:t>O mínimo necessário para entender grafos.</a:t>
             </a:r>
             <a:endParaRPr lang="en-US" sz="1300" dirty="0"/>
           </a:p>
@@ -12056,13 +11513,13 @@
       </p:sp>
       <p:sp>
         <p:nvSpPr>
-          <p:cNvPr id="16" name="Shape 11"/>
-          <p:cNvSpPr/>
-          <p:nvPr/>
-        </p:nvSpPr>
-        <p:spPr>
-          <a:xfrm>
-            <a:off x="640080" y="5943600"/>
+          <p:cNvPr id="8" name="Shape 5"/>
+          <p:cNvSpPr/>
+          <p:nvPr/>
+        </p:nvSpPr>
+        <p:spPr>
+          <a:xfrm>
+            <a:off x="640080" y="3291840"/>
             <a:ext cx="603504" cy="603504"/>
           </a:xfrm>
           <a:prstGeom prst="ellipse">
@@ -12076,7 +11533,7 @@
       </p:sp>
       <p:pic>
         <p:nvPicPr>
-          <p:cNvPr id="17" name="Image 3" descr="preencoded.png">    </p:cNvPr>
+          <p:cNvPr id="9" name="Image 1" descr="preencoded.png"/>
           <p:cNvPicPr>
             <a:picLocks noChangeAspect="1"/>
           </p:cNvPicPr>
@@ -12090,7 +11547,7 @@
         </p:blipFill>
         <p:spPr>
           <a:xfrm>
-            <a:off x="786384" y="6089904"/>
+            <a:off x="786384" y="3438144"/>
             <a:ext cx="310896" cy="310896"/>
           </a:xfrm>
           <a:prstGeom prst="rect">
@@ -12100,13 +11557,13 @@
       </p:pic>
       <p:sp>
         <p:nvSpPr>
-          <p:cNvPr id="18" name="Text 12"/>
-          <p:cNvSpPr/>
-          <p:nvPr/>
-        </p:nvSpPr>
-        <p:spPr>
-          <a:xfrm>
-            <a:off x="1508760" y="5897880"/>
+          <p:cNvPr id="10" name="Text 6"/>
+          <p:cNvSpPr/>
+          <p:nvPr/>
+        </p:nvSpPr>
+        <p:spPr>
+          <a:xfrm>
+            <a:off x="1508760" y="3246120"/>
             <a:ext cx="9692640" cy="457200"/>
           </a:xfrm>
           <a:prstGeom prst="rect">
@@ -12119,7 +11576,7 @@
           <a:bodyPr wrap="square" lIns="0" tIns="0" rIns="0" bIns="0" rtlCol="0" anchor="ctr"/>
           <a:lstStyle/>
           <a:p>
-            <a:pPr indent="0" marL="0">
+            <a:pPr marL="0" indent="0">
               <a:lnSpc>
                 <a:spcPts val="2000"/>
               </a:lnSpc>
@@ -12134,7 +11591,7 @@
                 <a:ea typeface="Calibri" pitchFamily="34" charset="-122"/>
                 <a:cs typeface="Calibri" pitchFamily="34" charset="-120"/>
               </a:rPr>
-              <a:t>Grau, caminho e ciclo</a:t>
+              <a:t>O que é um grafo</a:t>
             </a:r>
             <a:endParaRPr lang="en-US" sz="1700" dirty="0"/>
           </a:p>
@@ -12142,13 +11599,13 @@
       </p:sp>
       <p:sp>
         <p:nvSpPr>
-          <p:cNvPr id="19" name="Text 13"/>
-          <p:cNvSpPr/>
-          <p:nvPr/>
-        </p:nvSpPr>
-        <p:spPr>
-          <a:xfrm>
-            <a:off x="1508760" y="6364224"/>
+          <p:cNvPr id="11" name="Text 7"/>
+          <p:cNvSpPr/>
+          <p:nvPr/>
+        </p:nvSpPr>
+        <p:spPr>
+          <a:xfrm>
+            <a:off x="1508760" y="3712464"/>
             <a:ext cx="9692640" cy="411480"/>
           </a:xfrm>
           <a:prstGeom prst="rect">
@@ -12161,7 +11618,7 @@
           <a:bodyPr wrap="square" lIns="0" tIns="0" rIns="0" bIns="0" rtlCol="0" anchor="ctr"/>
           <a:lstStyle/>
           <a:p>
-            <a:pPr indent="0" marL="0">
+            <a:pPr marL="0" indent="0">
               <a:buNone/>
             </a:pPr>
             <a:r>
@@ -12173,6 +11630,256 @@
                 <a:ea typeface="Calibri" pitchFamily="34" charset="-122"/>
                 <a:cs typeface="Calibri" pitchFamily="34" charset="-120"/>
               </a:rPr>
+              <a:t>Vértices, arestas e os três tipos principais.</a:t>
+            </a:r>
+            <a:endParaRPr lang="en-US" sz="1300" dirty="0"/>
+          </a:p>
+        </p:txBody>
+      </p:sp>
+      <p:sp>
+        <p:nvSpPr>
+          <p:cNvPr id="12" name="Shape 8"/>
+          <p:cNvSpPr/>
+          <p:nvPr/>
+        </p:nvSpPr>
+        <p:spPr>
+          <a:xfrm>
+            <a:off x="640080" y="4617720"/>
+            <a:ext cx="603504" cy="603504"/>
+          </a:xfrm>
+          <a:prstGeom prst="ellipse">
+            <a:avLst/>
+          </a:prstGeom>
+          <a:solidFill>
+            <a:srgbClr val="6C4BC1"/>
+          </a:solidFill>
+          <a:ln/>
+        </p:spPr>
+      </p:sp>
+      <p:pic>
+        <p:nvPicPr>
+          <p:cNvPr id="13" name="Image 2" descr="preencoded.png"/>
+          <p:cNvPicPr>
+            <a:picLocks noChangeAspect="1"/>
+          </p:cNvPicPr>
+          <p:nvPr/>
+        </p:nvPicPr>
+        <p:blipFill>
+          <a:blip r:embed="rId5"/>
+          <a:stretch>
+            <a:fillRect/>
+          </a:stretch>
+        </p:blipFill>
+        <p:spPr>
+          <a:xfrm>
+            <a:off x="786384" y="4764024"/>
+            <a:ext cx="310896" cy="310896"/>
+          </a:xfrm>
+          <a:prstGeom prst="rect">
+            <a:avLst/>
+          </a:prstGeom>
+        </p:spPr>
+      </p:pic>
+      <p:sp>
+        <p:nvSpPr>
+          <p:cNvPr id="14" name="Text 9"/>
+          <p:cNvSpPr/>
+          <p:nvPr/>
+        </p:nvSpPr>
+        <p:spPr>
+          <a:xfrm>
+            <a:off x="1508760" y="4572000"/>
+            <a:ext cx="9692640" cy="457200"/>
+          </a:xfrm>
+          <a:prstGeom prst="rect">
+            <a:avLst/>
+          </a:prstGeom>
+          <a:noFill/>
+          <a:ln/>
+        </p:spPr>
+        <p:txBody>
+          <a:bodyPr wrap="square" lIns="0" tIns="0" rIns="0" bIns="0" rtlCol="0" anchor="ctr"/>
+          <a:lstStyle/>
+          <a:p>
+            <a:pPr marL="0" indent="0">
+              <a:lnSpc>
+                <a:spcPts val="2000"/>
+              </a:lnSpc>
+              <a:buNone/>
+            </a:pPr>
+            <a:r>
+              <a:rPr lang="en-US" sz="1700" b="1" dirty="0">
+                <a:solidFill>
+                  <a:srgbClr val="1B1B2F"/>
+                </a:solidFill>
+                <a:latin typeface="Calibri" pitchFamily="34" charset="0"/>
+                <a:ea typeface="Calibri" pitchFamily="34" charset="-122"/>
+                <a:cs typeface="Calibri" pitchFamily="34" charset="-120"/>
+              </a:rPr>
+              <a:t>Representações</a:t>
+            </a:r>
+            <a:endParaRPr lang="en-US" sz="1700" dirty="0"/>
+          </a:p>
+        </p:txBody>
+      </p:sp>
+      <p:sp>
+        <p:nvSpPr>
+          <p:cNvPr id="15" name="Text 10"/>
+          <p:cNvSpPr/>
+          <p:nvPr/>
+        </p:nvSpPr>
+        <p:spPr>
+          <a:xfrm>
+            <a:off x="1508760" y="5038344"/>
+            <a:ext cx="9692640" cy="411480"/>
+          </a:xfrm>
+          <a:prstGeom prst="rect">
+            <a:avLst/>
+          </a:prstGeom>
+          <a:noFill/>
+          <a:ln/>
+        </p:spPr>
+        <p:txBody>
+          <a:bodyPr wrap="square" lIns="0" tIns="0" rIns="0" bIns="0" rtlCol="0" anchor="ctr"/>
+          <a:lstStyle/>
+          <a:p>
+            <a:pPr marL="0" indent="0">
+              <a:buNone/>
+            </a:pPr>
+            <a:r>
+              <a:rPr lang="en-US" sz="1300" dirty="0">
+                <a:solidFill>
+                  <a:srgbClr val="6B6B80"/>
+                </a:solidFill>
+                <a:latin typeface="Calibri" pitchFamily="34" charset="0"/>
+                <a:ea typeface="Calibri" pitchFamily="34" charset="-122"/>
+                <a:cs typeface="Calibri" pitchFamily="34" charset="-120"/>
+              </a:rPr>
+              <a:t>Lista e matriz de adjacência.</a:t>
+            </a:r>
+            <a:endParaRPr lang="en-US" sz="1300" dirty="0"/>
+          </a:p>
+        </p:txBody>
+      </p:sp>
+      <p:sp>
+        <p:nvSpPr>
+          <p:cNvPr id="16" name="Shape 11"/>
+          <p:cNvSpPr/>
+          <p:nvPr/>
+        </p:nvSpPr>
+        <p:spPr>
+          <a:xfrm>
+            <a:off x="640080" y="5943600"/>
+            <a:ext cx="603504" cy="603504"/>
+          </a:xfrm>
+          <a:prstGeom prst="ellipse">
+            <a:avLst/>
+          </a:prstGeom>
+          <a:solidFill>
+            <a:srgbClr val="6C4BC1"/>
+          </a:solidFill>
+          <a:ln/>
+        </p:spPr>
+      </p:sp>
+      <p:pic>
+        <p:nvPicPr>
+          <p:cNvPr id="17" name="Image 3" descr="preencoded.png"/>
+          <p:cNvPicPr>
+            <a:picLocks noChangeAspect="1"/>
+          </p:cNvPicPr>
+          <p:nvPr/>
+        </p:nvPicPr>
+        <p:blipFill>
+          <a:blip r:embed="rId6"/>
+          <a:stretch>
+            <a:fillRect/>
+          </a:stretch>
+        </p:blipFill>
+        <p:spPr>
+          <a:xfrm>
+            <a:off x="786384" y="6089904"/>
+            <a:ext cx="310896" cy="310896"/>
+          </a:xfrm>
+          <a:prstGeom prst="rect">
+            <a:avLst/>
+          </a:prstGeom>
+        </p:spPr>
+      </p:pic>
+      <p:sp>
+        <p:nvSpPr>
+          <p:cNvPr id="18" name="Text 12"/>
+          <p:cNvSpPr/>
+          <p:nvPr/>
+        </p:nvSpPr>
+        <p:spPr>
+          <a:xfrm>
+            <a:off x="1508760" y="5897880"/>
+            <a:ext cx="9692640" cy="457200"/>
+          </a:xfrm>
+          <a:prstGeom prst="rect">
+            <a:avLst/>
+          </a:prstGeom>
+          <a:noFill/>
+          <a:ln/>
+        </p:spPr>
+        <p:txBody>
+          <a:bodyPr wrap="square" lIns="0" tIns="0" rIns="0" bIns="0" rtlCol="0" anchor="ctr"/>
+          <a:lstStyle/>
+          <a:p>
+            <a:pPr marL="0" indent="0">
+              <a:lnSpc>
+                <a:spcPts val="2000"/>
+              </a:lnSpc>
+              <a:buNone/>
+            </a:pPr>
+            <a:r>
+              <a:rPr lang="en-US" sz="1700" b="1" dirty="0">
+                <a:solidFill>
+                  <a:srgbClr val="1B1B2F"/>
+                </a:solidFill>
+                <a:latin typeface="Calibri" pitchFamily="34" charset="0"/>
+                <a:ea typeface="Calibri" pitchFamily="34" charset="-122"/>
+                <a:cs typeface="Calibri" pitchFamily="34" charset="-120"/>
+              </a:rPr>
+              <a:t>Grau, caminho e ciclo</a:t>
+            </a:r>
+            <a:endParaRPr lang="en-US" sz="1700" dirty="0"/>
+          </a:p>
+        </p:txBody>
+      </p:sp>
+      <p:sp>
+        <p:nvSpPr>
+          <p:cNvPr id="19" name="Text 13"/>
+          <p:cNvSpPr/>
+          <p:nvPr/>
+        </p:nvSpPr>
+        <p:spPr>
+          <a:xfrm>
+            <a:off x="1508760" y="6364224"/>
+            <a:ext cx="9692640" cy="411480"/>
+          </a:xfrm>
+          <a:prstGeom prst="rect">
+            <a:avLst/>
+          </a:prstGeom>
+          <a:noFill/>
+          <a:ln/>
+        </p:spPr>
+        <p:txBody>
+          <a:bodyPr wrap="square" lIns="0" tIns="0" rIns="0" bIns="0" rtlCol="0" anchor="ctr"/>
+          <a:lstStyle/>
+          <a:p>
+            <a:pPr marL="0" indent="0">
+              <a:buNone/>
+            </a:pPr>
+            <a:r>
+              <a:rPr lang="en-US" sz="1300" dirty="0">
+                <a:solidFill>
+                  <a:srgbClr val="6B6B80"/>
+                </a:solidFill>
+                <a:latin typeface="Calibri" pitchFamily="34" charset="0"/>
+                <a:ea typeface="Calibri" pitchFamily="34" charset="-122"/>
+                <a:cs typeface="Calibri" pitchFamily="34" charset="-120"/>
+              </a:rPr>
               <a:t>Os conceitos que toda análise de grafo usa.</a:t>
             </a:r>
             <a:endParaRPr lang="en-US" sz="1300" dirty="0"/>
@@ -12200,7 +11907,7 @@
           <a:bodyPr wrap="square" lIns="0" tIns="0" rIns="0" bIns="0" rtlCol="0" anchor="ctr"/>
           <a:lstStyle/>
           <a:p>
-            <a:pPr algn="r" indent="0" marL="0">
+            <a:pPr marL="0" indent="0" algn="r">
               <a:buNone/>
             </a:pPr>
             <a:r>
@@ -12234,6 +11941,7 @@
         <a:solidFill>
           <a:srgbClr val="FFFFFF"/>
         </a:solidFill>
+        <a:effectLst/>
       </p:bgPr>
     </p:bg>
     <p:spTree>
@@ -12272,14 +11980,14 @@
       </p:sp>
       <p:pic>
         <p:nvPicPr>
-          <p:cNvPr id="3" name="Image 0" descr="preencoded.png">    </p:cNvPr>
+          <p:cNvPr id="3" name="Image 0" descr="preencoded.png"/>
           <p:cNvPicPr>
             <a:picLocks noChangeAspect="1"/>
           </p:cNvPicPr>
           <p:nvPr/>
         </p:nvPicPr>
         <p:blipFill>
-          <a:blip r:embed="rId1"/>
+          <a:blip r:embed="rId3"/>
           <a:stretch>
             <a:fillRect/>
           </a:stretch>
@@ -12315,11 +12023,11 @@
           <a:bodyPr wrap="square" lIns="0" tIns="0" rIns="0" bIns="0" rtlCol="0" anchor="ctr"/>
           <a:lstStyle/>
           <a:p>
-            <a:pPr indent="0" marL="0">
-              <a:buNone/>
-            </a:pPr>
-            <a:r>
-              <a:rPr lang="en-US" sz="1200" b="1" spc="150" kern="0" dirty="0">
+            <a:pPr marL="0" indent="0">
+              <a:buNone/>
+            </a:pPr>
+            <a:r>
+              <a:rPr lang="en-US" sz="1200" b="1" kern="0" spc="150" dirty="0">
                 <a:solidFill>
                   <a:srgbClr val="3EBD59"/>
                 </a:solidFill>
@@ -12354,7 +12062,7 @@
           <a:bodyPr wrap="square" lIns="0" tIns="0" rIns="0" bIns="0" rtlCol="0" anchor="ctr"/>
           <a:lstStyle/>
           <a:p>
-            <a:pPr indent="0" marL="0">
+            <a:pPr marL="0" indent="0">
               <a:buNone/>
             </a:pPr>
             <a:r>
@@ -12415,7 +12123,7 @@
           <a:bodyPr wrap="square" lIns="0" tIns="0" rIns="0" bIns="0" rtlCol="0" anchor="ctr"/>
           <a:lstStyle/>
           <a:p>
-            <a:pPr algn="ctr" indent="0" marL="0">
+            <a:pPr marL="0" indent="0" algn="ctr">
               <a:buNone/>
             </a:pPr>
             <a:r>
@@ -12571,7 +12279,7 @@
           <a:bodyPr wrap="square" lIns="0" tIns="0" rIns="0" bIns="0" rtlCol="0" anchor="ctr"/>
           <a:lstStyle/>
           <a:p>
-            <a:pPr algn="ctr" indent="0" marL="0">
+            <a:pPr marL="0" indent="0" algn="ctr">
               <a:buNone/>
             </a:pPr>
             <a:r>
@@ -12635,7 +12343,7 @@
           <a:bodyPr wrap="square" lIns="0" tIns="0" rIns="0" bIns="0" rtlCol="0" anchor="ctr"/>
           <a:lstStyle/>
           <a:p>
-            <a:pPr algn="ctr" indent="0" marL="0">
+            <a:pPr marL="0" indent="0" algn="ctr">
               <a:buNone/>
             </a:pPr>
             <a:r>
@@ -12699,7 +12407,7 @@
           <a:bodyPr wrap="square" lIns="0" tIns="0" rIns="0" bIns="0" rtlCol="0" anchor="ctr"/>
           <a:lstStyle/>
           <a:p>
-            <a:pPr algn="ctr" indent="0" marL="0">
+            <a:pPr marL="0" indent="0" algn="ctr">
               <a:buNone/>
             </a:pPr>
             <a:r>
@@ -12763,7 +12471,7 @@
           <a:bodyPr wrap="square" lIns="0" tIns="0" rIns="0" bIns="0" rtlCol="0" anchor="ctr"/>
           <a:lstStyle/>
           <a:p>
-            <a:pPr algn="ctr" indent="0" marL="0">
+            <a:pPr marL="0" indent="0" algn="ctr">
               <a:buNone/>
             </a:pPr>
             <a:r>
@@ -12802,7 +12510,7 @@
           <a:bodyPr wrap="square" lIns="0" tIns="0" rIns="0" bIns="0" rtlCol="0" anchor="ctr"/>
           <a:lstStyle/>
           <a:p>
-            <a:pPr indent="0" marL="0">
+            <a:pPr marL="0" indent="0">
               <a:lnSpc>
                 <a:spcPts val="2000"/>
               </a:lnSpc>
@@ -12844,7 +12552,7 @@
           <a:bodyPr wrap="square" lIns="0" tIns="0" rIns="0" bIns="0" rtlCol="0" anchor="ctr"/>
           <a:lstStyle/>
           <a:p>
-            <a:pPr algn="r" indent="0" marL="0">
+            <a:pPr marL="0" indent="0" algn="r">
               <a:buNone/>
             </a:pPr>
             <a:r>
@@ -12878,6 +12586,7 @@
         <a:solidFill>
           <a:srgbClr val="FFFFFF"/>
         </a:solidFill>
+        <a:effectLst/>
       </p:bgPr>
     </p:bg>
     <p:spTree>
@@ -12916,14 +12625,14 @@
       </p:sp>
       <p:pic>
         <p:nvPicPr>
-          <p:cNvPr id="3" name="Image 0" descr="preencoded.png">    </p:cNvPr>
+          <p:cNvPr id="3" name="Image 0" descr="preencoded.png"/>
           <p:cNvPicPr>
             <a:picLocks noChangeAspect="1"/>
           </p:cNvPicPr>
           <p:nvPr/>
         </p:nvPicPr>
         <p:blipFill>
-          <a:blip r:embed="rId1"/>
+          <a:blip r:embed="rId3"/>
           <a:stretch>
             <a:fillRect/>
           </a:stretch>
@@ -12959,11 +12668,11 @@
           <a:bodyPr wrap="square" lIns="0" tIns="0" rIns="0" bIns="0" rtlCol="0" anchor="ctr"/>
           <a:lstStyle/>
           <a:p>
-            <a:pPr indent="0" marL="0">
-              <a:buNone/>
-            </a:pPr>
-            <a:r>
-              <a:rPr lang="en-US" sz="1200" b="1" spc="150" kern="0" dirty="0">
+            <a:pPr marL="0" indent="0">
+              <a:buNone/>
+            </a:pPr>
+            <a:r>
+              <a:rPr lang="en-US" sz="1200" b="1" kern="0" spc="150" dirty="0">
                 <a:solidFill>
                   <a:srgbClr val="6C4BC1"/>
                 </a:solidFill>
@@ -12998,7 +12707,7 @@
           <a:bodyPr wrap="square" lIns="0" tIns="0" rIns="0" bIns="0" rtlCol="0" anchor="ctr"/>
           <a:lstStyle/>
           <a:p>
-            <a:pPr indent="0" marL="0">
+            <a:pPr marL="0" indent="0">
               <a:buNone/>
             </a:pPr>
             <a:r>
@@ -13037,7 +12746,7 @@
           <a:bodyPr wrap="square" lIns="0" tIns="0" rIns="0" bIns="0" rtlCol="0" anchor="ctr"/>
           <a:lstStyle/>
           <a:p>
-            <a:pPr indent="0" marL="0">
+            <a:pPr marL="0" indent="0">
               <a:lnSpc>
                 <a:spcPts val="1900"/>
               </a:lnSpc>
@@ -13081,11 +12790,41 @@
             <a:tbl>
               <a:tblPr/>
               <a:tblGrid>
-                <a:gridCol w="914400"/>
-                <a:gridCol w="914400"/>
-                <a:gridCol w="914400"/>
-                <a:gridCol w="914400"/>
-                <a:gridCol w="914400"/>
+                <a:gridCol w="914400">
+                  <a:extLst>
+                    <a:ext uri="{9D8B030D-6E8A-4147-A177-3AD203B41FA5}">
+                      <a16:colId xmlns:a16="http://schemas.microsoft.com/office/drawing/2014/main" val="20000"/>
+                    </a:ext>
+                  </a:extLst>
+                </a:gridCol>
+                <a:gridCol w="914400">
+                  <a:extLst>
+                    <a:ext uri="{9D8B030D-6E8A-4147-A177-3AD203B41FA5}">
+                      <a16:colId xmlns:a16="http://schemas.microsoft.com/office/drawing/2014/main" val="20001"/>
+                    </a:ext>
+                  </a:extLst>
+                </a:gridCol>
+                <a:gridCol w="914400">
+                  <a:extLst>
+                    <a:ext uri="{9D8B030D-6E8A-4147-A177-3AD203B41FA5}">
+                      <a16:colId xmlns:a16="http://schemas.microsoft.com/office/drawing/2014/main" val="20002"/>
+                    </a:ext>
+                  </a:extLst>
+                </a:gridCol>
+                <a:gridCol w="914400">
+                  <a:extLst>
+                    <a:ext uri="{9D8B030D-6E8A-4147-A177-3AD203B41FA5}">
+                      <a16:colId xmlns:a16="http://schemas.microsoft.com/office/drawing/2014/main" val="20003"/>
+                    </a:ext>
+                  </a:extLst>
+                </a:gridCol>
+                <a:gridCol w="914400">
+                  <a:extLst>
+                    <a:ext uri="{9D8B030D-6E8A-4147-A177-3AD203B41FA5}">
+                      <a16:colId xmlns:a16="http://schemas.microsoft.com/office/drawing/2014/main" val="20004"/>
+                    </a:ext>
+                  </a:extLst>
+                </a:gridCol>
               </a:tblGrid>
               <a:tr h="457200">
                 <a:tc>
@@ -13093,7 +12832,7 @@
                     <a:bodyPr/>
                     <a:lstStyle/>
                     <a:p>
-                      <a:pPr algn="ctr" indent="0" marL="0">
+                      <a:pPr marL="0" indent="0" algn="ctr">
                         <a:buNone/>
                       </a:pPr>
                       <a:endParaRPr lang="en-US" sz="1100" dirty="0">
@@ -13103,7 +12842,7 @@
                       </a:endParaRPr>
                     </a:p>
                   </a:txBody>
-                  <a:tcPr marL="91440" marR="91440" marT="45720" marB="45720" anchor="ctr">
+                  <a:tcPr anchor="ctr">
                     <a:lnL w="38100" cap="flat" cmpd="sng" algn="ctr">
                       <a:solidFill>
                         <a:srgbClr val="FFFFFF"/>
@@ -13150,7 +12889,7 @@
                     <a:bodyPr/>
                     <a:lstStyle/>
                     <a:p>
-                      <a:pPr algn="ctr" indent="0" marL="0">
+                      <a:pPr marL="0" indent="0" algn="ctr">
                         <a:buNone/>
                       </a:pPr>
                       <a:r>
@@ -13171,7 +12910,7 @@
                       </a:endParaRPr>
                     </a:p>
                   </a:txBody>
-                  <a:tcPr marL="91440" marR="91440" marT="45720" marB="45720" anchor="ctr">
+                  <a:tcPr anchor="ctr">
                     <a:lnL w="38100" cap="flat" cmpd="sng" algn="ctr">
                       <a:solidFill>
                         <a:srgbClr val="FFFFFF"/>
@@ -13218,7 +12957,7 @@
                     <a:bodyPr/>
                     <a:lstStyle/>
                     <a:p>
-                      <a:pPr algn="ctr" indent="0" marL="0">
+                      <a:pPr marL="0" indent="0" algn="ctr">
                         <a:buNone/>
                       </a:pPr>
                       <a:r>
@@ -13239,7 +12978,7 @@
                       </a:endParaRPr>
                     </a:p>
                   </a:txBody>
-                  <a:tcPr marL="91440" marR="91440" marT="45720" marB="45720" anchor="ctr">
+                  <a:tcPr anchor="ctr">
                     <a:lnL w="38100" cap="flat" cmpd="sng" algn="ctr">
                       <a:solidFill>
                         <a:srgbClr val="FFFFFF"/>
@@ -13286,7 +13025,7 @@
                     <a:bodyPr/>
                     <a:lstStyle/>
                     <a:p>
-                      <a:pPr algn="ctr" indent="0" marL="0">
+                      <a:pPr marL="0" indent="0" algn="ctr">
                         <a:buNone/>
                       </a:pPr>
                       <a:r>
@@ -13307,7 +13046,7 @@
                       </a:endParaRPr>
                     </a:p>
                   </a:txBody>
-                  <a:tcPr marL="91440" marR="91440" marT="45720" marB="45720" anchor="ctr">
+                  <a:tcPr anchor="ctr">
                     <a:lnL w="38100" cap="flat" cmpd="sng" algn="ctr">
                       <a:solidFill>
                         <a:srgbClr val="FFFFFF"/>
@@ -13354,7 +13093,7 @@
                     <a:bodyPr/>
                     <a:lstStyle/>
                     <a:p>
-                      <a:pPr algn="ctr" indent="0" marL="0">
+                      <a:pPr marL="0" indent="0" algn="ctr">
                         <a:buNone/>
                       </a:pPr>
                       <a:r>
@@ -13375,7 +13114,7 @@
                       </a:endParaRPr>
                     </a:p>
                   </a:txBody>
-                  <a:tcPr marL="91440" marR="91440" marT="45720" marB="45720" anchor="ctr">
+                  <a:tcPr anchor="ctr">
                     <a:lnL w="38100" cap="flat" cmpd="sng" algn="ctr">
                       <a:solidFill>
                         <a:srgbClr val="FFFFFF"/>
@@ -13417,6 +13156,11 @@
                     </a:solidFill>
                   </a:tcPr>
                 </a:tc>
+                <a:extLst>
+                  <a:ext uri="{0D108BD9-81ED-4DB2-BD59-A6C34878D82A}">
+                    <a16:rowId xmlns:a16="http://schemas.microsoft.com/office/drawing/2014/main" val="10000"/>
+                  </a:ext>
+                </a:extLst>
               </a:tr>
               <a:tr h="594360">
                 <a:tc>
@@ -13424,7 +13168,7 @@
                     <a:bodyPr/>
                     <a:lstStyle/>
                     <a:p>
-                      <a:pPr algn="ctr" indent="0" marL="0">
+                      <a:pPr marL="0" indent="0" algn="ctr">
                         <a:buNone/>
                       </a:pPr>
                       <a:r>
@@ -13445,7 +13189,7 @@
                       </a:endParaRPr>
                     </a:p>
                   </a:txBody>
-                  <a:tcPr marL="91440" marR="91440" marT="45720" marB="45720" anchor="ctr">
+                  <a:tcPr anchor="ctr">
                     <a:lnL w="38100" cap="flat" cmpd="sng" algn="ctr">
                       <a:solidFill>
                         <a:srgbClr val="FFFFFF"/>
@@ -13492,7 +13236,7 @@
                     <a:bodyPr/>
                     <a:lstStyle/>
                     <a:p>
-                      <a:pPr algn="ctr" indent="0" marL="0">
+                      <a:pPr marL="0" indent="0" algn="ctr">
                         <a:buNone/>
                       </a:pPr>
                       <a:r>
@@ -13513,7 +13257,7 @@
                       </a:endParaRPr>
                     </a:p>
                   </a:txBody>
-                  <a:tcPr marL="91440" marR="91440" marT="45720" marB="45720" anchor="ctr">
+                  <a:tcPr anchor="ctr">
                     <a:lnL w="38100" cap="flat" cmpd="sng" algn="ctr">
                       <a:solidFill>
                         <a:srgbClr val="FFFFFF"/>
@@ -13560,7 +13304,7 @@
                     <a:bodyPr/>
                     <a:lstStyle/>
                     <a:p>
-                      <a:pPr algn="ctr" indent="0" marL="0">
+                      <a:pPr marL="0" indent="0" algn="ctr">
                         <a:buNone/>
                       </a:pPr>
                       <a:r>
@@ -13581,7 +13325,7 @@
                       </a:endParaRPr>
                     </a:p>
                   </a:txBody>
-                  <a:tcPr marL="91440" marR="91440" marT="45720" marB="45720" anchor="ctr">
+                  <a:tcPr anchor="ctr">
                     <a:lnL w="38100" cap="flat" cmpd="sng" algn="ctr">
                       <a:solidFill>
                         <a:srgbClr val="FFFFFF"/>
@@ -13628,7 +13372,7 @@
                     <a:bodyPr/>
                     <a:lstStyle/>
                     <a:p>
-                      <a:pPr algn="ctr" indent="0" marL="0">
+                      <a:pPr marL="0" indent="0" algn="ctr">
                         <a:buNone/>
                       </a:pPr>
                       <a:r>
@@ -13649,7 +13393,7 @@
                       </a:endParaRPr>
                     </a:p>
                   </a:txBody>
-                  <a:tcPr marL="91440" marR="91440" marT="45720" marB="45720" anchor="ctr">
+                  <a:tcPr anchor="ctr">
                     <a:lnL w="38100" cap="flat" cmpd="sng" algn="ctr">
                       <a:solidFill>
                         <a:srgbClr val="FFFFFF"/>
@@ -13696,7 +13440,7 @@
                     <a:bodyPr/>
                     <a:lstStyle/>
                     <a:p>
-                      <a:pPr algn="ctr" indent="0" marL="0">
+                      <a:pPr marL="0" indent="0" algn="ctr">
                         <a:buNone/>
                       </a:pPr>
                       <a:r>
@@ -13717,7 +13461,7 @@
                       </a:endParaRPr>
                     </a:p>
                   </a:txBody>
-                  <a:tcPr marL="91440" marR="91440" marT="45720" marB="45720" anchor="ctr">
+                  <a:tcPr anchor="ctr">
                     <a:lnL w="38100" cap="flat" cmpd="sng" algn="ctr">
                       <a:solidFill>
                         <a:srgbClr val="FFFFFF"/>
@@ -13759,6 +13503,11 @@
                     </a:solidFill>
                   </a:tcPr>
                 </a:tc>
+                <a:extLst>
+                  <a:ext uri="{0D108BD9-81ED-4DB2-BD59-A6C34878D82A}">
+                    <a16:rowId xmlns:a16="http://schemas.microsoft.com/office/drawing/2014/main" val="10001"/>
+                  </a:ext>
+                </a:extLst>
               </a:tr>
               <a:tr h="594360">
                 <a:tc>
@@ -13766,7 +13515,7 @@
                     <a:bodyPr/>
                     <a:lstStyle/>
                     <a:p>
-                      <a:pPr algn="ctr" indent="0" marL="0">
+                      <a:pPr marL="0" indent="0" algn="ctr">
                         <a:buNone/>
                       </a:pPr>
                       <a:r>
@@ -13787,7 +13536,7 @@
                       </a:endParaRPr>
                     </a:p>
                   </a:txBody>
-                  <a:tcPr marL="91440" marR="91440" marT="45720" marB="45720" anchor="ctr">
+                  <a:tcPr anchor="ctr">
                     <a:lnL w="38100" cap="flat" cmpd="sng" algn="ctr">
                       <a:solidFill>
                         <a:srgbClr val="FFFFFF"/>
@@ -13834,7 +13583,7 @@
                     <a:bodyPr/>
                     <a:lstStyle/>
                     <a:p>
-                      <a:pPr algn="ctr" indent="0" marL="0">
+                      <a:pPr marL="0" indent="0" algn="ctr">
                         <a:buNone/>
                       </a:pPr>
                       <a:r>
@@ -13855,7 +13604,7 @@
                       </a:endParaRPr>
                     </a:p>
                   </a:txBody>
-                  <a:tcPr marL="91440" marR="91440" marT="45720" marB="45720" anchor="ctr">
+                  <a:tcPr anchor="ctr">
                     <a:lnL w="38100" cap="flat" cmpd="sng" algn="ctr">
                       <a:solidFill>
                         <a:srgbClr val="FFFFFF"/>
@@ -13902,7 +13651,7 @@
                     <a:bodyPr/>
                     <a:lstStyle/>
                     <a:p>
-                      <a:pPr algn="ctr" indent="0" marL="0">
+                      <a:pPr marL="0" indent="0" algn="ctr">
                         <a:buNone/>
                       </a:pPr>
                       <a:r>
@@ -13923,7 +13672,7 @@
                       </a:endParaRPr>
                     </a:p>
                   </a:txBody>
-                  <a:tcPr marL="91440" marR="91440" marT="45720" marB="45720" anchor="ctr">
+                  <a:tcPr anchor="ctr">
                     <a:lnL w="38100" cap="flat" cmpd="sng" algn="ctr">
                       <a:solidFill>
                         <a:srgbClr val="FFFFFF"/>
@@ -13970,7 +13719,7 @@
                     <a:bodyPr/>
                     <a:lstStyle/>
                     <a:p>
-                      <a:pPr algn="ctr" indent="0" marL="0">
+                      <a:pPr marL="0" indent="0" algn="ctr">
                         <a:buNone/>
                       </a:pPr>
                       <a:r>
@@ -13991,7 +13740,7 @@
                       </a:endParaRPr>
                     </a:p>
                   </a:txBody>
-                  <a:tcPr marL="91440" marR="91440" marT="45720" marB="45720" anchor="ctr">
+                  <a:tcPr anchor="ctr">
                     <a:lnL w="38100" cap="flat" cmpd="sng" algn="ctr">
                       <a:solidFill>
                         <a:srgbClr val="FFFFFF"/>
@@ -14038,7 +13787,7 @@
                     <a:bodyPr/>
                     <a:lstStyle/>
                     <a:p>
-                      <a:pPr algn="ctr" indent="0" marL="0">
+                      <a:pPr marL="0" indent="0" algn="ctr">
                         <a:buNone/>
                       </a:pPr>
                       <a:r>
@@ -14059,7 +13808,7 @@
                       </a:endParaRPr>
                     </a:p>
                   </a:txBody>
-                  <a:tcPr marL="91440" marR="91440" marT="45720" marB="45720" anchor="ctr">
+                  <a:tcPr anchor="ctr">
                     <a:lnL w="38100" cap="flat" cmpd="sng" algn="ctr">
                       <a:solidFill>
                         <a:srgbClr val="FFFFFF"/>
@@ -14101,6 +13850,11 @@
                     </a:solidFill>
                   </a:tcPr>
                 </a:tc>
+                <a:extLst>
+                  <a:ext uri="{0D108BD9-81ED-4DB2-BD59-A6C34878D82A}">
+                    <a16:rowId xmlns:a16="http://schemas.microsoft.com/office/drawing/2014/main" val="10002"/>
+                  </a:ext>
+                </a:extLst>
               </a:tr>
               <a:tr h="594360">
                 <a:tc>
@@ -14108,7 +13862,7 @@
                     <a:bodyPr/>
                     <a:lstStyle/>
                     <a:p>
-                      <a:pPr algn="ctr" indent="0" marL="0">
+                      <a:pPr marL="0" indent="0" algn="ctr">
                         <a:buNone/>
                       </a:pPr>
                       <a:r>
@@ -14129,7 +13883,7 @@
                       </a:endParaRPr>
                     </a:p>
                   </a:txBody>
-                  <a:tcPr marL="91440" marR="91440" marT="45720" marB="45720" anchor="ctr">
+                  <a:tcPr anchor="ctr">
                     <a:lnL w="38100" cap="flat" cmpd="sng" algn="ctr">
                       <a:solidFill>
                         <a:srgbClr val="FFFFFF"/>
@@ -14176,7 +13930,7 @@
                     <a:bodyPr/>
                     <a:lstStyle/>
                     <a:p>
-                      <a:pPr algn="ctr" indent="0" marL="0">
+                      <a:pPr marL="0" indent="0" algn="ctr">
                         <a:buNone/>
                       </a:pPr>
                       <a:r>
@@ -14197,7 +13951,7 @@
                       </a:endParaRPr>
                     </a:p>
                   </a:txBody>
-                  <a:tcPr marL="91440" marR="91440" marT="45720" marB="45720" anchor="ctr">
+                  <a:tcPr anchor="ctr">
                     <a:lnL w="38100" cap="flat" cmpd="sng" algn="ctr">
                       <a:solidFill>
                         <a:srgbClr val="FFFFFF"/>
@@ -14244,7 +13998,7 @@
                     <a:bodyPr/>
                     <a:lstStyle/>
                     <a:p>
-                      <a:pPr algn="ctr" indent="0" marL="0">
+                      <a:pPr marL="0" indent="0" algn="ctr">
                         <a:buNone/>
                       </a:pPr>
                       <a:r>
@@ -14265,7 +14019,7 @@
                       </a:endParaRPr>
                     </a:p>
                   </a:txBody>
-                  <a:tcPr marL="91440" marR="91440" marT="45720" marB="45720" anchor="ctr">
+                  <a:tcPr anchor="ctr">
                     <a:lnL w="38100" cap="flat" cmpd="sng" algn="ctr">
                       <a:solidFill>
                         <a:srgbClr val="FFFFFF"/>
@@ -14312,7 +14066,7 @@
                     <a:bodyPr/>
                     <a:lstStyle/>
                     <a:p>
-                      <a:pPr algn="ctr" indent="0" marL="0">
+                      <a:pPr marL="0" indent="0" algn="ctr">
                         <a:buNone/>
                       </a:pPr>
                       <a:r>
@@ -14333,7 +14087,7 @@
                       </a:endParaRPr>
                     </a:p>
                   </a:txBody>
-                  <a:tcPr marL="91440" marR="91440" marT="45720" marB="45720" anchor="ctr">
+                  <a:tcPr anchor="ctr">
                     <a:lnL w="38100" cap="flat" cmpd="sng" algn="ctr">
                       <a:solidFill>
                         <a:srgbClr val="FFFFFF"/>
@@ -14380,7 +14134,7 @@
                     <a:bodyPr/>
                     <a:lstStyle/>
                     <a:p>
-                      <a:pPr algn="ctr" indent="0" marL="0">
+                      <a:pPr marL="0" indent="0" algn="ctr">
                         <a:buNone/>
                       </a:pPr>
                       <a:r>
@@ -14401,7 +14155,7 @@
                       </a:endParaRPr>
                     </a:p>
                   </a:txBody>
-                  <a:tcPr marL="91440" marR="91440" marT="45720" marB="45720" anchor="ctr">
+                  <a:tcPr anchor="ctr">
                     <a:lnL w="38100" cap="flat" cmpd="sng" algn="ctr">
                       <a:solidFill>
                         <a:srgbClr val="FFFFFF"/>
@@ -14443,6 +14197,11 @@
                     </a:solidFill>
                   </a:tcPr>
                 </a:tc>
+                <a:extLst>
+                  <a:ext uri="{0D108BD9-81ED-4DB2-BD59-A6C34878D82A}">
+                    <a16:rowId xmlns:a16="http://schemas.microsoft.com/office/drawing/2014/main" val="10003"/>
+                  </a:ext>
+                </a:extLst>
               </a:tr>
               <a:tr h="594360">
                 <a:tc>
@@ -14450,7 +14209,7 @@
                     <a:bodyPr/>
                     <a:lstStyle/>
                     <a:p>
-                      <a:pPr algn="ctr" indent="0" marL="0">
+                      <a:pPr marL="0" indent="0" algn="ctr">
                         <a:buNone/>
                       </a:pPr>
                       <a:r>
@@ -14471,7 +14230,7 @@
                       </a:endParaRPr>
                     </a:p>
                   </a:txBody>
-                  <a:tcPr marL="91440" marR="91440" marT="45720" marB="45720" anchor="ctr">
+                  <a:tcPr anchor="ctr">
                     <a:lnL w="38100" cap="flat" cmpd="sng" algn="ctr">
                       <a:solidFill>
                         <a:srgbClr val="FFFFFF"/>
@@ -14518,7 +14277,7 @@
                     <a:bodyPr/>
                     <a:lstStyle/>
                     <a:p>
-                      <a:pPr algn="ctr" indent="0" marL="0">
+                      <a:pPr marL="0" indent="0" algn="ctr">
                         <a:buNone/>
                       </a:pPr>
                       <a:r>
@@ -14539,7 +14298,7 @@
                       </a:endParaRPr>
                     </a:p>
                   </a:txBody>
-                  <a:tcPr marL="91440" marR="91440" marT="45720" marB="45720" anchor="ctr">
+                  <a:tcPr anchor="ctr">
                     <a:lnL w="38100" cap="flat" cmpd="sng" algn="ctr">
                       <a:solidFill>
                         <a:srgbClr val="FFFFFF"/>
@@ -14586,7 +14345,7 @@
                     <a:bodyPr/>
                     <a:lstStyle/>
                     <a:p>
-                      <a:pPr algn="ctr" indent="0" marL="0">
+                      <a:pPr marL="0" indent="0" algn="ctr">
                         <a:buNone/>
                       </a:pPr>
                       <a:r>
@@ -14607,7 +14366,7 @@
                       </a:endParaRPr>
                     </a:p>
                   </a:txBody>
-                  <a:tcPr marL="91440" marR="91440" marT="45720" marB="45720" anchor="ctr">
+                  <a:tcPr anchor="ctr">
                     <a:lnL w="38100" cap="flat" cmpd="sng" algn="ctr">
                       <a:solidFill>
                         <a:srgbClr val="FFFFFF"/>
@@ -14654,7 +14413,7 @@
                     <a:bodyPr/>
                     <a:lstStyle/>
                     <a:p>
-                      <a:pPr algn="ctr" indent="0" marL="0">
+                      <a:pPr marL="0" indent="0" algn="ctr">
                         <a:buNone/>
                       </a:pPr>
                       <a:r>
@@ -14675,7 +14434,7 @@
                       </a:endParaRPr>
                     </a:p>
                   </a:txBody>
-                  <a:tcPr marL="91440" marR="91440" marT="45720" marB="45720" anchor="ctr">
+                  <a:tcPr anchor="ctr">
                     <a:lnL w="38100" cap="flat" cmpd="sng" algn="ctr">
                       <a:solidFill>
                         <a:srgbClr val="FFFFFF"/>
@@ -14722,7 +14481,7 @@
                     <a:bodyPr/>
                     <a:lstStyle/>
                     <a:p>
-                      <a:pPr algn="ctr" indent="0" marL="0">
+                      <a:pPr marL="0" indent="0" algn="ctr">
                         <a:buNone/>
                       </a:pPr>
                       <a:r>
@@ -14743,7 +14502,7 @@
                       </a:endParaRPr>
                     </a:p>
                   </a:txBody>
-                  <a:tcPr marL="91440" marR="91440" marT="45720" marB="45720" anchor="ctr">
+                  <a:tcPr anchor="ctr">
                     <a:lnL w="38100" cap="flat" cmpd="sng" algn="ctr">
                       <a:solidFill>
                         <a:srgbClr val="FFFFFF"/>
@@ -14785,6 +14544,11 @@
                     </a:solidFill>
                   </a:tcPr>
                 </a:tc>
+                <a:extLst>
+                  <a:ext uri="{0D108BD9-81ED-4DB2-BD59-A6C34878D82A}">
+                    <a16:rowId xmlns:a16="http://schemas.microsoft.com/office/drawing/2014/main" val="10004"/>
+                  </a:ext>
+                </a:extLst>
               </a:tr>
             </a:tbl>
           </a:graphicData>
@@ -14811,7 +14575,7 @@
           <a:bodyPr wrap="square" lIns="0" tIns="0" rIns="0" bIns="0" rtlCol="0" anchor="ctr"/>
           <a:lstStyle/>
           <a:p>
-            <a:pPr algn="r" indent="0" marL="0">
+            <a:pPr marL="0" indent="0" algn="r">
               <a:buNone/>
             </a:pPr>
             <a:r>
@@ -14845,6 +14609,7 @@
         <a:solidFill>
           <a:srgbClr val="FFFFFF"/>
         </a:solidFill>
+        <a:effectLst/>
       </p:bgPr>
     </p:bg>
     <p:spTree>
@@ -14883,14 +14648,14 @@
       </p:sp>
       <p:pic>
         <p:nvPicPr>
-          <p:cNvPr id="3" name="Image 0" descr="preencoded.png">    </p:cNvPr>
+          <p:cNvPr id="3" name="Image 0" descr="preencoded.png"/>
           <p:cNvPicPr>
             <a:picLocks noChangeAspect="1"/>
           </p:cNvPicPr>
           <p:nvPr/>
         </p:nvPicPr>
         <p:blipFill>
-          <a:blip r:embed="rId1"/>
+          <a:blip r:embed="rId3"/>
           <a:stretch>
             <a:fillRect/>
           </a:stretch>
@@ -14926,11 +14691,11 @@
           <a:bodyPr wrap="square" lIns="0" tIns="0" rIns="0" bIns="0" rtlCol="0" anchor="ctr"/>
           <a:lstStyle/>
           <a:p>
-            <a:pPr indent="0" marL="0">
-              <a:buNone/>
-            </a:pPr>
-            <a:r>
-              <a:rPr lang="en-US" sz="1200" b="1" spc="150" kern="0" dirty="0">
+            <a:pPr marL="0" indent="0">
+              <a:buNone/>
+            </a:pPr>
+            <a:r>
+              <a:rPr lang="en-US" sz="1200" b="1" kern="0" spc="150" dirty="0">
                 <a:solidFill>
                   <a:srgbClr val="3EBD59"/>
                 </a:solidFill>
@@ -14965,7 +14730,7 @@
           <a:bodyPr wrap="square" lIns="0" tIns="0" rIns="0" bIns="0" rtlCol="0" anchor="ctr"/>
           <a:lstStyle/>
           <a:p>
-            <a:pPr indent="0" marL="0">
+            <a:pPr marL="0" indent="0">
               <a:buNone/>
             </a:pPr>
             <a:r>
@@ -15006,11 +14771,41 @@
             <a:tbl>
               <a:tblPr/>
               <a:tblGrid>
-                <a:gridCol w="914400"/>
-                <a:gridCol w="914400"/>
-                <a:gridCol w="914400"/>
-                <a:gridCol w="914400"/>
-                <a:gridCol w="914400"/>
+                <a:gridCol w="914400">
+                  <a:extLst>
+                    <a:ext uri="{9D8B030D-6E8A-4147-A177-3AD203B41FA5}">
+                      <a16:colId xmlns:a16="http://schemas.microsoft.com/office/drawing/2014/main" val="20000"/>
+                    </a:ext>
+                  </a:extLst>
+                </a:gridCol>
+                <a:gridCol w="914400">
+                  <a:extLst>
+                    <a:ext uri="{9D8B030D-6E8A-4147-A177-3AD203B41FA5}">
+                      <a16:colId xmlns:a16="http://schemas.microsoft.com/office/drawing/2014/main" val="20001"/>
+                    </a:ext>
+                  </a:extLst>
+                </a:gridCol>
+                <a:gridCol w="914400">
+                  <a:extLst>
+                    <a:ext uri="{9D8B030D-6E8A-4147-A177-3AD203B41FA5}">
+                      <a16:colId xmlns:a16="http://schemas.microsoft.com/office/drawing/2014/main" val="20002"/>
+                    </a:ext>
+                  </a:extLst>
+                </a:gridCol>
+                <a:gridCol w="914400">
+                  <a:extLst>
+                    <a:ext uri="{9D8B030D-6E8A-4147-A177-3AD203B41FA5}">
+                      <a16:colId xmlns:a16="http://schemas.microsoft.com/office/drawing/2014/main" val="20003"/>
+                    </a:ext>
+                  </a:extLst>
+                </a:gridCol>
+                <a:gridCol w="914400">
+                  <a:extLst>
+                    <a:ext uri="{9D8B030D-6E8A-4147-A177-3AD203B41FA5}">
+                      <a16:colId xmlns:a16="http://schemas.microsoft.com/office/drawing/2014/main" val="20004"/>
+                    </a:ext>
+                  </a:extLst>
+                </a:gridCol>
               </a:tblGrid>
               <a:tr h="457200">
                 <a:tc>
@@ -15018,7 +14813,7 @@
                     <a:bodyPr/>
                     <a:lstStyle/>
                     <a:p>
-                      <a:pPr algn="ctr" indent="0" marL="0">
+                      <a:pPr marL="0" indent="0" algn="ctr">
                         <a:buNone/>
                       </a:pPr>
                       <a:endParaRPr lang="en-US" sz="1100" dirty="0">
@@ -15028,7 +14823,7 @@
                       </a:endParaRPr>
                     </a:p>
                   </a:txBody>
-                  <a:tcPr marL="91440" marR="91440" marT="45720" marB="45720" anchor="ctr">
+                  <a:tcPr anchor="ctr">
                     <a:lnL w="38100" cap="flat" cmpd="sng" algn="ctr">
                       <a:solidFill>
                         <a:srgbClr val="FFFFFF"/>
@@ -15075,7 +14870,7 @@
                     <a:bodyPr/>
                     <a:lstStyle/>
                     <a:p>
-                      <a:pPr algn="ctr" indent="0" marL="0">
+                      <a:pPr marL="0" indent="0" algn="ctr">
                         <a:buNone/>
                       </a:pPr>
                       <a:r>
@@ -15096,7 +14891,7 @@
                       </a:endParaRPr>
                     </a:p>
                   </a:txBody>
-                  <a:tcPr marL="91440" marR="91440" marT="45720" marB="45720" anchor="ctr">
+                  <a:tcPr anchor="ctr">
                     <a:lnL w="38100" cap="flat" cmpd="sng" algn="ctr">
                       <a:solidFill>
                         <a:srgbClr val="FFFFFF"/>
@@ -15143,7 +14938,7 @@
                     <a:bodyPr/>
                     <a:lstStyle/>
                     <a:p>
-                      <a:pPr algn="ctr" indent="0" marL="0">
+                      <a:pPr marL="0" indent="0" algn="ctr">
                         <a:buNone/>
                       </a:pPr>
                       <a:r>
@@ -15164,7 +14959,7 @@
                       </a:endParaRPr>
                     </a:p>
                   </a:txBody>
-                  <a:tcPr marL="91440" marR="91440" marT="45720" marB="45720" anchor="ctr">
+                  <a:tcPr anchor="ctr">
                     <a:lnL w="38100" cap="flat" cmpd="sng" algn="ctr">
                       <a:solidFill>
                         <a:srgbClr val="FFFFFF"/>
@@ -15211,7 +15006,7 @@
                     <a:bodyPr/>
                     <a:lstStyle/>
                     <a:p>
-                      <a:pPr algn="ctr" indent="0" marL="0">
+                      <a:pPr marL="0" indent="0" algn="ctr">
                         <a:buNone/>
                       </a:pPr>
                       <a:r>
@@ -15232,7 +15027,7 @@
                       </a:endParaRPr>
                     </a:p>
                   </a:txBody>
-                  <a:tcPr marL="91440" marR="91440" marT="45720" marB="45720" anchor="ctr">
+                  <a:tcPr anchor="ctr">
                     <a:lnL w="38100" cap="flat" cmpd="sng" algn="ctr">
                       <a:solidFill>
                         <a:srgbClr val="FFFFFF"/>
@@ -15279,7 +15074,7 @@
                     <a:bodyPr/>
                     <a:lstStyle/>
                     <a:p>
-                      <a:pPr algn="ctr" indent="0" marL="0">
+                      <a:pPr marL="0" indent="0" algn="ctr">
                         <a:buNone/>
                       </a:pPr>
                       <a:r>
@@ -15300,7 +15095,7 @@
                       </a:endParaRPr>
                     </a:p>
                   </a:txBody>
-                  <a:tcPr marL="91440" marR="91440" marT="45720" marB="45720" anchor="ctr">
+                  <a:tcPr anchor="ctr">
                     <a:lnL w="38100" cap="flat" cmpd="sng" algn="ctr">
                       <a:solidFill>
                         <a:srgbClr val="FFFFFF"/>
@@ -15342,6 +15137,11 @@
                     </a:solidFill>
                   </a:tcPr>
                 </a:tc>
+                <a:extLst>
+                  <a:ext uri="{0D108BD9-81ED-4DB2-BD59-A6C34878D82A}">
+                    <a16:rowId xmlns:a16="http://schemas.microsoft.com/office/drawing/2014/main" val="10000"/>
+                  </a:ext>
+                </a:extLst>
               </a:tr>
               <a:tr h="566928">
                 <a:tc>
@@ -15349,7 +15149,7 @@
                     <a:bodyPr/>
                     <a:lstStyle/>
                     <a:p>
-                      <a:pPr algn="ctr" indent="0" marL="0">
+                      <a:pPr marL="0" indent="0" algn="ctr">
                         <a:buNone/>
                       </a:pPr>
                       <a:r>
@@ -15370,7 +15170,7 @@
                       </a:endParaRPr>
                     </a:p>
                   </a:txBody>
-                  <a:tcPr marL="91440" marR="91440" marT="45720" marB="45720" anchor="ctr">
+                  <a:tcPr anchor="ctr">
                     <a:lnL w="38100" cap="flat" cmpd="sng" algn="ctr">
                       <a:solidFill>
                         <a:srgbClr val="FFFFFF"/>
@@ -15417,7 +15217,7 @@
                     <a:bodyPr/>
                     <a:lstStyle/>
                     <a:p>
-                      <a:pPr algn="ctr" indent="0" marL="0">
+                      <a:pPr marL="0" indent="0" algn="ctr">
                         <a:buNone/>
                       </a:pPr>
                       <a:r>
@@ -15438,7 +15238,7 @@
                       </a:endParaRPr>
                     </a:p>
                   </a:txBody>
-                  <a:tcPr marL="91440" marR="91440" marT="45720" marB="45720" anchor="ctr">
+                  <a:tcPr anchor="ctr">
                     <a:lnL w="38100" cap="flat" cmpd="sng" algn="ctr">
                       <a:solidFill>
                         <a:srgbClr val="FFFFFF"/>
@@ -15485,7 +15285,7 @@
                     <a:bodyPr/>
                     <a:lstStyle/>
                     <a:p>
-                      <a:pPr algn="ctr" indent="0" marL="0">
+                      <a:pPr marL="0" indent="0" algn="ctr">
                         <a:buNone/>
                       </a:pPr>
                       <a:r>
@@ -15506,7 +15306,7 @@
                       </a:endParaRPr>
                     </a:p>
                   </a:txBody>
-                  <a:tcPr marL="91440" marR="91440" marT="45720" marB="45720" anchor="ctr">
+                  <a:tcPr anchor="ctr">
                     <a:lnL w="38100" cap="flat" cmpd="sng" algn="ctr">
                       <a:solidFill>
                         <a:srgbClr val="FFFFFF"/>
@@ -15553,7 +15353,7 @@
                     <a:bodyPr/>
                     <a:lstStyle/>
                     <a:p>
-                      <a:pPr algn="ctr" indent="0" marL="0">
+                      <a:pPr marL="0" indent="0" algn="ctr">
                         <a:buNone/>
                       </a:pPr>
                       <a:r>
@@ -15574,7 +15374,7 @@
                       </a:endParaRPr>
                     </a:p>
                   </a:txBody>
-                  <a:tcPr marL="91440" marR="91440" marT="45720" marB="45720" anchor="ctr">
+                  <a:tcPr anchor="ctr">
                     <a:lnL w="38100" cap="flat" cmpd="sng" algn="ctr">
                       <a:solidFill>
                         <a:srgbClr val="FFFFFF"/>
@@ -15621,7 +15421,7 @@
                     <a:bodyPr/>
                     <a:lstStyle/>
                     <a:p>
-                      <a:pPr algn="ctr" indent="0" marL="0">
+                      <a:pPr marL="0" indent="0" algn="ctr">
                         <a:buNone/>
                       </a:pPr>
                       <a:r>
@@ -15642,7 +15442,7 @@
                       </a:endParaRPr>
                     </a:p>
                   </a:txBody>
-                  <a:tcPr marL="91440" marR="91440" marT="45720" marB="45720" anchor="ctr">
+                  <a:tcPr anchor="ctr">
                     <a:lnL w="38100" cap="flat" cmpd="sng" algn="ctr">
                       <a:solidFill>
                         <a:srgbClr val="FFFFFF"/>
@@ -15684,6 +15484,11 @@
                     </a:solidFill>
                   </a:tcPr>
                 </a:tc>
+                <a:extLst>
+                  <a:ext uri="{0D108BD9-81ED-4DB2-BD59-A6C34878D82A}">
+                    <a16:rowId xmlns:a16="http://schemas.microsoft.com/office/drawing/2014/main" val="10001"/>
+                  </a:ext>
+                </a:extLst>
               </a:tr>
               <a:tr h="566928">
                 <a:tc>
@@ -15691,7 +15496,7 @@
                     <a:bodyPr/>
                     <a:lstStyle/>
                     <a:p>
-                      <a:pPr algn="ctr" indent="0" marL="0">
+                      <a:pPr marL="0" indent="0" algn="ctr">
                         <a:buNone/>
                       </a:pPr>
                       <a:r>
@@ -15712,7 +15517,7 @@
                       </a:endParaRPr>
                     </a:p>
                   </a:txBody>
-                  <a:tcPr marL="91440" marR="91440" marT="45720" marB="45720" anchor="ctr">
+                  <a:tcPr anchor="ctr">
                     <a:lnL w="38100" cap="flat" cmpd="sng" algn="ctr">
                       <a:solidFill>
                         <a:srgbClr val="FFFFFF"/>
@@ -15759,7 +15564,7 @@
                     <a:bodyPr/>
                     <a:lstStyle/>
                     <a:p>
-                      <a:pPr algn="ctr" indent="0" marL="0">
+                      <a:pPr marL="0" indent="0" algn="ctr">
                         <a:buNone/>
                       </a:pPr>
                       <a:r>
@@ -15780,7 +15585,7 @@
                       </a:endParaRPr>
                     </a:p>
                   </a:txBody>
-                  <a:tcPr marL="91440" marR="91440" marT="45720" marB="45720" anchor="ctr">
+                  <a:tcPr anchor="ctr">
                     <a:lnL w="38100" cap="flat" cmpd="sng" algn="ctr">
                       <a:solidFill>
                         <a:srgbClr val="FFFFFF"/>
@@ -15827,7 +15632,7 @@
                     <a:bodyPr/>
                     <a:lstStyle/>
                     <a:p>
-                      <a:pPr algn="ctr" indent="0" marL="0">
+                      <a:pPr marL="0" indent="0" algn="ctr">
                         <a:buNone/>
                       </a:pPr>
                       <a:r>
@@ -15848,7 +15653,7 @@
                       </a:endParaRPr>
                     </a:p>
                   </a:txBody>
-                  <a:tcPr marL="91440" marR="91440" marT="45720" marB="45720" anchor="ctr">
+                  <a:tcPr anchor="ctr">
                     <a:lnL w="38100" cap="flat" cmpd="sng" algn="ctr">
                       <a:solidFill>
                         <a:srgbClr val="FFFFFF"/>
@@ -15895,7 +15700,7 @@
                     <a:bodyPr/>
                     <a:lstStyle/>
                     <a:p>
-                      <a:pPr algn="ctr" indent="0" marL="0">
+                      <a:pPr marL="0" indent="0" algn="ctr">
                         <a:buNone/>
                       </a:pPr>
                       <a:r>
@@ -15916,7 +15721,7 @@
                       </a:endParaRPr>
                     </a:p>
                   </a:txBody>
-                  <a:tcPr marL="91440" marR="91440" marT="45720" marB="45720" anchor="ctr">
+                  <a:tcPr anchor="ctr">
                     <a:lnL w="38100" cap="flat" cmpd="sng" algn="ctr">
                       <a:solidFill>
                         <a:srgbClr val="FFFFFF"/>
@@ -15963,7 +15768,7 @@
                     <a:bodyPr/>
                     <a:lstStyle/>
                     <a:p>
-                      <a:pPr algn="ctr" indent="0" marL="0">
+                      <a:pPr marL="0" indent="0" algn="ctr">
                         <a:buNone/>
                       </a:pPr>
                       <a:r>
@@ -15984,7 +15789,7 @@
                       </a:endParaRPr>
                     </a:p>
                   </a:txBody>
-                  <a:tcPr marL="91440" marR="91440" marT="45720" marB="45720" anchor="ctr">
+                  <a:tcPr anchor="ctr">
                     <a:lnL w="38100" cap="flat" cmpd="sng" algn="ctr">
                       <a:solidFill>
                         <a:srgbClr val="FFFFFF"/>
@@ -16026,6 +15831,11 @@
                     </a:solidFill>
                   </a:tcPr>
                 </a:tc>
+                <a:extLst>
+                  <a:ext uri="{0D108BD9-81ED-4DB2-BD59-A6C34878D82A}">
+                    <a16:rowId xmlns:a16="http://schemas.microsoft.com/office/drawing/2014/main" val="10002"/>
+                  </a:ext>
+                </a:extLst>
               </a:tr>
               <a:tr h="566928">
                 <a:tc>
@@ -16033,7 +15843,7 @@
                     <a:bodyPr/>
                     <a:lstStyle/>
                     <a:p>
-                      <a:pPr algn="ctr" indent="0" marL="0">
+                      <a:pPr marL="0" indent="0" algn="ctr">
                         <a:buNone/>
                       </a:pPr>
                       <a:r>
@@ -16054,7 +15864,7 @@
                       </a:endParaRPr>
                     </a:p>
                   </a:txBody>
-                  <a:tcPr marL="91440" marR="91440" marT="45720" marB="45720" anchor="ctr">
+                  <a:tcPr anchor="ctr">
                     <a:lnL w="38100" cap="flat" cmpd="sng" algn="ctr">
                       <a:solidFill>
                         <a:srgbClr val="FFFFFF"/>
@@ -16101,7 +15911,7 @@
                     <a:bodyPr/>
                     <a:lstStyle/>
                     <a:p>
-                      <a:pPr algn="ctr" indent="0" marL="0">
+                      <a:pPr marL="0" indent="0" algn="ctr">
                         <a:buNone/>
                       </a:pPr>
                       <a:r>
@@ -16122,7 +15932,7 @@
                       </a:endParaRPr>
                     </a:p>
                   </a:txBody>
-                  <a:tcPr marL="91440" marR="91440" marT="45720" marB="45720" anchor="ctr">
+                  <a:tcPr anchor="ctr">
                     <a:lnL w="38100" cap="flat" cmpd="sng" algn="ctr">
                       <a:solidFill>
                         <a:srgbClr val="FFFFFF"/>
@@ -16169,7 +15979,7 @@
                     <a:bodyPr/>
                     <a:lstStyle/>
                     <a:p>
-                      <a:pPr algn="ctr" indent="0" marL="0">
+                      <a:pPr marL="0" indent="0" algn="ctr">
                         <a:buNone/>
                       </a:pPr>
                       <a:r>
@@ -16190,7 +16000,7 @@
                       </a:endParaRPr>
                     </a:p>
                   </a:txBody>
-                  <a:tcPr marL="91440" marR="91440" marT="45720" marB="45720" anchor="ctr">
+                  <a:tcPr anchor="ctr">
                     <a:lnL w="38100" cap="flat" cmpd="sng" algn="ctr">
                       <a:solidFill>
                         <a:srgbClr val="FFFFFF"/>
@@ -16237,7 +16047,7 @@
                     <a:bodyPr/>
                     <a:lstStyle/>
                     <a:p>
-                      <a:pPr algn="ctr" indent="0" marL="0">
+                      <a:pPr marL="0" indent="0" algn="ctr">
                         <a:buNone/>
                       </a:pPr>
                       <a:r>
@@ -16258,7 +16068,7 @@
                       </a:endParaRPr>
                     </a:p>
                   </a:txBody>
-                  <a:tcPr marL="91440" marR="91440" marT="45720" marB="45720" anchor="ctr">
+                  <a:tcPr anchor="ctr">
                     <a:lnL w="38100" cap="flat" cmpd="sng" algn="ctr">
                       <a:solidFill>
                         <a:srgbClr val="FFFFFF"/>
@@ -16305,7 +16115,7 @@
                     <a:bodyPr/>
                     <a:lstStyle/>
                     <a:p>
-                      <a:pPr algn="ctr" indent="0" marL="0">
+                      <a:pPr marL="0" indent="0" algn="ctr">
                         <a:buNone/>
                       </a:pPr>
                       <a:r>
@@ -16326,7 +16136,7 @@
                       </a:endParaRPr>
                     </a:p>
                   </a:txBody>
-                  <a:tcPr marL="91440" marR="91440" marT="45720" marB="45720" anchor="ctr">
+                  <a:tcPr anchor="ctr">
                     <a:lnL w="38100" cap="flat" cmpd="sng" algn="ctr">
                       <a:solidFill>
                         <a:srgbClr val="FFFFFF"/>
@@ -16368,6 +16178,11 @@
                     </a:solidFill>
                   </a:tcPr>
                 </a:tc>
+                <a:extLst>
+                  <a:ext uri="{0D108BD9-81ED-4DB2-BD59-A6C34878D82A}">
+                    <a16:rowId xmlns:a16="http://schemas.microsoft.com/office/drawing/2014/main" val="10003"/>
+                  </a:ext>
+                </a:extLst>
               </a:tr>
               <a:tr h="566928">
                 <a:tc>
@@ -16375,7 +16190,7 @@
                     <a:bodyPr/>
                     <a:lstStyle/>
                     <a:p>
-                      <a:pPr algn="ctr" indent="0" marL="0">
+                      <a:pPr marL="0" indent="0" algn="ctr">
                         <a:buNone/>
                       </a:pPr>
                       <a:r>
@@ -16396,7 +16211,7 @@
                       </a:endParaRPr>
                     </a:p>
                   </a:txBody>
-                  <a:tcPr marL="91440" marR="91440" marT="45720" marB="45720" anchor="ctr">
+                  <a:tcPr anchor="ctr">
                     <a:lnL w="38100" cap="flat" cmpd="sng" algn="ctr">
                       <a:solidFill>
                         <a:srgbClr val="FFFFFF"/>
@@ -16443,7 +16258,7 @@
                     <a:bodyPr/>
                     <a:lstStyle/>
                     <a:p>
-                      <a:pPr algn="ctr" indent="0" marL="0">
+                      <a:pPr marL="0" indent="0" algn="ctr">
                         <a:buNone/>
                       </a:pPr>
                       <a:r>
@@ -16464,7 +16279,7 @@
                       </a:endParaRPr>
                     </a:p>
                   </a:txBody>
-                  <a:tcPr marL="91440" marR="91440" marT="45720" marB="45720" anchor="ctr">
+                  <a:tcPr anchor="ctr">
                     <a:lnL w="38100" cap="flat" cmpd="sng" algn="ctr">
                       <a:solidFill>
                         <a:srgbClr val="FFFFFF"/>
@@ -16511,7 +16326,7 @@
                     <a:bodyPr/>
                     <a:lstStyle/>
                     <a:p>
-                      <a:pPr algn="ctr" indent="0" marL="0">
+                      <a:pPr marL="0" indent="0" algn="ctr">
                         <a:buNone/>
                       </a:pPr>
                       <a:r>
@@ -16532,7 +16347,7 @@
                       </a:endParaRPr>
                     </a:p>
                   </a:txBody>
-                  <a:tcPr marL="91440" marR="91440" marT="45720" marB="45720" anchor="ctr">
+                  <a:tcPr anchor="ctr">
                     <a:lnL w="38100" cap="flat" cmpd="sng" algn="ctr">
                       <a:solidFill>
                         <a:srgbClr val="FFFFFF"/>
@@ -16579,7 +16394,7 @@
                     <a:bodyPr/>
                     <a:lstStyle/>
                     <a:p>
-                      <a:pPr algn="ctr" indent="0" marL="0">
+                      <a:pPr marL="0" indent="0" algn="ctr">
                         <a:buNone/>
                       </a:pPr>
                       <a:r>
@@ -16600,7 +16415,7 @@
                       </a:endParaRPr>
                     </a:p>
                   </a:txBody>
-                  <a:tcPr marL="91440" marR="91440" marT="45720" marB="45720" anchor="ctr">
+                  <a:tcPr anchor="ctr">
                     <a:lnL w="38100" cap="flat" cmpd="sng" algn="ctr">
                       <a:solidFill>
                         <a:srgbClr val="FFFFFF"/>
@@ -16647,7 +16462,7 @@
                     <a:bodyPr/>
                     <a:lstStyle/>
                     <a:p>
-                      <a:pPr algn="ctr" indent="0" marL="0">
+                      <a:pPr marL="0" indent="0" algn="ctr">
                         <a:buNone/>
                       </a:pPr>
                       <a:r>
@@ -16668,7 +16483,7 @@
                       </a:endParaRPr>
                     </a:p>
                   </a:txBody>
-                  <a:tcPr marL="91440" marR="91440" marT="45720" marB="45720" anchor="ctr">
+                  <a:tcPr anchor="ctr">
                     <a:lnL w="38100" cap="flat" cmpd="sng" algn="ctr">
                       <a:solidFill>
                         <a:srgbClr val="FFFFFF"/>
@@ -16710,6 +16525,11 @@
                     </a:solidFill>
                   </a:tcPr>
                 </a:tc>
+                <a:extLst>
+                  <a:ext uri="{0D108BD9-81ED-4DB2-BD59-A6C34878D82A}">
+                    <a16:rowId xmlns:a16="http://schemas.microsoft.com/office/drawing/2014/main" val="10004"/>
+                  </a:ext>
+                </a:extLst>
               </a:tr>
             </a:tbl>
           </a:graphicData>
@@ -16761,7 +16581,7 @@
           <a:bodyPr wrap="square" lIns="0" tIns="0" rIns="0" bIns="0" rtlCol="0" anchor="ctr"/>
           <a:lstStyle/>
           <a:p>
-            <a:pPr algn="ctr" indent="0" marL="0">
+            <a:pPr marL="0" indent="0" algn="ctr">
               <a:buNone/>
             </a:pPr>
             <a:r>
@@ -16825,7 +16645,7 @@
           <a:bodyPr wrap="square" lIns="0" tIns="0" rIns="0" bIns="0" rtlCol="0" anchor="ctr"/>
           <a:lstStyle/>
           <a:p>
-            <a:pPr algn="ctr" indent="0" marL="0">
+            <a:pPr marL="0" indent="0" algn="ctr">
               <a:buNone/>
             </a:pPr>
             <a:r>
@@ -16889,7 +16709,7 @@
           <a:bodyPr wrap="square" lIns="0" tIns="0" rIns="0" bIns="0" rtlCol="0" anchor="ctr"/>
           <a:lstStyle/>
           <a:p>
-            <a:pPr algn="ctr" indent="0" marL="0">
+            <a:pPr marL="0" indent="0" algn="ctr">
               <a:buNone/>
             </a:pPr>
             <a:r>
@@ -16953,7 +16773,7 @@
           <a:bodyPr wrap="square" lIns="0" tIns="0" rIns="0" bIns="0" rtlCol="0" anchor="ctr"/>
           <a:lstStyle/>
           <a:p>
-            <a:pPr algn="ctr" indent="0" marL="0">
+            <a:pPr marL="0" indent="0" algn="ctr">
               <a:buNone/>
             </a:pPr>
             <a:r>
@@ -17017,7 +16837,7 @@
           <a:bodyPr wrap="square" lIns="0" tIns="0" rIns="0" bIns="0" rtlCol="0" anchor="ctr"/>
           <a:lstStyle/>
           <a:p>
-            <a:pPr algn="ctr" indent="0" marL="0">
+            <a:pPr marL="0" indent="0" algn="ctr">
               <a:buNone/>
             </a:pPr>
             <a:r>
@@ -17078,7 +16898,7 @@
           <a:bodyPr wrap="square" lIns="0" tIns="0" rIns="0" bIns="0" rtlCol="0" anchor="ctr"/>
           <a:lstStyle/>
           <a:p>
-            <a:pPr algn="ctr" indent="0" marL="0">
+            <a:pPr marL="0" indent="0" algn="ctr">
               <a:buNone/>
             </a:pPr>
             <a:r>
@@ -17117,7 +16937,7 @@
           <a:bodyPr wrap="square" lIns="0" tIns="0" rIns="0" bIns="0" rtlCol="0" anchor="ctr"/>
           <a:lstStyle/>
           <a:p>
-            <a:pPr algn="r" indent="0" marL="0">
+            <a:pPr marL="0" indent="0" algn="r">
               <a:buNone/>
             </a:pPr>
             <a:r>
@@ -17151,6 +16971,7 @@
         <a:solidFill>
           <a:srgbClr val="FFFFFF"/>
         </a:solidFill>
+        <a:effectLst/>
       </p:bgPr>
     </p:bg>
     <p:spTree>
@@ -17189,14 +17010,14 @@
       </p:sp>
       <p:pic>
         <p:nvPicPr>
-          <p:cNvPr id="3" name="Image 0" descr="preencoded.png">    </p:cNvPr>
+          <p:cNvPr id="3" name="Image 0" descr="preencoded.png"/>
           <p:cNvPicPr>
             <a:picLocks noChangeAspect="1"/>
           </p:cNvPicPr>
           <p:nvPr/>
         </p:nvPicPr>
         <p:blipFill>
-          <a:blip r:embed="rId1"/>
+          <a:blip r:embed="rId3"/>
           <a:stretch>
             <a:fillRect/>
           </a:stretch>
@@ -17232,11 +17053,11 @@
           <a:bodyPr wrap="square" lIns="0" tIns="0" rIns="0" bIns="0" rtlCol="0" anchor="ctr"/>
           <a:lstStyle/>
           <a:p>
-            <a:pPr indent="0" marL="0">
-              <a:buNone/>
-            </a:pPr>
-            <a:r>
-              <a:rPr lang="en-US" sz="1200" b="1" spc="150" kern="0" dirty="0">
+            <a:pPr marL="0" indent="0">
+              <a:buNone/>
+            </a:pPr>
+            <a:r>
+              <a:rPr lang="en-US" sz="1200" b="1" kern="0" spc="150" dirty="0">
                 <a:solidFill>
                   <a:srgbClr val="6C4BC1"/>
                 </a:solidFill>
@@ -17271,7 +17092,7 @@
           <a:bodyPr wrap="square" lIns="0" tIns="0" rIns="0" bIns="0" rtlCol="0" anchor="ctr"/>
           <a:lstStyle/>
           <a:p>
-            <a:pPr indent="0" marL="0">
+            <a:pPr marL="0" indent="0">
               <a:buNone/>
             </a:pPr>
             <a:r>
@@ -17310,7 +17131,7 @@
           <a:bodyPr wrap="square" lIns="0" tIns="0" rIns="0" bIns="0" rtlCol="0" anchor="ctr"/>
           <a:lstStyle/>
           <a:p>
-            <a:pPr indent="0" marL="0">
+            <a:pPr marL="0" indent="0">
               <a:lnSpc>
                 <a:spcPts val="1900"/>
               </a:lnSpc>
@@ -17449,7 +17270,7 @@
           <a:bodyPr wrap="square" lIns="0" tIns="0" rIns="0" bIns="0" rtlCol="0" anchor="ctr"/>
           <a:lstStyle/>
           <a:p>
-            <a:pPr algn="ctr" indent="0" marL="0">
+            <a:pPr marL="0" indent="0" algn="ctr">
               <a:buNone/>
             </a:pPr>
             <a:r>
@@ -17513,7 +17334,7 @@
           <a:bodyPr wrap="square" lIns="0" tIns="0" rIns="0" bIns="0" rtlCol="0" anchor="ctr"/>
           <a:lstStyle/>
           <a:p>
-            <a:pPr algn="ctr" indent="0" marL="0">
+            <a:pPr marL="0" indent="0" algn="ctr">
               <a:buNone/>
             </a:pPr>
             <a:r>
@@ -17577,7 +17398,7 @@
           <a:bodyPr wrap="square" lIns="0" tIns="0" rIns="0" bIns="0" rtlCol="0" anchor="ctr"/>
           <a:lstStyle/>
           <a:p>
-            <a:pPr algn="ctr" indent="0" marL="0">
+            <a:pPr marL="0" indent="0" algn="ctr">
               <a:buNone/>
             </a:pPr>
             <a:r>
@@ -17616,7 +17437,7 @@
           <a:bodyPr wrap="square" lIns="0" tIns="0" rIns="0" bIns="0" rtlCol="0" anchor="ctr"/>
           <a:lstStyle/>
           <a:p>
-            <a:pPr algn="ctr" indent="0" marL="0">
+            <a:pPr marL="0" indent="0" algn="ctr">
               <a:buNone/>
             </a:pPr>
             <a:r>
@@ -17655,7 +17476,7 @@
           <a:bodyPr wrap="square" lIns="0" tIns="0" rIns="0" bIns="0" rtlCol="0" anchor="ctr"/>
           <a:lstStyle/>
           <a:p>
-            <a:pPr algn="r" indent="0" marL="0">
+            <a:pPr marL="0" indent="0" algn="r">
               <a:buNone/>
             </a:pPr>
             <a:r>
@@ -17689,6 +17510,7 @@
         <a:solidFill>
           <a:srgbClr val="FFFFFF"/>
         </a:solidFill>
+        <a:effectLst/>
       </p:bgPr>
     </p:bg>
     <p:spTree>
@@ -17727,14 +17549,14 @@
       </p:sp>
       <p:pic>
         <p:nvPicPr>
-          <p:cNvPr id="3" name="Image 0" descr="preencoded.png">    </p:cNvPr>
+          <p:cNvPr id="3" name="Image 0" descr="preencoded.png"/>
           <p:cNvPicPr>
             <a:picLocks noChangeAspect="1"/>
           </p:cNvPicPr>
           <p:nvPr/>
         </p:nvPicPr>
         <p:blipFill>
-          <a:blip r:embed="rId1"/>
+          <a:blip r:embed="rId3"/>
           <a:stretch>
             <a:fillRect/>
           </a:stretch>
@@ -17770,11 +17592,11 @@
           <a:bodyPr wrap="square" lIns="0" tIns="0" rIns="0" bIns="0" rtlCol="0" anchor="ctr"/>
           <a:lstStyle/>
           <a:p>
-            <a:pPr indent="0" marL="0">
-              <a:buNone/>
-            </a:pPr>
-            <a:r>
-              <a:rPr lang="en-US" sz="1200" b="1" spc="150" kern="0" dirty="0">
+            <a:pPr marL="0" indent="0">
+              <a:buNone/>
+            </a:pPr>
+            <a:r>
+              <a:rPr lang="en-US" sz="1200" b="1" kern="0" spc="150" dirty="0">
                 <a:solidFill>
                   <a:srgbClr val="3EBD59"/>
                 </a:solidFill>
@@ -17809,7 +17631,7 @@
           <a:bodyPr wrap="square" lIns="0" tIns="0" rIns="0" bIns="0" rtlCol="0" anchor="ctr"/>
           <a:lstStyle/>
           <a:p>
-            <a:pPr indent="0" marL="0">
+            <a:pPr marL="0" indent="0">
               <a:buNone/>
             </a:pPr>
             <a:r>
@@ -17870,7 +17692,7 @@
           <a:bodyPr wrap="square" lIns="0" tIns="0" rIns="0" bIns="0" rtlCol="0" anchor="ctr"/>
           <a:lstStyle/>
           <a:p>
-            <a:pPr algn="ctr" indent="0" marL="0">
+            <a:pPr marL="0" indent="0" algn="ctr">
               <a:buNone/>
             </a:pPr>
             <a:r>
@@ -17931,7 +17753,7 @@
           <a:bodyPr wrap="square" lIns="0" tIns="0" rIns="0" bIns="0" rtlCol="0" anchor="ctr"/>
           <a:lstStyle/>
           <a:p>
-            <a:pPr indent="0" marL="0">
+            <a:pPr marL="0" indent="0">
               <a:lnSpc>
                 <a:spcPts val="1900"/>
               </a:lnSpc>
@@ -17973,7 +17795,7 @@
           <a:bodyPr wrap="square" lIns="0" tIns="0" rIns="0" bIns="0" rtlCol="0" anchor="ctr"/>
           <a:lstStyle/>
           <a:p>
-            <a:pPr algn="ctr" indent="0" marL="0">
+            <a:pPr marL="0" indent="0" algn="ctr">
               <a:lnSpc>
                 <a:spcPts val="1700"/>
               </a:lnSpc>
@@ -18015,7 +17837,7 @@
           <a:bodyPr wrap="square" lIns="0" tIns="0" rIns="0" bIns="0" rtlCol="0" anchor="ctr"/>
           <a:lstStyle/>
           <a:p>
-            <a:pPr algn="r" indent="0" marL="0">
+            <a:pPr marL="0" indent="0" algn="r">
               <a:buNone/>
             </a:pPr>
             <a:r>
@@ -18049,6 +17871,7 @@
         <a:solidFill>
           <a:srgbClr val="141B41"/>
         </a:solidFill>
+        <a:effectLst/>
       </p:bgPr>
     </p:bg>
     <p:spTree>
@@ -18087,14 +17910,14 @@
       </p:sp>
       <p:pic>
         <p:nvPicPr>
-          <p:cNvPr id="3" name="Image 0" descr="preencoded.png">    </p:cNvPr>
+          <p:cNvPr id="3" name="Image 0" descr="preencoded.png"/>
           <p:cNvPicPr>
             <a:picLocks noChangeAspect="1"/>
           </p:cNvPicPr>
           <p:nvPr/>
         </p:nvPicPr>
         <p:blipFill>
-          <a:blip r:embed="rId1"/>
+          <a:blip r:embed="rId3"/>
           <a:stretch>
             <a:fillRect/>
           </a:stretch>
@@ -18130,11 +17953,11 @@
           <a:bodyPr wrap="square" lIns="0" tIns="0" rIns="0" bIns="0" rtlCol="0" anchor="ctr"/>
           <a:lstStyle/>
           <a:p>
-            <a:pPr indent="0" marL="0">
-              <a:buNone/>
-            </a:pPr>
-            <a:r>
-              <a:rPr lang="en-US" sz="1200" b="1" spc="150" kern="0" dirty="0">
+            <a:pPr marL="0" indent="0">
+              <a:buNone/>
+            </a:pPr>
+            <a:r>
+              <a:rPr lang="en-US" sz="1200" b="1" kern="0" spc="150" dirty="0">
                 <a:solidFill>
                   <a:srgbClr val="2FE6C7"/>
                 </a:solidFill>
@@ -18169,7 +17992,7 @@
           <a:bodyPr wrap="square" lIns="0" tIns="0" rIns="0" bIns="0" rtlCol="0" anchor="ctr"/>
           <a:lstStyle/>
           <a:p>
-            <a:pPr indent="0" marL="0">
+            <a:pPr marL="0" indent="0">
               <a:buNone/>
             </a:pPr>
             <a:r>
@@ -18208,7 +18031,7 @@
           <a:bodyPr wrap="square" lIns="0" tIns="0" rIns="0" bIns="0" rtlCol="0" anchor="ctr"/>
           <a:lstStyle/>
           <a:p>
-            <a:pPr indent="0" marL="0">
+            <a:pPr marL="0" indent="0">
               <a:lnSpc>
                 <a:spcPts val="1900"/>
               </a:lnSpc>
@@ -18332,7 +18155,7 @@
           <a:bodyPr wrap="square" lIns="0" tIns="0" rIns="0" bIns="0" rtlCol="0" anchor="ctr"/>
           <a:lstStyle/>
           <a:p>
-            <a:pPr indent="0" marL="0">
+            <a:pPr marL="0" indent="0">
               <a:buNone/>
             </a:pPr>
             <a:r>
@@ -18371,7 +18194,7 @@
           <a:bodyPr wrap="square" lIns="0" tIns="0" rIns="0" bIns="0" rtlCol="0" anchor="ctr"/>
           <a:lstStyle/>
           <a:p>
-            <a:pPr indent="0" marL="0">
+            <a:pPr marL="0" indent="0">
               <a:buNone/>
             </a:pPr>
             <a:r>
@@ -18410,7 +18233,7 @@
           <a:bodyPr wrap="square" lIns="0" tIns="0" rIns="0" bIns="0" rtlCol="0" anchor="ctr"/>
           <a:lstStyle/>
           <a:p>
-            <a:pPr indent="0" marL="0">
+            <a:pPr marL="0" indent="0">
               <a:buNone/>
             </a:pPr>
             <a:r>
@@ -18449,7 +18272,7 @@
           <a:bodyPr wrap="square" lIns="0" tIns="0" rIns="0" bIns="0" rtlCol="0" anchor="ctr"/>
           <a:lstStyle/>
           <a:p>
-            <a:pPr indent="0" marL="0">
+            <a:pPr marL="0" indent="0">
               <a:buNone/>
             </a:pPr>
             <a:r>
@@ -18488,7 +18311,7 @@
           <a:bodyPr wrap="square" lIns="0" tIns="0" rIns="0" bIns="0" rtlCol="0" anchor="ctr"/>
           <a:lstStyle/>
           <a:p>
-            <a:pPr indent="0" marL="0">
+            <a:pPr marL="0" indent="0">
               <a:buNone/>
             </a:pPr>
             <a:r>
@@ -18527,7 +18350,7 @@
           <a:bodyPr wrap="square" lIns="0" tIns="0" rIns="0" bIns="0" rtlCol="0" anchor="ctr"/>
           <a:lstStyle/>
           <a:p>
-            <a:pPr indent="0" marL="0">
+            <a:pPr marL="0" indent="0">
               <a:buNone/>
             </a:pPr>
             <a:r>
@@ -18566,7 +18389,7 @@
           <a:bodyPr wrap="square" lIns="0" tIns="0" rIns="0" bIns="0" rtlCol="0" anchor="ctr"/>
           <a:lstStyle/>
           <a:p>
-            <a:pPr algn="r" indent="0" marL="0">
+            <a:pPr marL="0" indent="0" algn="r">
               <a:buNone/>
             </a:pPr>
             <a:r>
@@ -18600,6 +18423,7 @@
         <a:solidFill>
           <a:srgbClr val="141B41"/>
         </a:solidFill>
+        <a:effectLst/>
       </p:bgPr>
     </p:bg>
     <p:spTree>
@@ -18638,14 +18462,14 @@
       </p:sp>
       <p:pic>
         <p:nvPicPr>
-          <p:cNvPr id="3" name="Image 0" descr="preencoded.png">    </p:cNvPr>
+          <p:cNvPr id="3" name="Image 0" descr="preencoded.png"/>
           <p:cNvPicPr>
             <a:picLocks noChangeAspect="1"/>
           </p:cNvPicPr>
           <p:nvPr/>
         </p:nvPicPr>
         <p:blipFill>
-          <a:blip r:embed="rId1"/>
+          <a:blip r:embed="rId3"/>
           <a:stretch>
             <a:fillRect/>
           </a:stretch>
@@ -18681,11 +18505,11 @@
           <a:bodyPr wrap="square" lIns="0" tIns="0" rIns="0" bIns="0" rtlCol="0" anchor="ctr"/>
           <a:lstStyle/>
           <a:p>
-            <a:pPr indent="0" marL="0">
-              <a:buNone/>
-            </a:pPr>
-            <a:r>
-              <a:rPr lang="en-US" sz="1200" b="1" spc="150" kern="0" dirty="0">
+            <a:pPr marL="0" indent="0">
+              <a:buNone/>
+            </a:pPr>
+            <a:r>
+              <a:rPr lang="en-US" sz="1200" b="1" kern="0" spc="150" dirty="0">
                 <a:solidFill>
                   <a:srgbClr val="2FE6C7"/>
                 </a:solidFill>
@@ -18720,7 +18544,7 @@
           <a:bodyPr wrap="square" lIns="0" tIns="0" rIns="0" bIns="0" rtlCol="0" anchor="ctr"/>
           <a:lstStyle/>
           <a:p>
-            <a:pPr indent="0" marL="0">
+            <a:pPr marL="0" indent="0">
               <a:buNone/>
             </a:pPr>
             <a:r>
@@ -18841,7 +18665,7 @@
           <a:bodyPr wrap="square" lIns="0" tIns="0" rIns="0" bIns="0" rtlCol="0" anchor="ctr"/>
           <a:lstStyle/>
           <a:p>
-            <a:pPr indent="0" marL="0">
+            <a:pPr marL="0" indent="0">
               <a:buNone/>
             </a:pPr>
             <a:r>
@@ -18861,14 +18685,14 @@
       </p:sp>
       <p:pic>
         <p:nvPicPr>
-          <p:cNvPr id="11" name="Image 1" descr="preencoded.png">    </p:cNvPr>
+          <p:cNvPr id="11" name="Image 1" descr="preencoded.png"/>
           <p:cNvPicPr>
             <a:picLocks noChangeAspect="1"/>
           </p:cNvPicPr>
           <p:nvPr/>
         </p:nvPicPr>
         <p:blipFill>
-          <a:blip r:embed="rId2"/>
+          <a:blip r:embed="rId4"/>
           <a:stretch>
             <a:fillRect/>
           </a:stretch>
@@ -18904,7 +18728,7 @@
           <a:bodyPr wrap="square" lIns="0" tIns="0" rIns="0" bIns="0" rtlCol="0" anchor="ctr"/>
           <a:lstStyle/>
           <a:p>
-            <a:pPr indent="0" marL="0">
+            <a:pPr marL="0" indent="0">
               <a:buNone/>
             </a:pPr>
             <a:r>
@@ -18918,9 +18742,6 @@
               </a:rPr>
               <a:t>def </a:t>
             </a:r>
-            <a:pPr indent="0" marL="0">
-              <a:buNone/>
-            </a:pPr>
             <a:r>
               <a:rPr lang="en-US" sz="1000" dirty="0">
                 <a:solidFill>
@@ -18957,7 +18778,7 @@
           <a:bodyPr wrap="square" lIns="0" tIns="0" rIns="0" bIns="0" rtlCol="0" anchor="ctr"/>
           <a:lstStyle/>
           <a:p>
-            <a:pPr indent="0" marL="0">
+            <a:pPr marL="0" indent="0">
               <a:buNone/>
             </a:pPr>
             <a:r>
@@ -18971,9 +18792,6 @@
               </a:rPr>
               <a:t>    visitados = </a:t>
             </a:r>
-            <a:pPr indent="0" marL="0">
-              <a:buNone/>
-            </a:pPr>
             <a:r>
               <a:rPr lang="en-US" sz="1000" dirty="0">
                 <a:solidFill>
@@ -18985,9 +18803,6 @@
               </a:rPr>
               <a:t>set</a:t>
             </a:r>
-            <a:pPr indent="0" marL="0">
-              <a:buNone/>
-            </a:pPr>
             <a:r>
               <a:rPr lang="en-US" sz="1000" dirty="0">
                 <a:solidFill>
@@ -19024,7 +18839,7 @@
           <a:bodyPr wrap="square" lIns="0" tIns="0" rIns="0" bIns="0" rtlCol="0" anchor="ctr"/>
           <a:lstStyle/>
           <a:p>
-            <a:pPr indent="0" marL="0">
+            <a:pPr marL="0" indent="0">
               <a:buNone/>
             </a:pPr>
             <a:r>
@@ -19038,9 +18853,6 @@
               </a:rPr>
               <a:t>    def </a:t>
             </a:r>
-            <a:pPr indent="0" marL="0">
-              <a:buNone/>
-            </a:pPr>
             <a:r>
               <a:rPr lang="en-US" sz="1000" dirty="0">
                 <a:solidFill>
@@ -19077,7 +18889,7 @@
           <a:bodyPr wrap="square" lIns="0" tIns="0" rIns="0" bIns="0" rtlCol="0" anchor="ctr"/>
           <a:lstStyle/>
           <a:p>
-            <a:pPr indent="0" marL="0">
+            <a:pPr marL="0" indent="0">
               <a:buNone/>
             </a:pPr>
             <a:r>
@@ -19116,7 +18928,7 @@
           <a:bodyPr wrap="square" lIns="0" tIns="0" rIns="0" bIns="0" rtlCol="0" anchor="ctr"/>
           <a:lstStyle/>
           <a:p>
-            <a:pPr indent="0" marL="0">
+            <a:pPr marL="0" indent="0">
               <a:buNone/>
             </a:pPr>
             <a:r>
@@ -19130,9 +18942,6 @@
               </a:rPr>
               <a:t>        for </a:t>
             </a:r>
-            <a:pPr indent="0" marL="0">
-              <a:buNone/>
-            </a:pPr>
             <a:r>
               <a:rPr lang="en-US" sz="1000" dirty="0">
                 <a:solidFill>
@@ -19144,9 +18953,6 @@
               </a:rPr>
               <a:t>vizinho </a:t>
             </a:r>
-            <a:pPr indent="0" marL="0">
-              <a:buNone/>
-            </a:pPr>
             <a:r>
               <a:rPr lang="en-US" sz="1000" dirty="0">
                 <a:solidFill>
@@ -19158,9 +18964,6 @@
               </a:rPr>
               <a:t>in </a:t>
             </a:r>
-            <a:pPr indent="0" marL="0">
-              <a:buNone/>
-            </a:pPr>
             <a:r>
               <a:rPr lang="en-US" sz="1000" dirty="0">
                 <a:solidFill>
@@ -19197,7 +19000,7 @@
           <a:bodyPr wrap="square" lIns="0" tIns="0" rIns="0" bIns="0" rtlCol="0" anchor="ctr"/>
           <a:lstStyle/>
           <a:p>
-            <a:pPr indent="0" marL="0">
+            <a:pPr marL="0" indent="0">
               <a:buNone/>
             </a:pPr>
             <a:r>
@@ -19211,9 +19014,6 @@
               </a:rPr>
               <a:t>            if </a:t>
             </a:r>
-            <a:pPr indent="0" marL="0">
-              <a:buNone/>
-            </a:pPr>
             <a:r>
               <a:rPr lang="en-US" sz="1000" dirty="0">
                 <a:solidFill>
@@ -19225,9 +19025,6 @@
               </a:rPr>
               <a:t>vizinho </a:t>
             </a:r>
-            <a:pPr indent="0" marL="0">
-              <a:buNone/>
-            </a:pPr>
             <a:r>
               <a:rPr lang="en-US" sz="1000" dirty="0">
                 <a:solidFill>
@@ -19239,9 +19036,6 @@
               </a:rPr>
               <a:t>not in </a:t>
             </a:r>
-            <a:pPr indent="0" marL="0">
-              <a:buNone/>
-            </a:pPr>
             <a:r>
               <a:rPr lang="en-US" sz="1000" dirty="0">
                 <a:solidFill>
@@ -19278,7 +19072,7 @@
           <a:bodyPr wrap="square" lIns="0" tIns="0" rIns="0" bIns="0" rtlCol="0" anchor="ctr"/>
           <a:lstStyle/>
           <a:p>
-            <a:pPr indent="0" marL="0">
+            <a:pPr marL="0" indent="0">
               <a:buNone/>
             </a:pPr>
             <a:r>
@@ -19292,9 +19086,6 @@
               </a:rPr>
               <a:t>                if </a:t>
             </a:r>
-            <a:pPr indent="0" marL="0">
-              <a:buNone/>
-            </a:pPr>
             <a:r>
               <a:rPr lang="en-US" sz="1000" dirty="0">
                 <a:solidFill>
@@ -19306,9 +19097,6 @@
               </a:rPr>
               <a:t>dfs(vizinho, v): </a:t>
             </a:r>
-            <a:pPr indent="0" marL="0">
-              <a:buNone/>
-            </a:pPr>
             <a:r>
               <a:rPr lang="en-US" sz="1000" dirty="0">
                 <a:solidFill>
@@ -19320,9 +19108,6 @@
               </a:rPr>
               <a:t>return </a:t>
             </a:r>
-            <a:pPr indent="0" marL="0">
-              <a:buNone/>
-            </a:pPr>
             <a:r>
               <a:rPr lang="en-US" sz="1000" dirty="0">
                 <a:solidFill>
@@ -19359,7 +19144,7 @@
           <a:bodyPr wrap="square" lIns="0" tIns="0" rIns="0" bIns="0" rtlCol="0" anchor="ctr"/>
           <a:lstStyle/>
           <a:p>
-            <a:pPr indent="0" marL="0">
+            <a:pPr marL="0" indent="0">
               <a:buNone/>
             </a:pPr>
             <a:r>
@@ -19373,9 +19158,6 @@
               </a:rPr>
               <a:t>            elif </a:t>
             </a:r>
-            <a:pPr indent="0" marL="0">
-              <a:buNone/>
-            </a:pPr>
             <a:r>
               <a:rPr lang="en-US" sz="1000" dirty="0">
                 <a:solidFill>
@@ -19412,7 +19194,7 @@
           <a:bodyPr wrap="square" lIns="0" tIns="0" rIns="0" bIns="0" rtlCol="0" anchor="ctr"/>
           <a:lstStyle/>
           <a:p>
-            <a:pPr indent="0" marL="0">
+            <a:pPr marL="0" indent="0">
               <a:buNone/>
             </a:pPr>
             <a:r>
@@ -19426,9 +19208,6 @@
               </a:rPr>
               <a:t>                return </a:t>
             </a:r>
-            <a:pPr indent="0" marL="0">
-              <a:buNone/>
-            </a:pPr>
             <a:r>
               <a:rPr lang="en-US" sz="1000" dirty="0">
                 <a:solidFill>
@@ -19465,7 +19244,7 @@
           <a:bodyPr wrap="square" lIns="0" tIns="0" rIns="0" bIns="0" rtlCol="0" anchor="ctr"/>
           <a:lstStyle/>
           <a:p>
-            <a:pPr indent="0" marL="0">
+            <a:pPr marL="0" indent="0">
               <a:buNone/>
             </a:pPr>
             <a:r>
@@ -19479,9 +19258,6 @@
               </a:rPr>
               <a:t>        return </a:t>
             </a:r>
-            <a:pPr indent="0" marL="0">
-              <a:buNone/>
-            </a:pPr>
             <a:r>
               <a:rPr lang="en-US" sz="1000" dirty="0">
                 <a:solidFill>
@@ -19518,7 +19294,7 @@
           <a:bodyPr wrap="square" lIns="0" tIns="0" rIns="0" bIns="0" rtlCol="0" anchor="ctr"/>
           <a:lstStyle/>
           <a:p>
-            <a:pPr indent="0" marL="0">
+            <a:pPr marL="0" indent="0">
               <a:buNone/>
             </a:pPr>
             <a:r>
@@ -19532,9 +19308,6 @@
               </a:rPr>
               <a:t>    for </a:t>
             </a:r>
-            <a:pPr indent="0" marL="0">
-              <a:buNone/>
-            </a:pPr>
             <a:r>
               <a:rPr lang="en-US" sz="1000" dirty="0">
                 <a:solidFill>
@@ -19546,9 +19319,6 @@
               </a:rPr>
               <a:t>v </a:t>
             </a:r>
-            <a:pPr indent="0" marL="0">
-              <a:buNone/>
-            </a:pPr>
             <a:r>
               <a:rPr lang="en-US" sz="1000" dirty="0">
                 <a:solidFill>
@@ -19560,9 +19330,6 @@
               </a:rPr>
               <a:t>in </a:t>
             </a:r>
-            <a:pPr indent="0" marL="0">
-              <a:buNone/>
-            </a:pPr>
             <a:r>
               <a:rPr lang="en-US" sz="1000" dirty="0">
                 <a:solidFill>
@@ -19599,7 +19366,7 @@
           <a:bodyPr wrap="square" lIns="0" tIns="0" rIns="0" bIns="0" rtlCol="0" anchor="ctr"/>
           <a:lstStyle/>
           <a:p>
-            <a:pPr indent="0" marL="0">
+            <a:pPr marL="0" indent="0">
               <a:buNone/>
             </a:pPr>
             <a:r>
@@ -19613,9 +19380,6 @@
               </a:rPr>
               <a:t>        if </a:t>
             </a:r>
-            <a:pPr indent="0" marL="0">
-              <a:buNone/>
-            </a:pPr>
             <a:r>
               <a:rPr lang="en-US" sz="1000" dirty="0">
                 <a:solidFill>
@@ -19627,9 +19391,6 @@
               </a:rPr>
               <a:t>v </a:t>
             </a:r>
-            <a:pPr indent="0" marL="0">
-              <a:buNone/>
-            </a:pPr>
             <a:r>
               <a:rPr lang="en-US" sz="1000" dirty="0">
                 <a:solidFill>
@@ -19641,9 +19402,6 @@
               </a:rPr>
               <a:t>not in </a:t>
             </a:r>
-            <a:pPr indent="0" marL="0">
-              <a:buNone/>
-            </a:pPr>
             <a:r>
               <a:rPr lang="en-US" sz="1000" dirty="0">
                 <a:solidFill>
@@ -19655,9 +19413,6 @@
               </a:rPr>
               <a:t>visitados </a:t>
             </a:r>
-            <a:pPr indent="0" marL="0">
-              <a:buNone/>
-            </a:pPr>
             <a:r>
               <a:rPr lang="en-US" sz="1000" dirty="0">
                 <a:solidFill>
@@ -19669,9 +19424,6 @@
               </a:rPr>
               <a:t>and </a:t>
             </a:r>
-            <a:pPr indent="0" marL="0">
-              <a:buNone/>
-            </a:pPr>
             <a:r>
               <a:rPr lang="en-US" sz="1000" dirty="0">
                 <a:solidFill>
@@ -19683,9 +19435,6 @@
               </a:rPr>
               <a:t>dfs(v, </a:t>
             </a:r>
-            <a:pPr indent="0" marL="0">
-              <a:buNone/>
-            </a:pPr>
             <a:r>
               <a:rPr lang="en-US" sz="1000" dirty="0">
                 <a:solidFill>
@@ -19697,9 +19446,6 @@
               </a:rPr>
               <a:t>None</a:t>
             </a:r>
-            <a:pPr indent="0" marL="0">
-              <a:buNone/>
-            </a:pPr>
             <a:r>
               <a:rPr lang="en-US" sz="1000" dirty="0">
                 <a:solidFill>
@@ -19736,7 +19482,7 @@
           <a:bodyPr wrap="square" lIns="0" tIns="0" rIns="0" bIns="0" rtlCol="0" anchor="ctr"/>
           <a:lstStyle/>
           <a:p>
-            <a:pPr indent="0" marL="0">
+            <a:pPr marL="0" indent="0">
               <a:buNone/>
             </a:pPr>
             <a:r>
@@ -19750,9 +19496,6 @@
               </a:rPr>
               <a:t>            return </a:t>
             </a:r>
-            <a:pPr indent="0" marL="0">
-              <a:buNone/>
-            </a:pPr>
             <a:r>
               <a:rPr lang="en-US" sz="1000" dirty="0">
                 <a:solidFill>
@@ -19789,7 +19532,7 @@
           <a:bodyPr wrap="square" lIns="0" tIns="0" rIns="0" bIns="0" rtlCol="0" anchor="ctr"/>
           <a:lstStyle/>
           <a:p>
-            <a:pPr indent="0" marL="0">
+            <a:pPr marL="0" indent="0">
               <a:buNone/>
             </a:pPr>
             <a:r>
@@ -19803,9 +19546,6 @@
               </a:rPr>
               <a:t>    return </a:t>
             </a:r>
-            <a:pPr indent="0" marL="0">
-              <a:buNone/>
-            </a:pPr>
             <a:r>
               <a:rPr lang="en-US" sz="1000" dirty="0">
                 <a:solidFill>
@@ -19842,7 +19582,7 @@
           <a:bodyPr wrap="square" lIns="0" tIns="0" rIns="0" bIns="0" rtlCol="0" anchor="ctr"/>
           <a:lstStyle/>
           <a:p>
-            <a:pPr algn="ctr" indent="0" marL="0">
+            <a:pPr marL="0" indent="0" algn="ctr">
               <a:buNone/>
             </a:pPr>
             <a:r>
@@ -19881,7 +19621,7 @@
           <a:bodyPr wrap="square" lIns="0" tIns="0" rIns="0" bIns="0" rtlCol="0" anchor="ctr"/>
           <a:lstStyle/>
           <a:p>
-            <a:pPr algn="r" indent="0" marL="0">
+            <a:pPr marL="0" indent="0" algn="r">
               <a:buNone/>
             </a:pPr>
             <a:r>
@@ -19915,6 +19655,7 @@
         <a:solidFill>
           <a:srgbClr val="FFFFFF"/>
         </a:solidFill>
+        <a:effectLst/>
       </p:bgPr>
     </p:bg>
     <p:spTree>
@@ -19952,11 +19693,11 @@
           <a:bodyPr wrap="square" lIns="0" tIns="0" rIns="0" bIns="0" rtlCol="0" anchor="ctr"/>
           <a:lstStyle/>
           <a:p>
-            <a:pPr algn="l" indent="0" marL="0">
-              <a:buNone/>
-            </a:pPr>
-            <a:r>
-              <a:rPr lang="en-US" sz="1200" b="1" spc="200" kern="0" dirty="0">
+            <a:pPr marL="0" indent="0" algn="l">
+              <a:buNone/>
+            </a:pPr>
+            <a:r>
+              <a:rPr lang="en-US" sz="1200" b="1" kern="0" spc="200" dirty="0">
                 <a:solidFill>
                   <a:srgbClr val="6C4BC1"/>
                 </a:solidFill>
@@ -19991,7 +19732,7 @@
           <a:bodyPr wrap="square" lIns="0" tIns="0" rIns="0" bIns="0" rtlCol="0" anchor="ctr"/>
           <a:lstStyle/>
           <a:p>
-            <a:pPr indent="0" marL="0">
+            <a:pPr marL="0" indent="0">
               <a:buNone/>
             </a:pPr>
             <a:r>
@@ -20030,7 +19771,7 @@
           <a:bodyPr wrap="square" lIns="0" tIns="0" rIns="0" bIns="0" rtlCol="0" anchor="ctr"/>
           <a:lstStyle/>
           <a:p>
-            <a:pPr indent="0" marL="0">
+            <a:pPr marL="0" indent="0">
               <a:buNone/>
             </a:pPr>
             <a:r>
@@ -20092,307 +19833,7 @@
       </p:sp>
       <p:pic>
         <p:nvPicPr>
-          <p:cNvPr id="7" name="Image 0" descr="preencoded.png">    </p:cNvPr>
-          <p:cNvPicPr>
-            <a:picLocks noChangeAspect="1"/>
-          </p:cNvPicPr>
-          <p:nvPr/>
-        </p:nvPicPr>
-        <p:blipFill>
-          <a:blip r:embed="rId1"/>
-          <a:stretch>
-            <a:fillRect/>
-          </a:stretch>
-        </p:blipFill>
-        <p:spPr>
-          <a:xfrm>
-            <a:off x="1042416" y="2459736"/>
-            <a:ext cx="182880" cy="182880"/>
-          </a:xfrm>
-          <a:prstGeom prst="rect">
-            <a:avLst/>
-          </a:prstGeom>
-        </p:spPr>
-      </p:pic>
-      <p:sp>
-        <p:nvSpPr>
-          <p:cNvPr id="8" name="Text 5"/>
-          <p:cNvSpPr/>
-          <p:nvPr/>
-        </p:nvSpPr>
-        <p:spPr>
-          <a:xfrm>
-            <a:off x="896112" y="2898648"/>
-            <a:ext cx="3026664" cy="640080"/>
-          </a:xfrm>
-          <a:prstGeom prst="rect">
-            <a:avLst/>
-          </a:prstGeom>
-          <a:noFill/>
-          <a:ln/>
-        </p:spPr>
-        <p:txBody>
-          <a:bodyPr wrap="square" lIns="0" tIns="0" rIns="0" bIns="0" rtlCol="0" anchor="ctr"/>
-          <a:lstStyle/>
-          <a:p>
-            <a:pPr indent="0" marL="0">
-              <a:lnSpc>
-                <a:spcPts val="1600"/>
-              </a:lnSpc>
-              <a:buNone/>
-            </a:pPr>
-            <a:r>
-              <a:rPr lang="en-US" sz="1350" b="1" dirty="0">
-                <a:solidFill>
-                  <a:srgbClr val="1B1B2F"/>
-                </a:solidFill>
-                <a:latin typeface="Calibri" pitchFamily="34" charset="0"/>
-                <a:ea typeface="Calibri" pitchFamily="34" charset="-122"/>
-                <a:cs typeface="Calibri" pitchFamily="34" charset="-120"/>
-              </a:rPr>
-              <a:t>ROSEN, K. H.</a:t>
-            </a:r>
-            <a:endParaRPr lang="en-US" sz="1350" dirty="0"/>
-          </a:p>
-        </p:txBody>
-      </p:sp>
-      <p:sp>
-        <p:nvSpPr>
-          <p:cNvPr id="9" name="Text 6"/>
-          <p:cNvSpPr/>
-          <p:nvPr/>
-        </p:nvSpPr>
-        <p:spPr>
-          <a:xfrm>
-            <a:off x="896112" y="3566160"/>
-            <a:ext cx="3026664" cy="2286000"/>
-          </a:xfrm>
-          <a:prstGeom prst="rect">
-            <a:avLst/>
-          </a:prstGeom>
-          <a:noFill/>
-          <a:ln/>
-        </p:spPr>
-        <p:txBody>
-          <a:bodyPr wrap="square" lIns="0" tIns="0" rIns="0" bIns="0" rtlCol="0" anchor="ctr"/>
-          <a:lstStyle/>
-          <a:p>
-            <a:pPr indent="0" marL="0">
-              <a:lnSpc>
-                <a:spcPts val="1700"/>
-              </a:lnSpc>
-              <a:buNone/>
-            </a:pPr>
-            <a:r>
-              <a:rPr lang="en-US" sz="1200" dirty="0">
-                <a:solidFill>
-                  <a:srgbClr val="6B6B80"/>
-                </a:solidFill>
-                <a:latin typeface="Calibri" pitchFamily="34" charset="0"/>
-                <a:ea typeface="Calibri" pitchFamily="34" charset="-122"/>
-                <a:cs typeface="Calibri" pitchFamily="34" charset="-120"/>
-              </a:rPr>
-              <a:t>Matemática Discreta e suas Aplicações. 7. ed. AMGH/McGraw-Hill — cap. Grafos.</a:t>
-            </a:r>
-            <a:endParaRPr lang="en-US" sz="1200" dirty="0"/>
-          </a:p>
-        </p:txBody>
-      </p:sp>
-      <p:sp>
-        <p:nvSpPr>
-          <p:cNvPr id="10" name="Shape 7"/>
-          <p:cNvSpPr/>
-          <p:nvPr/>
-        </p:nvSpPr>
-        <p:spPr>
-          <a:xfrm>
-            <a:off x="4379976" y="2057400"/>
-            <a:ext cx="3538728" cy="4023360"/>
-          </a:xfrm>
-          <a:prstGeom prst="roundRect">
-            <a:avLst>
-              <a:gd name="adj" fmla="val 3101"/>
-            </a:avLst>
-          </a:prstGeom>
-          <a:solidFill>
-            <a:srgbClr val="F3F1FB"/>
-          </a:solidFill>
-          <a:ln/>
-        </p:spPr>
-      </p:sp>
-      <p:sp>
-        <p:nvSpPr>
-          <p:cNvPr id="11" name="Shape 8"/>
-          <p:cNvSpPr/>
-          <p:nvPr/>
-        </p:nvSpPr>
-        <p:spPr>
-          <a:xfrm>
-            <a:off x="4636008" y="2313432"/>
-            <a:ext cx="475488" cy="475488"/>
-          </a:xfrm>
-          <a:prstGeom prst="ellipse">
-            <a:avLst/>
-          </a:prstGeom>
-          <a:solidFill>
-            <a:srgbClr val="6C4BC1"/>
-          </a:solidFill>
-          <a:ln/>
-        </p:spPr>
-      </p:sp>
-      <p:pic>
-        <p:nvPicPr>
-          <p:cNvPr id="12" name="Image 1" descr="preencoded.png">    </p:cNvPr>
-          <p:cNvPicPr>
-            <a:picLocks noChangeAspect="1"/>
-          </p:cNvPicPr>
-          <p:nvPr/>
-        </p:nvPicPr>
-        <p:blipFill>
-          <a:blip r:embed="rId2"/>
-          <a:stretch>
-            <a:fillRect/>
-          </a:stretch>
-        </p:blipFill>
-        <p:spPr>
-          <a:xfrm>
-            <a:off x="4782312" y="2459736"/>
-            <a:ext cx="182880" cy="182880"/>
-          </a:xfrm>
-          <a:prstGeom prst="rect">
-            <a:avLst/>
-          </a:prstGeom>
-        </p:spPr>
-      </p:pic>
-      <p:sp>
-        <p:nvSpPr>
-          <p:cNvPr id="13" name="Text 9"/>
-          <p:cNvSpPr/>
-          <p:nvPr/>
-        </p:nvSpPr>
-        <p:spPr>
-          <a:xfrm>
-            <a:off x="4636008" y="2898648"/>
-            <a:ext cx="3026664" cy="640080"/>
-          </a:xfrm>
-          <a:prstGeom prst="rect">
-            <a:avLst/>
-          </a:prstGeom>
-          <a:noFill/>
-          <a:ln/>
-        </p:spPr>
-        <p:txBody>
-          <a:bodyPr wrap="square" lIns="0" tIns="0" rIns="0" bIns="0" rtlCol="0" anchor="ctr"/>
-          <a:lstStyle/>
-          <a:p>
-            <a:pPr indent="0" marL="0">
-              <a:lnSpc>
-                <a:spcPts val="1600"/>
-              </a:lnSpc>
-              <a:buNone/>
-            </a:pPr>
-            <a:r>
-              <a:rPr lang="en-US" sz="1350" b="1" dirty="0">
-                <a:solidFill>
-                  <a:srgbClr val="1B1B2F"/>
-                </a:solidFill>
-                <a:latin typeface="Calibri" pitchFamily="34" charset="0"/>
-                <a:ea typeface="Calibri" pitchFamily="34" charset="-122"/>
-                <a:cs typeface="Calibri" pitchFamily="34" charset="-120"/>
-              </a:rPr>
-              <a:t>GERSTING, J. L.</a:t>
-            </a:r>
-            <a:endParaRPr lang="en-US" sz="1350" dirty="0"/>
-          </a:p>
-        </p:txBody>
-      </p:sp>
-      <p:sp>
-        <p:nvSpPr>
-          <p:cNvPr id="14" name="Text 10"/>
-          <p:cNvSpPr/>
-          <p:nvPr/>
-        </p:nvSpPr>
-        <p:spPr>
-          <a:xfrm>
-            <a:off x="4636008" y="3566160"/>
-            <a:ext cx="3026664" cy="2286000"/>
-          </a:xfrm>
-          <a:prstGeom prst="rect">
-            <a:avLst/>
-          </a:prstGeom>
-          <a:noFill/>
-          <a:ln/>
-        </p:spPr>
-        <p:txBody>
-          <a:bodyPr wrap="square" lIns="0" tIns="0" rIns="0" bIns="0" rtlCol="0" anchor="ctr"/>
-          <a:lstStyle/>
-          <a:p>
-            <a:pPr indent="0" marL="0">
-              <a:lnSpc>
-                <a:spcPts val="1700"/>
-              </a:lnSpc>
-              <a:buNone/>
-            </a:pPr>
-            <a:r>
-              <a:rPr lang="en-US" sz="1200" dirty="0">
-                <a:solidFill>
-                  <a:srgbClr val="6B6B80"/>
-                </a:solidFill>
-                <a:latin typeface="Calibri" pitchFamily="34" charset="0"/>
-                <a:ea typeface="Calibri" pitchFamily="34" charset="-122"/>
-                <a:cs typeface="Calibri" pitchFamily="34" charset="-120"/>
-              </a:rPr>
-              <a:t>Fundamentos Matemáticos para a Ciência da Computação. 7. ed. LTC — cap. Grafos e Árvores.</a:t>
-            </a:r>
-            <a:endParaRPr lang="en-US" sz="1200" dirty="0"/>
-          </a:p>
-        </p:txBody>
-      </p:sp>
-      <p:sp>
-        <p:nvSpPr>
-          <p:cNvPr id="15" name="Shape 11"/>
-          <p:cNvSpPr/>
-          <p:nvPr/>
-        </p:nvSpPr>
-        <p:spPr>
-          <a:xfrm>
-            <a:off x="8119872" y="2057400"/>
-            <a:ext cx="3538728" cy="4023360"/>
-          </a:xfrm>
-          <a:prstGeom prst="roundRect">
-            <a:avLst>
-              <a:gd name="adj" fmla="val 3101"/>
-            </a:avLst>
-          </a:prstGeom>
-          <a:solidFill>
-            <a:srgbClr val="F3F1FB"/>
-          </a:solidFill>
-          <a:ln/>
-        </p:spPr>
-      </p:sp>
-      <p:sp>
-        <p:nvSpPr>
-          <p:cNvPr id="16" name="Shape 12"/>
-          <p:cNvSpPr/>
-          <p:nvPr/>
-        </p:nvSpPr>
-        <p:spPr>
-          <a:xfrm>
-            <a:off x="8375904" y="2313432"/>
-            <a:ext cx="475488" cy="475488"/>
-          </a:xfrm>
-          <a:prstGeom prst="ellipse">
-            <a:avLst/>
-          </a:prstGeom>
-          <a:solidFill>
-            <a:srgbClr val="6C4BC1"/>
-          </a:solidFill>
-          <a:ln/>
-        </p:spPr>
-      </p:sp>
-      <p:pic>
-        <p:nvPicPr>
-          <p:cNvPr id="17" name="Image 2" descr="preencoded.png">    </p:cNvPr>
+          <p:cNvPr id="7" name="Image 0" descr="preencoded.png"/>
           <p:cNvPicPr>
             <a:picLocks noChangeAspect="1"/>
           </p:cNvPicPr>
@@ -20406,7 +19847,7 @@
         </p:blipFill>
         <p:spPr>
           <a:xfrm>
-            <a:off x="8522208" y="2459736"/>
+            <a:off x="1042416" y="2459736"/>
             <a:ext cx="182880" cy="182880"/>
           </a:xfrm>
           <a:prstGeom prst="rect">
@@ -20416,13 +19857,13 @@
       </p:pic>
       <p:sp>
         <p:nvSpPr>
-          <p:cNvPr id="18" name="Text 13"/>
-          <p:cNvSpPr/>
-          <p:nvPr/>
-        </p:nvSpPr>
-        <p:spPr>
-          <a:xfrm>
-            <a:off x="8375904" y="2898648"/>
+          <p:cNvPr id="8" name="Text 5"/>
+          <p:cNvSpPr/>
+          <p:nvPr/>
+        </p:nvSpPr>
+        <p:spPr>
+          <a:xfrm>
+            <a:off x="896112" y="2898648"/>
             <a:ext cx="3026664" cy="640080"/>
           </a:xfrm>
           <a:prstGeom prst="rect">
@@ -20435,7 +19876,7 @@
           <a:bodyPr wrap="square" lIns="0" tIns="0" rIns="0" bIns="0" rtlCol="0" anchor="ctr"/>
           <a:lstStyle/>
           <a:p>
-            <a:pPr indent="0" marL="0">
+            <a:pPr marL="0" indent="0">
               <a:lnSpc>
                 <a:spcPts val="1600"/>
               </a:lnSpc>
@@ -20450,7 +19891,7 @@
                 <a:ea typeface="Calibri" pitchFamily="34" charset="-122"/>
                 <a:cs typeface="Calibri" pitchFamily="34" charset="-120"/>
               </a:rPr>
-              <a:t>GOODRICH, M. T.; TAMASSIA, R.</a:t>
+              <a:t>ROSEN, K. H.</a:t>
             </a:r>
             <a:endParaRPr lang="en-US" sz="1350" dirty="0"/>
           </a:p>
@@ -20458,13 +19899,13 @@
       </p:sp>
       <p:sp>
         <p:nvSpPr>
-          <p:cNvPr id="19" name="Text 14"/>
-          <p:cNvSpPr/>
-          <p:nvPr/>
-        </p:nvSpPr>
-        <p:spPr>
-          <a:xfrm>
-            <a:off x="8375904" y="3566160"/>
+          <p:cNvPr id="9" name="Text 6"/>
+          <p:cNvSpPr/>
+          <p:nvPr/>
+        </p:nvSpPr>
+        <p:spPr>
+          <a:xfrm>
+            <a:off x="896112" y="3566160"/>
             <a:ext cx="3026664" cy="2286000"/>
           </a:xfrm>
           <a:prstGeom prst="rect">
@@ -20477,7 +19918,7 @@
           <a:bodyPr wrap="square" lIns="0" tIns="0" rIns="0" bIns="0" rtlCol="0" anchor="ctr"/>
           <a:lstStyle/>
           <a:p>
-            <a:pPr indent="0" marL="0">
+            <a:pPr marL="0" indent="0">
               <a:lnSpc>
                 <a:spcPts val="1700"/>
               </a:lnSpc>
@@ -20492,6 +19933,306 @@
                 <a:ea typeface="Calibri" pitchFamily="34" charset="-122"/>
                 <a:cs typeface="Calibri" pitchFamily="34" charset="-120"/>
               </a:rPr>
+              <a:t>Matemática Discreta e suas Aplicações. 7. ed. AMGH/McGraw-Hill — cap. Grafos.</a:t>
+            </a:r>
+            <a:endParaRPr lang="en-US" sz="1200" dirty="0"/>
+          </a:p>
+        </p:txBody>
+      </p:sp>
+      <p:sp>
+        <p:nvSpPr>
+          <p:cNvPr id="10" name="Shape 7"/>
+          <p:cNvSpPr/>
+          <p:nvPr/>
+        </p:nvSpPr>
+        <p:spPr>
+          <a:xfrm>
+            <a:off x="4379976" y="2057400"/>
+            <a:ext cx="3538728" cy="4023360"/>
+          </a:xfrm>
+          <a:prstGeom prst="roundRect">
+            <a:avLst>
+              <a:gd name="adj" fmla="val 3101"/>
+            </a:avLst>
+          </a:prstGeom>
+          <a:solidFill>
+            <a:srgbClr val="F3F1FB"/>
+          </a:solidFill>
+          <a:ln/>
+        </p:spPr>
+      </p:sp>
+      <p:sp>
+        <p:nvSpPr>
+          <p:cNvPr id="11" name="Shape 8"/>
+          <p:cNvSpPr/>
+          <p:nvPr/>
+        </p:nvSpPr>
+        <p:spPr>
+          <a:xfrm>
+            <a:off x="4636008" y="2313432"/>
+            <a:ext cx="475488" cy="475488"/>
+          </a:xfrm>
+          <a:prstGeom prst="ellipse">
+            <a:avLst/>
+          </a:prstGeom>
+          <a:solidFill>
+            <a:srgbClr val="6C4BC1"/>
+          </a:solidFill>
+          <a:ln/>
+        </p:spPr>
+      </p:sp>
+      <p:pic>
+        <p:nvPicPr>
+          <p:cNvPr id="12" name="Image 1" descr="preencoded.png"/>
+          <p:cNvPicPr>
+            <a:picLocks noChangeAspect="1"/>
+          </p:cNvPicPr>
+          <p:nvPr/>
+        </p:nvPicPr>
+        <p:blipFill>
+          <a:blip r:embed="rId3"/>
+          <a:stretch>
+            <a:fillRect/>
+          </a:stretch>
+        </p:blipFill>
+        <p:spPr>
+          <a:xfrm>
+            <a:off x="4782312" y="2459736"/>
+            <a:ext cx="182880" cy="182880"/>
+          </a:xfrm>
+          <a:prstGeom prst="rect">
+            <a:avLst/>
+          </a:prstGeom>
+        </p:spPr>
+      </p:pic>
+      <p:sp>
+        <p:nvSpPr>
+          <p:cNvPr id="13" name="Text 9"/>
+          <p:cNvSpPr/>
+          <p:nvPr/>
+        </p:nvSpPr>
+        <p:spPr>
+          <a:xfrm>
+            <a:off x="4636008" y="2898648"/>
+            <a:ext cx="3026664" cy="640080"/>
+          </a:xfrm>
+          <a:prstGeom prst="rect">
+            <a:avLst/>
+          </a:prstGeom>
+          <a:noFill/>
+          <a:ln/>
+        </p:spPr>
+        <p:txBody>
+          <a:bodyPr wrap="square" lIns="0" tIns="0" rIns="0" bIns="0" rtlCol="0" anchor="ctr"/>
+          <a:lstStyle/>
+          <a:p>
+            <a:pPr marL="0" indent="0">
+              <a:lnSpc>
+                <a:spcPts val="1600"/>
+              </a:lnSpc>
+              <a:buNone/>
+            </a:pPr>
+            <a:r>
+              <a:rPr lang="en-US" sz="1350" b="1" dirty="0">
+                <a:solidFill>
+                  <a:srgbClr val="1B1B2F"/>
+                </a:solidFill>
+                <a:latin typeface="Calibri" pitchFamily="34" charset="0"/>
+                <a:ea typeface="Calibri" pitchFamily="34" charset="-122"/>
+                <a:cs typeface="Calibri" pitchFamily="34" charset="-120"/>
+              </a:rPr>
+              <a:t>GERSTING, J. L.</a:t>
+            </a:r>
+            <a:endParaRPr lang="en-US" sz="1350" dirty="0"/>
+          </a:p>
+        </p:txBody>
+      </p:sp>
+      <p:sp>
+        <p:nvSpPr>
+          <p:cNvPr id="14" name="Text 10"/>
+          <p:cNvSpPr/>
+          <p:nvPr/>
+        </p:nvSpPr>
+        <p:spPr>
+          <a:xfrm>
+            <a:off x="4636008" y="3566160"/>
+            <a:ext cx="3026664" cy="2286000"/>
+          </a:xfrm>
+          <a:prstGeom prst="rect">
+            <a:avLst/>
+          </a:prstGeom>
+          <a:noFill/>
+          <a:ln/>
+        </p:spPr>
+        <p:txBody>
+          <a:bodyPr wrap="square" lIns="0" tIns="0" rIns="0" bIns="0" rtlCol="0" anchor="ctr"/>
+          <a:lstStyle/>
+          <a:p>
+            <a:pPr marL="0" indent="0">
+              <a:lnSpc>
+                <a:spcPts val="1700"/>
+              </a:lnSpc>
+              <a:buNone/>
+            </a:pPr>
+            <a:r>
+              <a:rPr lang="en-US" sz="1200" dirty="0">
+                <a:solidFill>
+                  <a:srgbClr val="6B6B80"/>
+                </a:solidFill>
+                <a:latin typeface="Calibri" pitchFamily="34" charset="0"/>
+                <a:ea typeface="Calibri" pitchFamily="34" charset="-122"/>
+                <a:cs typeface="Calibri" pitchFamily="34" charset="-120"/>
+              </a:rPr>
+              <a:t>Fundamentos Matemáticos para a Ciência da Computação. 7. ed. LTC — cap. Grafos e Árvores.</a:t>
+            </a:r>
+            <a:endParaRPr lang="en-US" sz="1200" dirty="0"/>
+          </a:p>
+        </p:txBody>
+      </p:sp>
+      <p:sp>
+        <p:nvSpPr>
+          <p:cNvPr id="15" name="Shape 11"/>
+          <p:cNvSpPr/>
+          <p:nvPr/>
+        </p:nvSpPr>
+        <p:spPr>
+          <a:xfrm>
+            <a:off x="8119872" y="2057400"/>
+            <a:ext cx="3538728" cy="4023360"/>
+          </a:xfrm>
+          <a:prstGeom prst="roundRect">
+            <a:avLst>
+              <a:gd name="adj" fmla="val 3101"/>
+            </a:avLst>
+          </a:prstGeom>
+          <a:solidFill>
+            <a:srgbClr val="F3F1FB"/>
+          </a:solidFill>
+          <a:ln/>
+        </p:spPr>
+      </p:sp>
+      <p:sp>
+        <p:nvSpPr>
+          <p:cNvPr id="16" name="Shape 12"/>
+          <p:cNvSpPr/>
+          <p:nvPr/>
+        </p:nvSpPr>
+        <p:spPr>
+          <a:xfrm>
+            <a:off x="8375904" y="2313432"/>
+            <a:ext cx="475488" cy="475488"/>
+          </a:xfrm>
+          <a:prstGeom prst="ellipse">
+            <a:avLst/>
+          </a:prstGeom>
+          <a:solidFill>
+            <a:srgbClr val="6C4BC1"/>
+          </a:solidFill>
+          <a:ln/>
+        </p:spPr>
+      </p:sp>
+      <p:pic>
+        <p:nvPicPr>
+          <p:cNvPr id="17" name="Image 2" descr="preencoded.png"/>
+          <p:cNvPicPr>
+            <a:picLocks noChangeAspect="1"/>
+          </p:cNvPicPr>
+          <p:nvPr/>
+        </p:nvPicPr>
+        <p:blipFill>
+          <a:blip r:embed="rId3"/>
+          <a:stretch>
+            <a:fillRect/>
+          </a:stretch>
+        </p:blipFill>
+        <p:spPr>
+          <a:xfrm>
+            <a:off x="8522208" y="2459736"/>
+            <a:ext cx="182880" cy="182880"/>
+          </a:xfrm>
+          <a:prstGeom prst="rect">
+            <a:avLst/>
+          </a:prstGeom>
+        </p:spPr>
+      </p:pic>
+      <p:sp>
+        <p:nvSpPr>
+          <p:cNvPr id="18" name="Text 13"/>
+          <p:cNvSpPr/>
+          <p:nvPr/>
+        </p:nvSpPr>
+        <p:spPr>
+          <a:xfrm>
+            <a:off x="8375904" y="2898648"/>
+            <a:ext cx="3026664" cy="640080"/>
+          </a:xfrm>
+          <a:prstGeom prst="rect">
+            <a:avLst/>
+          </a:prstGeom>
+          <a:noFill/>
+          <a:ln/>
+        </p:spPr>
+        <p:txBody>
+          <a:bodyPr wrap="square" lIns="0" tIns="0" rIns="0" bIns="0" rtlCol="0" anchor="ctr"/>
+          <a:lstStyle/>
+          <a:p>
+            <a:pPr marL="0" indent="0">
+              <a:lnSpc>
+                <a:spcPts val="1600"/>
+              </a:lnSpc>
+              <a:buNone/>
+            </a:pPr>
+            <a:r>
+              <a:rPr lang="en-US" sz="1350" b="1" dirty="0">
+                <a:solidFill>
+                  <a:srgbClr val="1B1B2F"/>
+                </a:solidFill>
+                <a:latin typeface="Calibri" pitchFamily="34" charset="0"/>
+                <a:ea typeface="Calibri" pitchFamily="34" charset="-122"/>
+                <a:cs typeface="Calibri" pitchFamily="34" charset="-120"/>
+              </a:rPr>
+              <a:t>GOODRICH, M. T.; TAMASSIA, R.</a:t>
+            </a:r>
+            <a:endParaRPr lang="en-US" sz="1350" dirty="0"/>
+          </a:p>
+        </p:txBody>
+      </p:sp>
+      <p:sp>
+        <p:nvSpPr>
+          <p:cNvPr id="19" name="Text 14"/>
+          <p:cNvSpPr/>
+          <p:nvPr/>
+        </p:nvSpPr>
+        <p:spPr>
+          <a:xfrm>
+            <a:off x="8375904" y="3566160"/>
+            <a:ext cx="3026664" cy="2286000"/>
+          </a:xfrm>
+          <a:prstGeom prst="rect">
+            <a:avLst/>
+          </a:prstGeom>
+          <a:noFill/>
+          <a:ln/>
+        </p:spPr>
+        <p:txBody>
+          <a:bodyPr wrap="square" lIns="0" tIns="0" rIns="0" bIns="0" rtlCol="0" anchor="ctr"/>
+          <a:lstStyle/>
+          <a:p>
+            <a:pPr marL="0" indent="0">
+              <a:lnSpc>
+                <a:spcPts val="1700"/>
+              </a:lnSpc>
+              <a:buNone/>
+            </a:pPr>
+            <a:r>
+              <a:rPr lang="en-US" sz="1200" dirty="0">
+                <a:solidFill>
+                  <a:srgbClr val="6B6B80"/>
+                </a:solidFill>
+                <a:latin typeface="Calibri" pitchFamily="34" charset="0"/>
+                <a:ea typeface="Calibri" pitchFamily="34" charset="-122"/>
+                <a:cs typeface="Calibri" pitchFamily="34" charset="-120"/>
+              </a:rPr>
               <a:t>Estruturas de Dados e Algoritmos em Python. Bookman — representação de grafos.</a:t>
             </a:r>
             <a:endParaRPr lang="en-US" sz="1200" dirty="0"/>
@@ -20519,7 +20260,7 @@
           <a:bodyPr wrap="square" lIns="0" tIns="0" rIns="0" bIns="0" rtlCol="0" anchor="ctr"/>
           <a:lstStyle/>
           <a:p>
-            <a:pPr algn="r" indent="0" marL="0">
+            <a:pPr marL="0" indent="0" algn="r">
               <a:buNone/>
             </a:pPr>
             <a:r>
@@ -20553,6 +20294,7 @@
         <a:solidFill>
           <a:srgbClr val="FFFFFF"/>
         </a:solidFill>
+        <a:effectLst/>
       </p:bgPr>
     </p:bg>
     <p:spTree>
@@ -20590,11 +20332,11 @@
           <a:bodyPr wrap="square" lIns="0" tIns="0" rIns="0" bIns="0" rtlCol="0" anchor="ctr"/>
           <a:lstStyle/>
           <a:p>
-            <a:pPr algn="l" indent="0" marL="0">
-              <a:buNone/>
-            </a:pPr>
-            <a:r>
-              <a:rPr lang="en-US" sz="1200" b="1" spc="200" kern="0" dirty="0">
+            <a:pPr marL="0" indent="0" algn="l">
+              <a:buNone/>
+            </a:pPr>
+            <a:r>
+              <a:rPr lang="en-US" sz="1200" b="1" kern="0" spc="200" dirty="0">
                 <a:solidFill>
                   <a:srgbClr val="6C4BC1"/>
                 </a:solidFill>
@@ -20629,7 +20371,7 @@
           <a:bodyPr wrap="square" lIns="0" tIns="0" rIns="0" bIns="0" rtlCol="0" anchor="ctr"/>
           <a:lstStyle/>
           <a:p>
-            <a:pPr indent="0" marL="0">
+            <a:pPr marL="0" indent="0">
               <a:buNone/>
             </a:pPr>
             <a:r>
@@ -20691,184 +20433,7 @@
       </p:sp>
       <p:pic>
         <p:nvPicPr>
-          <p:cNvPr id="6" name="Image 0" descr="preencoded.png">    </p:cNvPr>
-          <p:cNvPicPr>
-            <a:picLocks noChangeAspect="1"/>
-          </p:cNvPicPr>
-          <p:nvPr/>
-        </p:nvPicPr>
-        <p:blipFill>
-          <a:blip r:embed="rId1"/>
-          <a:stretch>
-            <a:fillRect/>
-          </a:stretch>
-        </p:blipFill>
-        <p:spPr>
-          <a:xfrm>
-            <a:off x="1042416" y="2093976"/>
-            <a:ext cx="182880" cy="182880"/>
-          </a:xfrm>
-          <a:prstGeom prst="rect">
-            <a:avLst/>
-          </a:prstGeom>
-        </p:spPr>
-      </p:pic>
-      <p:sp>
-        <p:nvSpPr>
-          <p:cNvPr id="7" name="Text 4"/>
-          <p:cNvSpPr/>
-          <p:nvPr/>
-        </p:nvSpPr>
-        <p:spPr>
-          <a:xfrm>
-            <a:off x="896112" y="2532888"/>
-            <a:ext cx="4745736" cy="365760"/>
-          </a:xfrm>
-          <a:prstGeom prst="rect">
-            <a:avLst/>
-          </a:prstGeom>
-          <a:noFill/>
-          <a:ln/>
-        </p:spPr>
-        <p:txBody>
-          <a:bodyPr wrap="square" lIns="0" tIns="0" rIns="0" bIns="0" rtlCol="0" anchor="ctr"/>
-          <a:lstStyle/>
-          <a:p>
-            <a:pPr indent="0" marL="0">
-              <a:buNone/>
-            </a:pPr>
-            <a:r>
-              <a:rPr lang="en-US" sz="1550" b="1" dirty="0">
-                <a:solidFill>
-                  <a:srgbClr val="1B1B2F"/>
-                </a:solidFill>
-                <a:latin typeface="Calibri" pitchFamily="34" charset="0"/>
-                <a:ea typeface="Calibri" pitchFamily="34" charset="-122"/>
-                <a:cs typeface="Calibri" pitchFamily="34" charset="-120"/>
-              </a:rPr>
-              <a:t>Python — NetworkX</a:t>
-            </a:r>
-            <a:endParaRPr lang="en-US" sz="1550" dirty="0"/>
-          </a:p>
-        </p:txBody>
-      </p:sp>
-      <p:sp>
-        <p:nvSpPr>
-          <p:cNvPr id="8" name="Text 5"/>
-          <p:cNvSpPr/>
-          <p:nvPr/>
-        </p:nvSpPr>
-        <p:spPr>
-          <a:xfrm>
-            <a:off x="896112" y="2971800"/>
-            <a:ext cx="4745736" cy="2788920"/>
-          </a:xfrm>
-          <a:prstGeom prst="rect">
-            <a:avLst/>
-          </a:prstGeom>
-          <a:noFill/>
-          <a:ln/>
-        </p:spPr>
-        <p:txBody>
-          <a:bodyPr wrap="square" lIns="0" tIns="0" rIns="0" bIns="0" rtlCol="0" anchor="ctr"/>
-          <a:lstStyle/>
-          <a:p>
-            <a:pPr indent="0" marL="0">
-              <a:lnSpc>
-                <a:spcPts val="1900"/>
-              </a:lnSpc>
-              <a:spcAft>
-                <a:spcPts val="1200"/>
-              </a:spcAft>
-              <a:buNone/>
-            </a:pPr>
-            <a:r>
-              <a:rPr lang="en-US" sz="1250" u="sng" dirty="0">
-                <a:solidFill>
-                  <a:srgbClr val="6C4BC1"/>
-                </a:solidFill>
-                <a:latin typeface="Calibri" pitchFamily="34" charset="0"/>
-                <a:ea typeface="Calibri" pitchFamily="34" charset="-122"/>
-                <a:cs typeface="Calibri" pitchFamily="34" charset="-120"/>
-                <a:hlinkClick r:id="rId2" invalidUrl="" action="" tgtFrame="" tooltip="" history="1" highlightClick="0" endSnd="0">
-                  <a:extLst>
-                    <a:ext uri="{A12FA001-AC4F-418D-AE19-62706E023703}">
-                      <ahyp:hlinkClr xmlns:ahyp="http://schemas.microsoft.com/office/drawing/2018/hyperlinkcolor" val="tx"/>
-                    </a:ext>
-                  </a:extLst>
-                </a:hlinkClick>
-              </a:rPr>
-              <a:t>NetworkX — biblioteca de grafos</a:t>
-            </a:r>
-            <a:pPr indent="0" marL="0">
-              <a:lnSpc>
-                <a:spcPts val="1900"/>
-              </a:lnSpc>
-              <a:spcAft>
-                <a:spcPts val="1200"/>
-              </a:spcAft>
-              <a:buNone/>
-            </a:pPr>
-            <a:r>
-              <a:rPr lang="en-US" sz="1250" dirty="0">
-                <a:solidFill>
-                  <a:srgbClr val="6B6B80"/>
-                </a:solidFill>
-                <a:latin typeface="Calibri" pitchFamily="34" charset="0"/>
-                <a:ea typeface="Calibri" pitchFamily="34" charset="-122"/>
-                <a:cs typeface="Calibri" pitchFamily="34" charset="-120"/>
-              </a:rPr>
-              <a:t> — tutorial oficial.</a:t>
-            </a:r>
-            <a:endParaRPr lang="en-US" sz="1250" dirty="0"/>
-          </a:p>
-        </p:txBody>
-      </p:sp>
-      <p:sp>
-        <p:nvSpPr>
-          <p:cNvPr id="9" name="Shape 6"/>
-          <p:cNvSpPr/>
-          <p:nvPr/>
-        </p:nvSpPr>
-        <p:spPr>
-          <a:xfrm>
-            <a:off x="6263640" y="1691640"/>
-            <a:ext cx="5257800" cy="4251960"/>
-          </a:xfrm>
-          <a:prstGeom prst="roundRect">
-            <a:avLst>
-              <a:gd name="adj" fmla="val 2581"/>
-            </a:avLst>
-          </a:prstGeom>
-          <a:solidFill>
-            <a:srgbClr val="F3F1FB"/>
-          </a:solidFill>
-          <a:ln/>
-        </p:spPr>
-      </p:sp>
-      <p:sp>
-        <p:nvSpPr>
-          <p:cNvPr id="10" name="Shape 7"/>
-          <p:cNvSpPr/>
-          <p:nvPr/>
-        </p:nvSpPr>
-        <p:spPr>
-          <a:xfrm>
-            <a:off x="6519672" y="1947672"/>
-            <a:ext cx="475488" cy="475488"/>
-          </a:xfrm>
-          <a:prstGeom prst="ellipse">
-            <a:avLst/>
-          </a:prstGeom>
-          <a:solidFill>
-            <a:srgbClr val="6C4BC1"/>
-          </a:solidFill>
-          <a:ln/>
-        </p:spPr>
-      </p:sp>
-      <p:pic>
-        <p:nvPicPr>
-          <p:cNvPr id="11" name="Image 1" descr="preencoded.png">    </p:cNvPr>
+          <p:cNvPr id="6" name="Image 0" descr="preencoded.png"/>
           <p:cNvPicPr>
             <a:picLocks noChangeAspect="1"/>
           </p:cNvPicPr>
@@ -20882,7 +20447,7 @@
         </p:blipFill>
         <p:spPr>
           <a:xfrm>
-            <a:off x="6665976" y="2093976"/>
+            <a:off x="1042416" y="2093976"/>
             <a:ext cx="182880" cy="182880"/>
           </a:xfrm>
           <a:prstGeom prst="rect">
@@ -20892,13 +20457,13 @@
       </p:pic>
       <p:sp>
         <p:nvSpPr>
-          <p:cNvPr id="12" name="Text 8"/>
-          <p:cNvSpPr/>
-          <p:nvPr/>
-        </p:nvSpPr>
-        <p:spPr>
-          <a:xfrm>
-            <a:off x="6519672" y="2532888"/>
+          <p:cNvPr id="7" name="Text 4"/>
+          <p:cNvSpPr/>
+          <p:nvPr/>
+        </p:nvSpPr>
+        <p:spPr>
+          <a:xfrm>
+            <a:off x="896112" y="2532888"/>
             <a:ext cx="4745736" cy="365760"/>
           </a:xfrm>
           <a:prstGeom prst="rect">
@@ -20911,7 +20476,7 @@
           <a:bodyPr wrap="square" lIns="0" tIns="0" rIns="0" bIns="0" rtlCol="0" anchor="ctr"/>
           <a:lstStyle/>
           <a:p>
-            <a:pPr indent="0" marL="0">
+            <a:pPr marL="0" indent="0">
               <a:buNone/>
             </a:pPr>
             <a:r>
@@ -20923,7 +20488,7 @@
                 <a:ea typeface="Calibri" pitchFamily="34" charset="-122"/>
                 <a:cs typeface="Calibri" pitchFamily="34" charset="-120"/>
               </a:rPr>
-              <a:t>Vídeos</a:t>
+              <a:t>Python — NetworkX</a:t>
             </a:r>
             <a:endParaRPr lang="en-US" sz="1550" dirty="0"/>
           </a:p>
@@ -20931,13 +20496,13 @@
       </p:sp>
       <p:sp>
         <p:nvSpPr>
-          <p:cNvPr id="13" name="Text 9"/>
-          <p:cNvSpPr/>
-          <p:nvPr/>
-        </p:nvSpPr>
-        <p:spPr>
-          <a:xfrm>
-            <a:off x="6519672" y="2971800"/>
+          <p:cNvPr id="8" name="Text 5"/>
+          <p:cNvSpPr/>
+          <p:nvPr/>
+        </p:nvSpPr>
+        <p:spPr>
+          <a:xfrm>
+            <a:off x="896112" y="2971800"/>
             <a:ext cx="4745736" cy="2788920"/>
           </a:xfrm>
           <a:prstGeom prst="rect">
@@ -20950,7 +20515,7 @@
           <a:bodyPr wrap="square" lIns="0" tIns="0" rIns="0" bIns="0" rtlCol="0" anchor="ctr"/>
           <a:lstStyle/>
           <a:p>
-            <a:pPr indent="0" marL="0">
+            <a:pPr marL="0" indent="0">
               <a:lnSpc>
                 <a:spcPts val="1900"/>
               </a:lnSpc>
@@ -20967,7 +20532,7 @@
                 <a:latin typeface="Calibri" pitchFamily="34" charset="0"/>
                 <a:ea typeface="Calibri" pitchFamily="34" charset="-122"/>
                 <a:cs typeface="Calibri" pitchFamily="34" charset="-120"/>
-                <a:hlinkClick r:id="rId4" invalidUrl="" action="" tgtFrame="" tooltip="" history="1" highlightClick="0" endSnd="0">
+                <a:hlinkClick r:id="rId4">
                   <a:extLst>
                     <a:ext uri="{A12FA001-AC4F-418D-AE19-62706E023703}">
                       <ahyp:hlinkClr xmlns:ahyp="http://schemas.microsoft.com/office/drawing/2018/hyperlinkcolor" val="tx"/>
@@ -20975,9 +20540,150 @@
                   </a:extLst>
                 </a:hlinkClick>
               </a:rPr>
-              <a:t>Computerphile — introdução a grafos</a:t>
-            </a:r>
-            <a:pPr indent="0" marL="0">
+              <a:t>NetworkX — biblioteca de grafos</a:t>
+            </a:r>
+            <a:r>
+              <a:rPr lang="en-US" sz="1250" dirty="0">
+                <a:solidFill>
+                  <a:srgbClr val="6B6B80"/>
+                </a:solidFill>
+                <a:latin typeface="Calibri" pitchFamily="34" charset="0"/>
+                <a:ea typeface="Calibri" pitchFamily="34" charset="-122"/>
+                <a:cs typeface="Calibri" pitchFamily="34" charset="-120"/>
+              </a:rPr>
+              <a:t> — tutorial oficial.</a:t>
+            </a:r>
+            <a:endParaRPr lang="en-US" sz="1250" dirty="0"/>
+          </a:p>
+        </p:txBody>
+      </p:sp>
+      <p:sp>
+        <p:nvSpPr>
+          <p:cNvPr id="9" name="Shape 6"/>
+          <p:cNvSpPr/>
+          <p:nvPr/>
+        </p:nvSpPr>
+        <p:spPr>
+          <a:xfrm>
+            <a:off x="6263640" y="1691640"/>
+            <a:ext cx="5257800" cy="4251960"/>
+          </a:xfrm>
+          <a:prstGeom prst="roundRect">
+            <a:avLst>
+              <a:gd name="adj" fmla="val 2581"/>
+            </a:avLst>
+          </a:prstGeom>
+          <a:solidFill>
+            <a:srgbClr val="F3F1FB"/>
+          </a:solidFill>
+          <a:ln/>
+        </p:spPr>
+      </p:sp>
+      <p:sp>
+        <p:nvSpPr>
+          <p:cNvPr id="10" name="Shape 7"/>
+          <p:cNvSpPr/>
+          <p:nvPr/>
+        </p:nvSpPr>
+        <p:spPr>
+          <a:xfrm>
+            <a:off x="6519672" y="1947672"/>
+            <a:ext cx="475488" cy="475488"/>
+          </a:xfrm>
+          <a:prstGeom prst="ellipse">
+            <a:avLst/>
+          </a:prstGeom>
+          <a:solidFill>
+            <a:srgbClr val="6C4BC1"/>
+          </a:solidFill>
+          <a:ln/>
+        </p:spPr>
+      </p:sp>
+      <p:pic>
+        <p:nvPicPr>
+          <p:cNvPr id="11" name="Image 1" descr="preencoded.png"/>
+          <p:cNvPicPr>
+            <a:picLocks noChangeAspect="1"/>
+          </p:cNvPicPr>
+          <p:nvPr/>
+        </p:nvPicPr>
+        <p:blipFill>
+          <a:blip r:embed="rId5"/>
+          <a:stretch>
+            <a:fillRect/>
+          </a:stretch>
+        </p:blipFill>
+        <p:spPr>
+          <a:xfrm>
+            <a:off x="6665976" y="2093976"/>
+            <a:ext cx="182880" cy="182880"/>
+          </a:xfrm>
+          <a:prstGeom prst="rect">
+            <a:avLst/>
+          </a:prstGeom>
+        </p:spPr>
+      </p:pic>
+      <p:sp>
+        <p:nvSpPr>
+          <p:cNvPr id="12" name="Text 8"/>
+          <p:cNvSpPr/>
+          <p:nvPr/>
+        </p:nvSpPr>
+        <p:spPr>
+          <a:xfrm>
+            <a:off x="6519672" y="2532888"/>
+            <a:ext cx="4745736" cy="365760"/>
+          </a:xfrm>
+          <a:prstGeom prst="rect">
+            <a:avLst/>
+          </a:prstGeom>
+          <a:noFill/>
+          <a:ln/>
+        </p:spPr>
+        <p:txBody>
+          <a:bodyPr wrap="square" lIns="0" tIns="0" rIns="0" bIns="0" rtlCol="0" anchor="ctr"/>
+          <a:lstStyle/>
+          <a:p>
+            <a:pPr marL="0" indent="0">
+              <a:buNone/>
+            </a:pPr>
+            <a:r>
+              <a:rPr lang="en-US" sz="1550" b="1" dirty="0">
+                <a:solidFill>
+                  <a:srgbClr val="1B1B2F"/>
+                </a:solidFill>
+                <a:latin typeface="Calibri" pitchFamily="34" charset="0"/>
+                <a:ea typeface="Calibri" pitchFamily="34" charset="-122"/>
+                <a:cs typeface="Calibri" pitchFamily="34" charset="-120"/>
+              </a:rPr>
+              <a:t>Vídeos</a:t>
+            </a:r>
+            <a:endParaRPr lang="en-US" sz="1550" dirty="0"/>
+          </a:p>
+        </p:txBody>
+      </p:sp>
+      <p:sp>
+        <p:nvSpPr>
+          <p:cNvPr id="13" name="Text 9"/>
+          <p:cNvSpPr/>
+          <p:nvPr/>
+        </p:nvSpPr>
+        <p:spPr>
+          <a:xfrm>
+            <a:off x="6519672" y="2971800"/>
+            <a:ext cx="4745736" cy="2788920"/>
+          </a:xfrm>
+          <a:prstGeom prst="rect">
+            <a:avLst/>
+          </a:prstGeom>
+          <a:noFill/>
+          <a:ln/>
+        </p:spPr>
+        <p:txBody>
+          <a:bodyPr wrap="square" lIns="0" tIns="0" rIns="0" bIns="0" rtlCol="0" anchor="ctr"/>
+          <a:lstStyle/>
+          <a:p>
+            <a:pPr marL="0" indent="0">
               <a:lnSpc>
                 <a:spcPts val="1900"/>
               </a:lnSpc>
@@ -20987,20 +20693,38 @@
               <a:buNone/>
             </a:pPr>
             <a:r>
-              <a:rPr lang="en-US" sz="1250" dirty="0">
-                <a:solidFill>
-                  <a:srgbClr val="6B6B80"/>
+              <a:rPr lang="en-US" sz="1250" u="sng" dirty="0">
+                <a:solidFill>
+                  <a:srgbClr val="6C4BC1"/>
                 </a:solidFill>
                 <a:latin typeface="Calibri" pitchFamily="34" charset="0"/>
                 <a:ea typeface="Calibri" pitchFamily="34" charset="-122"/>
                 <a:cs typeface="Calibri" pitchFamily="34" charset="-120"/>
+                <a:hlinkClick r:id="rId6">
+                  <a:extLst>
+                    <a:ext uri="{A12FA001-AC4F-418D-AE19-62706E023703}">
+                      <ahyp:hlinkClr xmlns:ahyp="http://schemas.microsoft.com/office/drawing/2018/hyperlinkcolor" val="tx"/>
+                    </a:ext>
+                  </a:extLst>
+                </a:hlinkClick>
+              </a:rPr>
+              <a:t>Computerphile — introdução a grafos</a:t>
+            </a:r>
+            <a:r>
+              <a:rPr lang="en-US" sz="1250" dirty="0">
+                <a:solidFill>
+                  <a:srgbClr val="6B6B80"/>
+                </a:solidFill>
+                <a:latin typeface="Calibri" pitchFamily="34" charset="0"/>
+                <a:ea typeface="Calibri" pitchFamily="34" charset="-122"/>
+                <a:cs typeface="Calibri" pitchFamily="34" charset="-120"/>
               </a:rPr>
               <a:t> — e suas representações.</a:t>
             </a:r>
             <a:endParaRPr lang="en-US" sz="1250" dirty="0"/>
           </a:p>
           <a:p>
-            <a:pPr indent="0" marL="0">
+            <a:pPr marL="0" indent="0">
               <a:lnSpc>
                 <a:spcPts val="1900"/>
               </a:lnSpc>
@@ -21017,7 +20741,7 @@
                 <a:latin typeface="Calibri" pitchFamily="34" charset="0"/>
                 <a:ea typeface="Calibri" pitchFamily="34" charset="-122"/>
                 <a:cs typeface="Calibri" pitchFamily="34" charset="-120"/>
-                <a:hlinkClick r:id="rId5" invalidUrl="" action="" tgtFrame="" tooltip="" history="1" highlightClick="0" endSnd="0">
+                <a:hlinkClick r:id="rId7">
                   <a:extLst>
                     <a:ext uri="{A12FA001-AC4F-418D-AE19-62706E023703}">
                       <ahyp:hlinkClr xmlns:ahyp="http://schemas.microsoft.com/office/drawing/2018/hyperlinkcolor" val="tx"/>
@@ -21027,15 +20751,6 @@
               </a:rPr>
               <a:t>Matriz e lista de adjacência</a:t>
             </a:r>
-            <a:pPr indent="0" marL="0">
-              <a:lnSpc>
-                <a:spcPts val="1900"/>
-              </a:lnSpc>
-              <a:spcAft>
-                <a:spcPts val="1200"/>
-              </a:spcAft>
-              <a:buNone/>
-            </a:pPr>
             <a:r>
               <a:rPr lang="en-US" sz="1250" dirty="0">
                 <a:solidFill>
@@ -21072,7 +20787,7 @@
           <a:bodyPr wrap="square" lIns="0" tIns="0" rIns="0" bIns="0" rtlCol="0" anchor="ctr"/>
           <a:lstStyle/>
           <a:p>
-            <a:pPr algn="r" indent="0" marL="0">
+            <a:pPr marL="0" indent="0" algn="r">
               <a:buNone/>
             </a:pPr>
             <a:r>
@@ -21106,6 +20821,7 @@
         <a:solidFill>
           <a:srgbClr val="141B41"/>
         </a:solidFill>
+        <a:effectLst/>
       </p:bgPr>
     </p:bg>
     <p:spTree>
@@ -21192,14 +20908,14 @@
       </p:sp>
       <p:pic>
         <p:nvPicPr>
-          <p:cNvPr id="5" name="Image 0" descr="preencoded.png">    </p:cNvPr>
+          <p:cNvPr id="5" name="Image 0" descr="preencoded.png"/>
           <p:cNvPicPr>
             <a:picLocks noChangeAspect="1"/>
           </p:cNvPicPr>
           <p:nvPr/>
         </p:nvPicPr>
         <p:blipFill>
-          <a:blip r:embed="rId1"/>
+          <a:blip r:embed="rId3"/>
           <a:stretch>
             <a:fillRect/>
           </a:stretch>
@@ -21235,11 +20951,11 @@
           <a:bodyPr wrap="square" lIns="0" tIns="0" rIns="0" bIns="0" rtlCol="0" anchor="ctr"/>
           <a:lstStyle/>
           <a:p>
-            <a:pPr indent="0" marL="0">
-              <a:buNone/>
-            </a:pPr>
-            <a:r>
-              <a:rPr lang="en-US" sz="1300" b="1" spc="300" kern="0" dirty="0">
+            <a:pPr marL="0" indent="0">
+              <a:buNone/>
+            </a:pPr>
+            <a:r>
+              <a:rPr lang="en-US" sz="1300" b="1" kern="0" spc="300" dirty="0">
                 <a:solidFill>
                   <a:srgbClr val="2FE6C7"/>
                 </a:solidFill>
@@ -21274,7 +20990,7 @@
           <a:bodyPr wrap="square" lIns="0" tIns="0" rIns="0" bIns="0" rtlCol="0" anchor="ctr"/>
           <a:lstStyle/>
           <a:p>
-            <a:pPr indent="0" marL="0">
+            <a:pPr marL="0" indent="0">
               <a:buNone/>
             </a:pPr>
             <a:r>
@@ -21313,7 +21029,7 @@
           <a:bodyPr wrap="square" lIns="0" tIns="0" rIns="0" bIns="0" rtlCol="0" anchor="ctr"/>
           <a:lstStyle/>
           <a:p>
-            <a:pPr indent="0" marL="0">
+            <a:pPr marL="0" indent="0">
               <a:lnSpc>
                 <a:spcPts val="3800"/>
               </a:lnSpc>
@@ -21333,7 +21049,7 @@
             <a:endParaRPr lang="en-US" sz="3200" dirty="0"/>
           </a:p>
           <a:p>
-            <a:pPr indent="0" marL="0">
+            <a:pPr marL="0" indent="0">
               <a:lnSpc>
                 <a:spcPts val="3800"/>
               </a:lnSpc>
@@ -21375,7 +21091,7 @@
           <a:bodyPr wrap="square" lIns="0" tIns="0" rIns="0" bIns="0" rtlCol="0" anchor="ctr"/>
           <a:lstStyle/>
           <a:p>
-            <a:pPr indent="0" marL="0">
+            <a:pPr marL="0" indent="0">
               <a:lnSpc>
                 <a:spcPts val="2000"/>
               </a:lnSpc>
@@ -21417,11 +21133,11 @@
           <a:bodyPr wrap="square" lIns="0" tIns="0" rIns="0" bIns="0" rtlCol="0" anchor="ctr"/>
           <a:lstStyle/>
           <a:p>
-            <a:pPr indent="0" marL="0">
-              <a:buNone/>
-            </a:pPr>
-            <a:r>
-              <a:rPr lang="en-US" sz="1150" spc="100" kern="0" dirty="0">
+            <a:pPr marL="0" indent="0">
+              <a:buNone/>
+            </a:pPr>
+            <a:r>
+              <a:rPr lang="en-US" sz="1150" kern="0" spc="100" dirty="0">
                 <a:solidFill>
                   <a:srgbClr val="6F76B0"/>
                 </a:solidFill>
@@ -21451,6 +21167,7 @@
         <a:solidFill>
           <a:srgbClr val="FFFFFF"/>
         </a:solidFill>
+        <a:effectLst/>
       </p:bgPr>
     </p:bg>
     <p:spTree>
@@ -21488,11 +21205,11 @@
           <a:bodyPr wrap="square" lIns="0" tIns="0" rIns="0" bIns="0" rtlCol="0" anchor="ctr"/>
           <a:lstStyle/>
           <a:p>
-            <a:pPr algn="l" indent="0" marL="0">
-              <a:buNone/>
-            </a:pPr>
-            <a:r>
-              <a:rPr lang="en-US" sz="1200" b="1" spc="200" kern="0" dirty="0">
+            <a:pPr marL="0" indent="0" algn="l">
+              <a:buNone/>
+            </a:pPr>
+            <a:r>
+              <a:rPr lang="en-US" sz="1200" b="1" kern="0" spc="200" dirty="0">
                 <a:solidFill>
                   <a:srgbClr val="6C4BC1"/>
                 </a:solidFill>
@@ -21528,14 +21245,14 @@
       </p:sp>
       <p:pic>
         <p:nvPicPr>
-          <p:cNvPr id="4" name="Image 0" descr="preencoded.png">    </p:cNvPr>
+          <p:cNvPr id="4" name="Image 0" descr="preencoded.png"/>
           <p:cNvPicPr>
             <a:picLocks noChangeAspect="1"/>
           </p:cNvPicPr>
           <p:nvPr/>
         </p:nvPicPr>
         <p:blipFill>
-          <a:blip r:embed="rId1"/>
+          <a:blip r:embed="rId3"/>
           <a:stretch>
             <a:fillRect/>
           </a:stretch>
@@ -21571,7 +21288,7 @@
           <a:bodyPr wrap="square" lIns="0" tIns="0" rIns="0" bIns="0" rtlCol="0" anchor="ctr"/>
           <a:lstStyle/>
           <a:p>
-            <a:pPr indent="0" marL="0">
+            <a:pPr marL="0" indent="0">
               <a:buNone/>
             </a:pPr>
             <a:r>
@@ -21610,7 +21327,7 @@
           <a:bodyPr wrap="square" lIns="0" tIns="0" rIns="0" bIns="0" rtlCol="0" anchor="ctr"/>
           <a:lstStyle/>
           <a:p>
-            <a:pPr indent="0" marL="0">
+            <a:pPr marL="0" indent="0">
               <a:lnSpc>
                 <a:spcPts val="2000"/>
               </a:lnSpc>
@@ -21674,7 +21391,7 @@
           <a:bodyPr wrap="square" lIns="0" tIns="0" rIns="0" bIns="0" rtlCol="0" anchor="ctr"/>
           <a:lstStyle/>
           <a:p>
-            <a:pPr algn="ctr" indent="0" marL="0">
+            <a:pPr marL="0" indent="0" algn="ctr">
               <a:buNone/>
             </a:pPr>
             <a:r>
@@ -21735,7 +21452,7 @@
           <a:bodyPr wrap="square" lIns="0" tIns="0" rIns="0" bIns="0" rtlCol="0" anchor="ctr"/>
           <a:lstStyle/>
           <a:p>
-            <a:pPr indent="0" marL="0">
+            <a:pPr marL="0" indent="0">
               <a:lnSpc>
                 <a:spcPts val="2000"/>
               </a:lnSpc>
@@ -21777,7 +21494,7 @@
           <a:bodyPr wrap="square" lIns="0" tIns="0" rIns="0" bIns="0" rtlCol="0" anchor="ctr"/>
           <a:lstStyle/>
           <a:p>
-            <a:pPr indent="0" marL="0">
+            <a:pPr marL="0" indent="0">
               <a:lnSpc>
                 <a:spcPts val="1900"/>
               </a:lnSpc>
@@ -21819,7 +21536,7 @@
           <a:bodyPr wrap="square" lIns="0" tIns="0" rIns="0" bIns="0" rtlCol="0" anchor="ctr"/>
           <a:lstStyle/>
           <a:p>
-            <a:pPr algn="r" indent="0" marL="0">
+            <a:pPr marL="0" indent="0" algn="r">
               <a:buNone/>
             </a:pPr>
             <a:r>
@@ -21853,6 +21570,7 @@
         <a:solidFill>
           <a:srgbClr val="FFFFFF"/>
         </a:solidFill>
+        <a:effectLst/>
       </p:bgPr>
     </p:bg>
     <p:spTree>
@@ -21890,11 +21608,11 @@
           <a:bodyPr wrap="square" lIns="0" tIns="0" rIns="0" bIns="0" rtlCol="0" anchor="ctr"/>
           <a:lstStyle/>
           <a:p>
-            <a:pPr algn="l" indent="0" marL="0">
-              <a:buNone/>
-            </a:pPr>
-            <a:r>
-              <a:rPr lang="en-US" sz="1200" b="1" spc="200" kern="0" dirty="0">
+            <a:pPr marL="0" indent="0" algn="l">
+              <a:buNone/>
+            </a:pPr>
+            <a:r>
+              <a:rPr lang="en-US" sz="1200" b="1" kern="0" spc="200" dirty="0">
                 <a:solidFill>
                   <a:srgbClr val="6C4BC1"/>
                 </a:solidFill>
@@ -21929,7 +21647,7 @@
           <a:bodyPr wrap="square" lIns="0" tIns="0" rIns="0" bIns="0" rtlCol="0" anchor="ctr"/>
           <a:lstStyle/>
           <a:p>
-            <a:pPr indent="0" marL="0">
+            <a:pPr marL="0" indent="0">
               <a:buNone/>
             </a:pPr>
             <a:r>
@@ -21968,7 +21686,7 @@
           <a:bodyPr wrap="square" lIns="0" tIns="0" rIns="0" bIns="0" rtlCol="0" anchor="ctr"/>
           <a:lstStyle/>
           <a:p>
-            <a:pPr indent="0" marL="0">
+            <a:pPr marL="0" indent="0">
               <a:buNone/>
             </a:pPr>
             <a:r>
@@ -22124,7 +21842,7 @@
           <a:bodyPr wrap="square" lIns="0" tIns="0" rIns="0" bIns="0" rtlCol="0" anchor="ctr"/>
           <a:lstStyle/>
           <a:p>
-            <a:pPr algn="ctr" indent="0" marL="0">
+            <a:pPr marL="0" indent="0" algn="ctr">
               <a:buNone/>
             </a:pPr>
             <a:r>
@@ -22188,7 +21906,7 @@
           <a:bodyPr wrap="square" lIns="0" tIns="0" rIns="0" bIns="0" rtlCol="0" anchor="ctr"/>
           <a:lstStyle/>
           <a:p>
-            <a:pPr algn="ctr" indent="0" marL="0">
+            <a:pPr marL="0" indent="0" algn="ctr">
               <a:buNone/>
             </a:pPr>
             <a:r>
@@ -22252,7 +21970,7 @@
           <a:bodyPr wrap="square" lIns="0" tIns="0" rIns="0" bIns="0" rtlCol="0" anchor="ctr"/>
           <a:lstStyle/>
           <a:p>
-            <a:pPr algn="ctr" indent="0" marL="0">
+            <a:pPr marL="0" indent="0" algn="ctr">
               <a:buNone/>
             </a:pPr>
             <a:r>
@@ -22316,7 +22034,7 @@
           <a:bodyPr wrap="square" lIns="0" tIns="0" rIns="0" bIns="0" rtlCol="0" anchor="ctr"/>
           <a:lstStyle/>
           <a:p>
-            <a:pPr algn="ctr" indent="0" marL="0">
+            <a:pPr marL="0" indent="0" algn="ctr">
               <a:buNone/>
             </a:pPr>
             <a:r>
@@ -22377,7 +22095,7 @@
           <a:bodyPr wrap="square" lIns="0" tIns="0" rIns="0" bIns="0" rtlCol="0" anchor="ctr"/>
           <a:lstStyle/>
           <a:p>
-            <a:pPr indent="0" marL="0">
+            <a:pPr marL="0" indent="0">
               <a:buNone/>
             </a:pPr>
             <a:r>
@@ -22416,7 +22134,7 @@
           <a:bodyPr wrap="square" lIns="0" tIns="0" rIns="0" bIns="0" rtlCol="0" anchor="ctr"/>
           <a:lstStyle/>
           <a:p>
-            <a:pPr indent="0" marL="0">
+            <a:pPr marL="0" indent="0">
               <a:lnSpc>
                 <a:spcPts val="1600"/>
               </a:lnSpc>
@@ -22436,7 +22154,7 @@
             <a:endParaRPr lang="en-US" sz="1250" dirty="0"/>
           </a:p>
           <a:p>
-            <a:pPr indent="0" marL="0">
+            <a:pPr marL="0" indent="0">
               <a:lnSpc>
                 <a:spcPts val="1600"/>
               </a:lnSpc>
@@ -22478,7 +22196,7 @@
           <a:bodyPr wrap="square" lIns="0" tIns="0" rIns="0" bIns="0" rtlCol="0" anchor="ctr"/>
           <a:lstStyle/>
           <a:p>
-            <a:pPr algn="ctr" indent="0" marL="0">
+            <a:pPr marL="0" indent="0" algn="ctr">
               <a:buNone/>
             </a:pPr>
             <a:r>
@@ -22517,7 +22235,7 @@
           <a:bodyPr wrap="square" lIns="0" tIns="0" rIns="0" bIns="0" rtlCol="0" anchor="ctr"/>
           <a:lstStyle/>
           <a:p>
-            <a:pPr algn="r" indent="0" marL="0">
+            <a:pPr marL="0" indent="0" algn="r">
               <a:buNone/>
             </a:pPr>
             <a:r>
@@ -22551,6 +22269,7 @@
         <a:solidFill>
           <a:srgbClr val="FFFFFF"/>
         </a:solidFill>
+        <a:effectLst/>
       </p:bgPr>
     </p:bg>
     <p:spTree>
@@ -22588,11 +22307,11 @@
           <a:bodyPr wrap="square" lIns="0" tIns="0" rIns="0" bIns="0" rtlCol="0" anchor="ctr"/>
           <a:lstStyle/>
           <a:p>
-            <a:pPr algn="l" indent="0" marL="0">
-              <a:buNone/>
-            </a:pPr>
-            <a:r>
-              <a:rPr lang="en-US" sz="1200" b="1" spc="200" kern="0" dirty="0">
+            <a:pPr marL="0" indent="0" algn="l">
+              <a:buNone/>
+            </a:pPr>
+            <a:r>
+              <a:rPr lang="en-US" sz="1200" b="1" kern="0" spc="200" dirty="0">
                 <a:solidFill>
                   <a:srgbClr val="6C4BC1"/>
                 </a:solidFill>
@@ -22627,7 +22346,7 @@
           <a:bodyPr wrap="square" lIns="0" tIns="0" rIns="0" bIns="0" rtlCol="0" anchor="ctr"/>
           <a:lstStyle/>
           <a:p>
-            <a:pPr indent="0" marL="0">
+            <a:pPr marL="0" indent="0">
               <a:buNone/>
             </a:pPr>
             <a:r>
@@ -22689,379 +22408,7 @@
       </p:sp>
       <p:pic>
         <p:nvPicPr>
-          <p:cNvPr id="6" name="Image 0" descr="preencoded.png">    </p:cNvPr>
-          <p:cNvPicPr>
-            <a:picLocks noChangeAspect="1"/>
-          </p:cNvPicPr>
-          <p:nvPr/>
-        </p:nvPicPr>
-        <p:blipFill>
-          <a:blip r:embed="rId1"/>
-          <a:stretch>
-            <a:fillRect/>
-          </a:stretch>
-        </p:blipFill>
-        <p:spPr>
-          <a:xfrm>
-            <a:off x="2135124" y="2432304"/>
-            <a:ext cx="438912" cy="438912"/>
-          </a:xfrm>
-          <a:prstGeom prst="rect">
-            <a:avLst/>
-          </a:prstGeom>
-        </p:spPr>
-      </p:pic>
-      <p:sp>
-        <p:nvSpPr>
-          <p:cNvPr id="7" name="Text 4"/>
-          <p:cNvSpPr/>
-          <p:nvPr/>
-        </p:nvSpPr>
-        <p:spPr>
-          <a:xfrm>
-            <a:off x="822960" y="3246120"/>
-            <a:ext cx="3063240" cy="411480"/>
-          </a:xfrm>
-          <a:prstGeom prst="rect">
-            <a:avLst/>
-          </a:prstGeom>
-          <a:noFill/>
-          <a:ln/>
-        </p:spPr>
-        <p:txBody>
-          <a:bodyPr wrap="square" lIns="0" tIns="0" rIns="0" bIns="0" rtlCol="0" anchor="ctr"/>
-          <a:lstStyle/>
-          <a:p>
-            <a:pPr algn="ctr" indent="0" marL="0">
-              <a:buNone/>
-            </a:pPr>
-            <a:r>
-              <a:rPr lang="en-US" sz="1700" b="1" dirty="0">
-                <a:solidFill>
-                  <a:srgbClr val="1B1B2F"/>
-                </a:solidFill>
-                <a:latin typeface="Calibri" pitchFamily="34" charset="0"/>
-                <a:ea typeface="Calibri" pitchFamily="34" charset="-122"/>
-                <a:cs typeface="Calibri" pitchFamily="34" charset="-120"/>
-              </a:rPr>
-              <a:t>Não dirigido</a:t>
-            </a:r>
-            <a:endParaRPr lang="en-US" sz="1700" dirty="0"/>
-          </a:p>
-        </p:txBody>
-      </p:sp>
-      <p:sp>
-        <p:nvSpPr>
-          <p:cNvPr id="8" name="Text 5"/>
-          <p:cNvSpPr/>
-          <p:nvPr/>
-        </p:nvSpPr>
-        <p:spPr>
-          <a:xfrm>
-            <a:off x="914400" y="3749040"/>
-            <a:ext cx="2880360" cy="822960"/>
-          </a:xfrm>
-          <a:prstGeom prst="rect">
-            <a:avLst/>
-          </a:prstGeom>
-          <a:noFill/>
-          <a:ln/>
-        </p:spPr>
-        <p:txBody>
-          <a:bodyPr wrap="square" lIns="0" tIns="0" rIns="0" bIns="0" rtlCol="0" anchor="ctr"/>
-          <a:lstStyle/>
-          <a:p>
-            <a:pPr algn="ctr" indent="0" marL="0">
-              <a:lnSpc>
-                <a:spcPts val="1700"/>
-              </a:lnSpc>
-              <a:buNone/>
-            </a:pPr>
-            <a:r>
-              <a:rPr lang="en-US" sz="1250" dirty="0">
-                <a:solidFill>
-                  <a:srgbClr val="1B1B2F"/>
-                </a:solidFill>
-                <a:latin typeface="Calibri" pitchFamily="34" charset="0"/>
-                <a:ea typeface="Calibri" pitchFamily="34" charset="-122"/>
-                <a:cs typeface="Calibri" pitchFamily="34" charset="-120"/>
-              </a:rPr>
-              <a:t>Arestas sem direção: se A–B, então B–A.</a:t>
-            </a:r>
-            <a:endParaRPr lang="en-US" sz="1250" dirty="0"/>
-          </a:p>
-        </p:txBody>
-      </p:sp>
-      <p:sp>
-        <p:nvSpPr>
-          <p:cNvPr id="9" name="Text 6"/>
-          <p:cNvSpPr/>
-          <p:nvPr/>
-        </p:nvSpPr>
-        <p:spPr>
-          <a:xfrm>
-            <a:off x="914400" y="4663440"/>
-            <a:ext cx="2880360" cy="457200"/>
-          </a:xfrm>
-          <a:prstGeom prst="rect">
-            <a:avLst/>
-          </a:prstGeom>
-          <a:noFill/>
-          <a:ln/>
-        </p:spPr>
-        <p:txBody>
-          <a:bodyPr wrap="square" lIns="0" tIns="0" rIns="0" bIns="0" rtlCol="0" anchor="ctr"/>
-          <a:lstStyle/>
-          <a:p>
-            <a:pPr algn="ctr" indent="0" marL="0">
-              <a:buNone/>
-            </a:pPr>
-            <a:r>
-              <a:rPr lang="en-US" sz="1200" i="1" dirty="0">
-                <a:solidFill>
-                  <a:srgbClr val="6C4BC1"/>
-                </a:solidFill>
-                <a:latin typeface="Calibri" pitchFamily="34" charset="0"/>
-                <a:ea typeface="Calibri" pitchFamily="34" charset="-122"/>
-                <a:cs typeface="Calibri" pitchFamily="34" charset="-120"/>
-              </a:rPr>
-              <a:t>ex.: amizades</a:t>
-            </a:r>
-            <a:endParaRPr lang="en-US" sz="1200" dirty="0"/>
-          </a:p>
-        </p:txBody>
-      </p:sp>
-      <p:sp>
-        <p:nvSpPr>
-          <p:cNvPr id="10" name="Shape 7"/>
-          <p:cNvSpPr/>
-          <p:nvPr/>
-        </p:nvSpPr>
-        <p:spPr>
-          <a:xfrm>
-            <a:off x="4361688" y="1965960"/>
-            <a:ext cx="3429000" cy="3291840"/>
-          </a:xfrm>
-          <a:prstGeom prst="roundRect">
-            <a:avLst>
-              <a:gd name="adj" fmla="val 3889"/>
-            </a:avLst>
-          </a:prstGeom>
-          <a:solidFill>
-            <a:srgbClr val="F3F1FB"/>
-          </a:solidFill>
-          <a:ln/>
-        </p:spPr>
-      </p:sp>
-      <p:sp>
-        <p:nvSpPr>
-          <p:cNvPr id="11" name="Shape 8"/>
-          <p:cNvSpPr/>
-          <p:nvPr/>
-        </p:nvSpPr>
-        <p:spPr>
-          <a:xfrm>
-            <a:off x="5710428" y="2286000"/>
-            <a:ext cx="731520" cy="731520"/>
-          </a:xfrm>
-          <a:prstGeom prst="ellipse">
-            <a:avLst/>
-          </a:prstGeom>
-          <a:solidFill>
-            <a:srgbClr val="6C4BC1"/>
-          </a:solidFill>
-          <a:ln/>
-        </p:spPr>
-      </p:sp>
-      <p:pic>
-        <p:nvPicPr>
-          <p:cNvPr id="12" name="Image 1" descr="preencoded.png">    </p:cNvPr>
-          <p:cNvPicPr>
-            <a:picLocks noChangeAspect="1"/>
-          </p:cNvPicPr>
-          <p:nvPr/>
-        </p:nvPicPr>
-        <p:blipFill>
-          <a:blip r:embed="rId2"/>
-          <a:stretch>
-            <a:fillRect/>
-          </a:stretch>
-        </p:blipFill>
-        <p:spPr>
-          <a:xfrm>
-            <a:off x="5856732" y="2432304"/>
-            <a:ext cx="438912" cy="438912"/>
-          </a:xfrm>
-          <a:prstGeom prst="rect">
-            <a:avLst/>
-          </a:prstGeom>
-        </p:spPr>
-      </p:pic>
-      <p:sp>
-        <p:nvSpPr>
-          <p:cNvPr id="13" name="Text 9"/>
-          <p:cNvSpPr/>
-          <p:nvPr/>
-        </p:nvSpPr>
-        <p:spPr>
-          <a:xfrm>
-            <a:off x="4544568" y="3246120"/>
-            <a:ext cx="3063240" cy="411480"/>
-          </a:xfrm>
-          <a:prstGeom prst="rect">
-            <a:avLst/>
-          </a:prstGeom>
-          <a:noFill/>
-          <a:ln/>
-        </p:spPr>
-        <p:txBody>
-          <a:bodyPr wrap="square" lIns="0" tIns="0" rIns="0" bIns="0" rtlCol="0" anchor="ctr"/>
-          <a:lstStyle/>
-          <a:p>
-            <a:pPr algn="ctr" indent="0" marL="0">
-              <a:buNone/>
-            </a:pPr>
-            <a:r>
-              <a:rPr lang="en-US" sz="1700" b="1" dirty="0">
-                <a:solidFill>
-                  <a:srgbClr val="1B1B2F"/>
-                </a:solidFill>
-                <a:latin typeface="Calibri" pitchFamily="34" charset="0"/>
-                <a:ea typeface="Calibri" pitchFamily="34" charset="-122"/>
-                <a:cs typeface="Calibri" pitchFamily="34" charset="-120"/>
-              </a:rPr>
-              <a:t>Dirigido (dígrafo)</a:t>
-            </a:r>
-            <a:endParaRPr lang="en-US" sz="1700" dirty="0"/>
-          </a:p>
-        </p:txBody>
-      </p:sp>
-      <p:sp>
-        <p:nvSpPr>
-          <p:cNvPr id="14" name="Text 10"/>
-          <p:cNvSpPr/>
-          <p:nvPr/>
-        </p:nvSpPr>
-        <p:spPr>
-          <a:xfrm>
-            <a:off x="4636008" y="3749040"/>
-            <a:ext cx="2880360" cy="822960"/>
-          </a:xfrm>
-          <a:prstGeom prst="rect">
-            <a:avLst/>
-          </a:prstGeom>
-          <a:noFill/>
-          <a:ln/>
-        </p:spPr>
-        <p:txBody>
-          <a:bodyPr wrap="square" lIns="0" tIns="0" rIns="0" bIns="0" rtlCol="0" anchor="ctr"/>
-          <a:lstStyle/>
-          <a:p>
-            <a:pPr algn="ctr" indent="0" marL="0">
-              <a:lnSpc>
-                <a:spcPts val="1700"/>
-              </a:lnSpc>
-              <a:buNone/>
-            </a:pPr>
-            <a:r>
-              <a:rPr lang="en-US" sz="1250" dirty="0">
-                <a:solidFill>
-                  <a:srgbClr val="1B1B2F"/>
-                </a:solidFill>
-                <a:latin typeface="Calibri" pitchFamily="34" charset="0"/>
-                <a:ea typeface="Calibri" pitchFamily="34" charset="-122"/>
-                <a:cs typeface="Calibri" pitchFamily="34" charset="-120"/>
-              </a:rPr>
-              <a:t>Arestas com seta: A → B não implica B → A.</a:t>
-            </a:r>
-            <a:endParaRPr lang="en-US" sz="1250" dirty="0"/>
-          </a:p>
-        </p:txBody>
-      </p:sp>
-      <p:sp>
-        <p:nvSpPr>
-          <p:cNvPr id="15" name="Text 11"/>
-          <p:cNvSpPr/>
-          <p:nvPr/>
-        </p:nvSpPr>
-        <p:spPr>
-          <a:xfrm>
-            <a:off x="4636008" y="4663440"/>
-            <a:ext cx="2880360" cy="457200"/>
-          </a:xfrm>
-          <a:prstGeom prst="rect">
-            <a:avLst/>
-          </a:prstGeom>
-          <a:noFill/>
-          <a:ln/>
-        </p:spPr>
-        <p:txBody>
-          <a:bodyPr wrap="square" lIns="0" tIns="0" rIns="0" bIns="0" rtlCol="0" anchor="ctr"/>
-          <a:lstStyle/>
-          <a:p>
-            <a:pPr algn="ctr" indent="0" marL="0">
-              <a:buNone/>
-            </a:pPr>
-            <a:r>
-              <a:rPr lang="en-US" sz="1200" i="1" dirty="0">
-                <a:solidFill>
-                  <a:srgbClr val="6C4BC1"/>
-                </a:solidFill>
-                <a:latin typeface="Calibri" pitchFamily="34" charset="0"/>
-                <a:ea typeface="Calibri" pitchFamily="34" charset="-122"/>
-                <a:cs typeface="Calibri" pitchFamily="34" charset="-120"/>
-              </a:rPr>
-              <a:t>ex.: seguidores, links</a:t>
-            </a:r>
-            <a:endParaRPr lang="en-US" sz="1200" dirty="0"/>
-          </a:p>
-        </p:txBody>
-      </p:sp>
-      <p:sp>
-        <p:nvSpPr>
-          <p:cNvPr id="16" name="Shape 12"/>
-          <p:cNvSpPr/>
-          <p:nvPr/>
-        </p:nvSpPr>
-        <p:spPr>
-          <a:xfrm>
-            <a:off x="8083296" y="1965960"/>
-            <a:ext cx="3429000" cy="3291840"/>
-          </a:xfrm>
-          <a:prstGeom prst="roundRect">
-            <a:avLst>
-              <a:gd name="adj" fmla="val 3889"/>
-            </a:avLst>
-          </a:prstGeom>
-          <a:solidFill>
-            <a:srgbClr val="F3F1FB"/>
-          </a:solidFill>
-          <a:ln/>
-        </p:spPr>
-      </p:sp>
-      <p:sp>
-        <p:nvSpPr>
-          <p:cNvPr id="17" name="Shape 13"/>
-          <p:cNvSpPr/>
-          <p:nvPr/>
-        </p:nvSpPr>
-        <p:spPr>
-          <a:xfrm>
-            <a:off x="9432036" y="2286000"/>
-            <a:ext cx="731520" cy="731520"/>
-          </a:xfrm>
-          <a:prstGeom prst="ellipse">
-            <a:avLst/>
-          </a:prstGeom>
-          <a:solidFill>
-            <a:srgbClr val="6C4BC1"/>
-          </a:solidFill>
-          <a:ln/>
-        </p:spPr>
-      </p:sp>
-      <p:pic>
-        <p:nvPicPr>
-          <p:cNvPr id="18" name="Image 2" descr="preencoded.png">    </p:cNvPr>
+          <p:cNvPr id="6" name="Image 0" descr="preencoded.png"/>
           <p:cNvPicPr>
             <a:picLocks noChangeAspect="1"/>
           </p:cNvPicPr>
@@ -23075,7 +22422,7 @@
         </p:blipFill>
         <p:spPr>
           <a:xfrm>
-            <a:off x="9578340" y="2432304"/>
+            <a:off x="2135124" y="2432304"/>
             <a:ext cx="438912" cy="438912"/>
           </a:xfrm>
           <a:prstGeom prst="rect">
@@ -23085,13 +22432,13 @@
       </p:pic>
       <p:sp>
         <p:nvSpPr>
-          <p:cNvPr id="19" name="Text 14"/>
-          <p:cNvSpPr/>
-          <p:nvPr/>
-        </p:nvSpPr>
-        <p:spPr>
-          <a:xfrm>
-            <a:off x="8266176" y="3246120"/>
+          <p:cNvPr id="7" name="Text 4"/>
+          <p:cNvSpPr/>
+          <p:nvPr/>
+        </p:nvSpPr>
+        <p:spPr>
+          <a:xfrm>
+            <a:off x="822960" y="3246120"/>
             <a:ext cx="3063240" cy="411480"/>
           </a:xfrm>
           <a:prstGeom prst="rect">
@@ -23104,7 +22451,7 @@
           <a:bodyPr wrap="square" lIns="0" tIns="0" rIns="0" bIns="0" rtlCol="0" anchor="ctr"/>
           <a:lstStyle/>
           <a:p>
-            <a:pPr algn="ctr" indent="0" marL="0">
+            <a:pPr marL="0" indent="0" algn="ctr">
               <a:buNone/>
             </a:pPr>
             <a:r>
@@ -23116,7 +22463,7 @@
                 <a:ea typeface="Calibri" pitchFamily="34" charset="-122"/>
                 <a:cs typeface="Calibri" pitchFamily="34" charset="-120"/>
               </a:rPr>
-              <a:t>Ponderado</a:t>
+              <a:t>Não dirigido</a:t>
             </a:r>
             <a:endParaRPr lang="en-US" sz="1700" dirty="0"/>
           </a:p>
@@ -23124,13 +22471,13 @@
       </p:sp>
       <p:sp>
         <p:nvSpPr>
-          <p:cNvPr id="20" name="Text 15"/>
-          <p:cNvSpPr/>
-          <p:nvPr/>
-        </p:nvSpPr>
-        <p:spPr>
-          <a:xfrm>
-            <a:off x="8357616" y="3749040"/>
+          <p:cNvPr id="8" name="Text 5"/>
+          <p:cNvSpPr/>
+          <p:nvPr/>
+        </p:nvSpPr>
+        <p:spPr>
+          <a:xfrm>
+            <a:off x="914400" y="3749040"/>
             <a:ext cx="2880360" cy="822960"/>
           </a:xfrm>
           <a:prstGeom prst="rect">
@@ -23143,7 +22490,7 @@
           <a:bodyPr wrap="square" lIns="0" tIns="0" rIns="0" bIns="0" rtlCol="0" anchor="ctr"/>
           <a:lstStyle/>
           <a:p>
-            <a:pPr algn="ctr" indent="0" marL="0">
+            <a:pPr marL="0" indent="0" algn="ctr">
               <a:lnSpc>
                 <a:spcPts val="1700"/>
               </a:lnSpc>
@@ -23158,7 +22505,7 @@
                 <a:ea typeface="Calibri" pitchFamily="34" charset="-122"/>
                 <a:cs typeface="Calibri" pitchFamily="34" charset="-120"/>
               </a:rPr>
-              <a:t>Arestas têm peso (custo/distância).</a:t>
+              <a:t>Arestas sem direção: se A–B, então B–A.</a:t>
             </a:r>
             <a:endParaRPr lang="en-US" sz="1250" dirty="0"/>
           </a:p>
@@ -23166,13 +22513,13 @@
       </p:sp>
       <p:sp>
         <p:nvSpPr>
-          <p:cNvPr id="21" name="Text 16"/>
-          <p:cNvSpPr/>
-          <p:nvPr/>
-        </p:nvSpPr>
-        <p:spPr>
-          <a:xfrm>
-            <a:off x="8357616" y="4663440"/>
+          <p:cNvPr id="9" name="Text 6"/>
+          <p:cNvSpPr/>
+          <p:nvPr/>
+        </p:nvSpPr>
+        <p:spPr>
+          <a:xfrm>
+            <a:off x="914400" y="4663440"/>
             <a:ext cx="2880360" cy="457200"/>
           </a:xfrm>
           <a:prstGeom prst="rect">
@@ -23185,7 +22532,7 @@
           <a:bodyPr wrap="square" lIns="0" tIns="0" rIns="0" bIns="0" rtlCol="0" anchor="ctr"/>
           <a:lstStyle/>
           <a:p>
-            <a:pPr algn="ctr" indent="0" marL="0">
+            <a:pPr marL="0" indent="0" algn="ctr">
               <a:buNone/>
             </a:pPr>
             <a:r>
@@ -23197,6 +22544,378 @@
                 <a:ea typeface="Calibri" pitchFamily="34" charset="-122"/>
                 <a:cs typeface="Calibri" pitchFamily="34" charset="-120"/>
               </a:rPr>
+              <a:t>ex.: amizades</a:t>
+            </a:r>
+            <a:endParaRPr lang="en-US" sz="1200" dirty="0"/>
+          </a:p>
+        </p:txBody>
+      </p:sp>
+      <p:sp>
+        <p:nvSpPr>
+          <p:cNvPr id="10" name="Shape 7"/>
+          <p:cNvSpPr/>
+          <p:nvPr/>
+        </p:nvSpPr>
+        <p:spPr>
+          <a:xfrm>
+            <a:off x="4361688" y="1965960"/>
+            <a:ext cx="3429000" cy="3291840"/>
+          </a:xfrm>
+          <a:prstGeom prst="roundRect">
+            <a:avLst>
+              <a:gd name="adj" fmla="val 3889"/>
+            </a:avLst>
+          </a:prstGeom>
+          <a:solidFill>
+            <a:srgbClr val="F3F1FB"/>
+          </a:solidFill>
+          <a:ln/>
+        </p:spPr>
+      </p:sp>
+      <p:sp>
+        <p:nvSpPr>
+          <p:cNvPr id="11" name="Shape 8"/>
+          <p:cNvSpPr/>
+          <p:nvPr/>
+        </p:nvSpPr>
+        <p:spPr>
+          <a:xfrm>
+            <a:off x="5710428" y="2286000"/>
+            <a:ext cx="731520" cy="731520"/>
+          </a:xfrm>
+          <a:prstGeom prst="ellipse">
+            <a:avLst/>
+          </a:prstGeom>
+          <a:solidFill>
+            <a:srgbClr val="6C4BC1"/>
+          </a:solidFill>
+          <a:ln/>
+        </p:spPr>
+      </p:sp>
+      <p:pic>
+        <p:nvPicPr>
+          <p:cNvPr id="12" name="Image 1" descr="preencoded.png"/>
+          <p:cNvPicPr>
+            <a:picLocks noChangeAspect="1"/>
+          </p:cNvPicPr>
+          <p:nvPr/>
+        </p:nvPicPr>
+        <p:blipFill>
+          <a:blip r:embed="rId4"/>
+          <a:stretch>
+            <a:fillRect/>
+          </a:stretch>
+        </p:blipFill>
+        <p:spPr>
+          <a:xfrm>
+            <a:off x="5856732" y="2432304"/>
+            <a:ext cx="438912" cy="438912"/>
+          </a:xfrm>
+          <a:prstGeom prst="rect">
+            <a:avLst/>
+          </a:prstGeom>
+        </p:spPr>
+      </p:pic>
+      <p:sp>
+        <p:nvSpPr>
+          <p:cNvPr id="13" name="Text 9"/>
+          <p:cNvSpPr/>
+          <p:nvPr/>
+        </p:nvSpPr>
+        <p:spPr>
+          <a:xfrm>
+            <a:off x="4544568" y="3246120"/>
+            <a:ext cx="3063240" cy="411480"/>
+          </a:xfrm>
+          <a:prstGeom prst="rect">
+            <a:avLst/>
+          </a:prstGeom>
+          <a:noFill/>
+          <a:ln/>
+        </p:spPr>
+        <p:txBody>
+          <a:bodyPr wrap="square" lIns="0" tIns="0" rIns="0" bIns="0" rtlCol="0" anchor="ctr"/>
+          <a:lstStyle/>
+          <a:p>
+            <a:pPr marL="0" indent="0" algn="ctr">
+              <a:buNone/>
+            </a:pPr>
+            <a:r>
+              <a:rPr lang="en-US" sz="1700" b="1" dirty="0">
+                <a:solidFill>
+                  <a:srgbClr val="1B1B2F"/>
+                </a:solidFill>
+                <a:latin typeface="Calibri" pitchFamily="34" charset="0"/>
+                <a:ea typeface="Calibri" pitchFamily="34" charset="-122"/>
+                <a:cs typeface="Calibri" pitchFamily="34" charset="-120"/>
+              </a:rPr>
+              <a:t>Dirigido (dígrafo)</a:t>
+            </a:r>
+            <a:endParaRPr lang="en-US" sz="1700" dirty="0"/>
+          </a:p>
+        </p:txBody>
+      </p:sp>
+      <p:sp>
+        <p:nvSpPr>
+          <p:cNvPr id="14" name="Text 10"/>
+          <p:cNvSpPr/>
+          <p:nvPr/>
+        </p:nvSpPr>
+        <p:spPr>
+          <a:xfrm>
+            <a:off x="4636008" y="3749040"/>
+            <a:ext cx="2880360" cy="822960"/>
+          </a:xfrm>
+          <a:prstGeom prst="rect">
+            <a:avLst/>
+          </a:prstGeom>
+          <a:noFill/>
+          <a:ln/>
+        </p:spPr>
+        <p:txBody>
+          <a:bodyPr wrap="square" lIns="0" tIns="0" rIns="0" bIns="0" rtlCol="0" anchor="ctr"/>
+          <a:lstStyle/>
+          <a:p>
+            <a:pPr marL="0" indent="0" algn="ctr">
+              <a:lnSpc>
+                <a:spcPts val="1700"/>
+              </a:lnSpc>
+              <a:buNone/>
+            </a:pPr>
+            <a:r>
+              <a:rPr lang="en-US" sz="1250" dirty="0">
+                <a:solidFill>
+                  <a:srgbClr val="1B1B2F"/>
+                </a:solidFill>
+                <a:latin typeface="Calibri" pitchFamily="34" charset="0"/>
+                <a:ea typeface="Calibri" pitchFamily="34" charset="-122"/>
+                <a:cs typeface="Calibri" pitchFamily="34" charset="-120"/>
+              </a:rPr>
+              <a:t>Arestas com seta: A → B não implica B → A.</a:t>
+            </a:r>
+            <a:endParaRPr lang="en-US" sz="1250" dirty="0"/>
+          </a:p>
+        </p:txBody>
+      </p:sp>
+      <p:sp>
+        <p:nvSpPr>
+          <p:cNvPr id="15" name="Text 11"/>
+          <p:cNvSpPr/>
+          <p:nvPr/>
+        </p:nvSpPr>
+        <p:spPr>
+          <a:xfrm>
+            <a:off x="4636008" y="4663440"/>
+            <a:ext cx="2880360" cy="457200"/>
+          </a:xfrm>
+          <a:prstGeom prst="rect">
+            <a:avLst/>
+          </a:prstGeom>
+          <a:noFill/>
+          <a:ln/>
+        </p:spPr>
+        <p:txBody>
+          <a:bodyPr wrap="square" lIns="0" tIns="0" rIns="0" bIns="0" rtlCol="0" anchor="ctr"/>
+          <a:lstStyle/>
+          <a:p>
+            <a:pPr marL="0" indent="0" algn="ctr">
+              <a:buNone/>
+            </a:pPr>
+            <a:r>
+              <a:rPr lang="en-US" sz="1200" i="1" dirty="0">
+                <a:solidFill>
+                  <a:srgbClr val="6C4BC1"/>
+                </a:solidFill>
+                <a:latin typeface="Calibri" pitchFamily="34" charset="0"/>
+                <a:ea typeface="Calibri" pitchFamily="34" charset="-122"/>
+                <a:cs typeface="Calibri" pitchFamily="34" charset="-120"/>
+              </a:rPr>
+              <a:t>ex.: seguidores, links</a:t>
+            </a:r>
+            <a:endParaRPr lang="en-US" sz="1200" dirty="0"/>
+          </a:p>
+        </p:txBody>
+      </p:sp>
+      <p:sp>
+        <p:nvSpPr>
+          <p:cNvPr id="16" name="Shape 12"/>
+          <p:cNvSpPr/>
+          <p:nvPr/>
+        </p:nvSpPr>
+        <p:spPr>
+          <a:xfrm>
+            <a:off x="8083296" y="1965960"/>
+            <a:ext cx="3429000" cy="3291840"/>
+          </a:xfrm>
+          <a:prstGeom prst="roundRect">
+            <a:avLst>
+              <a:gd name="adj" fmla="val 3889"/>
+            </a:avLst>
+          </a:prstGeom>
+          <a:solidFill>
+            <a:srgbClr val="F3F1FB"/>
+          </a:solidFill>
+          <a:ln/>
+        </p:spPr>
+      </p:sp>
+      <p:sp>
+        <p:nvSpPr>
+          <p:cNvPr id="17" name="Shape 13"/>
+          <p:cNvSpPr/>
+          <p:nvPr/>
+        </p:nvSpPr>
+        <p:spPr>
+          <a:xfrm>
+            <a:off x="9432036" y="2286000"/>
+            <a:ext cx="731520" cy="731520"/>
+          </a:xfrm>
+          <a:prstGeom prst="ellipse">
+            <a:avLst/>
+          </a:prstGeom>
+          <a:solidFill>
+            <a:srgbClr val="6C4BC1"/>
+          </a:solidFill>
+          <a:ln/>
+        </p:spPr>
+      </p:sp>
+      <p:pic>
+        <p:nvPicPr>
+          <p:cNvPr id="18" name="Image 2" descr="preencoded.png"/>
+          <p:cNvPicPr>
+            <a:picLocks noChangeAspect="1"/>
+          </p:cNvPicPr>
+          <p:nvPr/>
+        </p:nvPicPr>
+        <p:blipFill>
+          <a:blip r:embed="rId5"/>
+          <a:stretch>
+            <a:fillRect/>
+          </a:stretch>
+        </p:blipFill>
+        <p:spPr>
+          <a:xfrm>
+            <a:off x="9578340" y="2432304"/>
+            <a:ext cx="438912" cy="438912"/>
+          </a:xfrm>
+          <a:prstGeom prst="rect">
+            <a:avLst/>
+          </a:prstGeom>
+        </p:spPr>
+      </p:pic>
+      <p:sp>
+        <p:nvSpPr>
+          <p:cNvPr id="19" name="Text 14"/>
+          <p:cNvSpPr/>
+          <p:nvPr/>
+        </p:nvSpPr>
+        <p:spPr>
+          <a:xfrm>
+            <a:off x="8266176" y="3246120"/>
+            <a:ext cx="3063240" cy="411480"/>
+          </a:xfrm>
+          <a:prstGeom prst="rect">
+            <a:avLst/>
+          </a:prstGeom>
+          <a:noFill/>
+          <a:ln/>
+        </p:spPr>
+        <p:txBody>
+          <a:bodyPr wrap="square" lIns="0" tIns="0" rIns="0" bIns="0" rtlCol="0" anchor="ctr"/>
+          <a:lstStyle/>
+          <a:p>
+            <a:pPr marL="0" indent="0" algn="ctr">
+              <a:buNone/>
+            </a:pPr>
+            <a:r>
+              <a:rPr lang="en-US" sz="1700" b="1" dirty="0">
+                <a:solidFill>
+                  <a:srgbClr val="1B1B2F"/>
+                </a:solidFill>
+                <a:latin typeface="Calibri" pitchFamily="34" charset="0"/>
+                <a:ea typeface="Calibri" pitchFamily="34" charset="-122"/>
+                <a:cs typeface="Calibri" pitchFamily="34" charset="-120"/>
+              </a:rPr>
+              <a:t>Ponderado</a:t>
+            </a:r>
+            <a:endParaRPr lang="en-US" sz="1700" dirty="0"/>
+          </a:p>
+        </p:txBody>
+      </p:sp>
+      <p:sp>
+        <p:nvSpPr>
+          <p:cNvPr id="20" name="Text 15"/>
+          <p:cNvSpPr/>
+          <p:nvPr/>
+        </p:nvSpPr>
+        <p:spPr>
+          <a:xfrm>
+            <a:off x="8357616" y="3749040"/>
+            <a:ext cx="2880360" cy="822960"/>
+          </a:xfrm>
+          <a:prstGeom prst="rect">
+            <a:avLst/>
+          </a:prstGeom>
+          <a:noFill/>
+          <a:ln/>
+        </p:spPr>
+        <p:txBody>
+          <a:bodyPr wrap="square" lIns="0" tIns="0" rIns="0" bIns="0" rtlCol="0" anchor="ctr"/>
+          <a:lstStyle/>
+          <a:p>
+            <a:pPr marL="0" indent="0" algn="ctr">
+              <a:lnSpc>
+                <a:spcPts val="1700"/>
+              </a:lnSpc>
+              <a:buNone/>
+            </a:pPr>
+            <a:r>
+              <a:rPr lang="en-US" sz="1250" dirty="0">
+                <a:solidFill>
+                  <a:srgbClr val="1B1B2F"/>
+                </a:solidFill>
+                <a:latin typeface="Calibri" pitchFamily="34" charset="0"/>
+                <a:ea typeface="Calibri" pitchFamily="34" charset="-122"/>
+                <a:cs typeface="Calibri" pitchFamily="34" charset="-120"/>
+              </a:rPr>
+              <a:t>Arestas têm peso (custo/distância).</a:t>
+            </a:r>
+            <a:endParaRPr lang="en-US" sz="1250" dirty="0"/>
+          </a:p>
+        </p:txBody>
+      </p:sp>
+      <p:sp>
+        <p:nvSpPr>
+          <p:cNvPr id="21" name="Text 16"/>
+          <p:cNvSpPr/>
+          <p:nvPr/>
+        </p:nvSpPr>
+        <p:spPr>
+          <a:xfrm>
+            <a:off x="8357616" y="4663440"/>
+            <a:ext cx="2880360" cy="457200"/>
+          </a:xfrm>
+          <a:prstGeom prst="rect">
+            <a:avLst/>
+          </a:prstGeom>
+          <a:noFill/>
+          <a:ln/>
+        </p:spPr>
+        <p:txBody>
+          <a:bodyPr wrap="square" lIns="0" tIns="0" rIns="0" bIns="0" rtlCol="0" anchor="ctr"/>
+          <a:lstStyle/>
+          <a:p>
+            <a:pPr marL="0" indent="0" algn="ctr">
+              <a:buNone/>
+            </a:pPr>
+            <a:r>
+              <a:rPr lang="en-US" sz="1200" i="1" dirty="0">
+                <a:solidFill>
+                  <a:srgbClr val="6C4BC1"/>
+                </a:solidFill>
+                <a:latin typeface="Calibri" pitchFamily="34" charset="0"/>
+                <a:ea typeface="Calibri" pitchFamily="34" charset="-122"/>
+                <a:cs typeface="Calibri" pitchFamily="34" charset="-120"/>
+              </a:rPr>
               <a:t>ex.: mapas rodoviários</a:t>
             </a:r>
             <a:endParaRPr lang="en-US" sz="1200" dirty="0"/>
@@ -23224,7 +22943,7 @@
           <a:bodyPr wrap="square" lIns="0" tIns="0" rIns="0" bIns="0" rtlCol="0" anchor="ctr"/>
           <a:lstStyle/>
           <a:p>
-            <a:pPr algn="r" indent="0" marL="0">
+            <a:pPr marL="0" indent="0" algn="r">
               <a:buNone/>
             </a:pPr>
             <a:r>
@@ -23258,6 +22977,7 @@
         <a:solidFill>
           <a:srgbClr val="FFFFFF"/>
         </a:solidFill>
+        <a:effectLst/>
       </p:bgPr>
     </p:bg>
     <p:spTree>
@@ -23295,11 +23015,11 @@
           <a:bodyPr wrap="square" lIns="0" tIns="0" rIns="0" bIns="0" rtlCol="0" anchor="ctr"/>
           <a:lstStyle/>
           <a:p>
-            <a:pPr algn="l" indent="0" marL="0">
-              <a:buNone/>
-            </a:pPr>
-            <a:r>
-              <a:rPr lang="en-US" sz="1200" b="1" spc="200" kern="0" dirty="0">
+            <a:pPr marL="0" indent="0" algn="l">
+              <a:buNone/>
+            </a:pPr>
+            <a:r>
+              <a:rPr lang="en-US" sz="1200" b="1" kern="0" spc="200" dirty="0">
                 <a:solidFill>
                   <a:srgbClr val="6C4BC1"/>
                 </a:solidFill>
@@ -23335,14 +23055,14 @@
       </p:sp>
       <p:pic>
         <p:nvPicPr>
-          <p:cNvPr id="4" name="Image 0" descr="preencoded.png">    </p:cNvPr>
+          <p:cNvPr id="4" name="Image 0" descr="preencoded.png"/>
           <p:cNvPicPr>
             <a:picLocks noChangeAspect="1"/>
           </p:cNvPicPr>
           <p:nvPr/>
         </p:nvPicPr>
         <p:blipFill>
-          <a:blip r:embed="rId1"/>
+          <a:blip r:embed="rId3"/>
           <a:stretch>
             <a:fillRect/>
           </a:stretch>
@@ -23378,7 +23098,7 @@
           <a:bodyPr wrap="square" lIns="0" tIns="0" rIns="0" bIns="0" rtlCol="0" anchor="ctr"/>
           <a:lstStyle/>
           <a:p>
-            <a:pPr indent="0" marL="0">
+            <a:pPr marL="0" indent="0">
               <a:buNone/>
             </a:pPr>
             <a:r>
@@ -23417,7 +23137,7 @@
           <a:bodyPr wrap="square" lIns="0" tIns="0" rIns="0" bIns="0" rtlCol="0" anchor="ctr"/>
           <a:lstStyle/>
           <a:p>
-            <a:pPr indent="0" marL="0">
+            <a:pPr marL="0" indent="0">
               <a:buNone/>
             </a:pPr>
             <a:r>
@@ -23573,7 +23293,7 @@
           <a:bodyPr wrap="square" lIns="0" tIns="0" rIns="0" bIns="0" rtlCol="0" anchor="ctr"/>
           <a:lstStyle/>
           <a:p>
-            <a:pPr algn="ctr" indent="0" marL="0">
+            <a:pPr marL="0" indent="0" algn="ctr">
               <a:buNone/>
             </a:pPr>
             <a:r>
@@ -23637,7 +23357,7 @@
           <a:bodyPr wrap="square" lIns="0" tIns="0" rIns="0" bIns="0" rtlCol="0" anchor="ctr"/>
           <a:lstStyle/>
           <a:p>
-            <a:pPr algn="ctr" indent="0" marL="0">
+            <a:pPr marL="0" indent="0" algn="ctr">
               <a:buNone/>
             </a:pPr>
             <a:r>
@@ -23701,7 +23421,7 @@
           <a:bodyPr wrap="square" lIns="0" tIns="0" rIns="0" bIns="0" rtlCol="0" anchor="ctr"/>
           <a:lstStyle/>
           <a:p>
-            <a:pPr algn="ctr" indent="0" marL="0">
+            <a:pPr marL="0" indent="0" algn="ctr">
               <a:buNone/>
             </a:pPr>
             <a:r>
@@ -23765,7 +23485,7 @@
           <a:bodyPr wrap="square" lIns="0" tIns="0" rIns="0" bIns="0" rtlCol="0" anchor="ctr"/>
           <a:lstStyle/>
           <a:p>
-            <a:pPr algn="ctr" indent="0" marL="0">
+            <a:pPr marL="0" indent="0" algn="ctr">
               <a:buNone/>
             </a:pPr>
             <a:r>
@@ -23804,7 +23524,7 @@
           <a:bodyPr wrap="square" lIns="0" tIns="0" rIns="0" bIns="0" rtlCol="0" anchor="ctr"/>
           <a:lstStyle/>
           <a:p>
-            <a:pPr algn="ctr" indent="0" marL="0">
+            <a:pPr marL="0" indent="0" algn="ctr">
               <a:buNone/>
             </a:pPr>
             <a:r>
@@ -23843,7 +23563,7 @@
           <a:bodyPr wrap="square" lIns="0" tIns="0" rIns="0" bIns="0" rtlCol="0" anchor="ctr"/>
           <a:lstStyle/>
           <a:p>
-            <a:pPr algn="ctr" indent="0" marL="0">
+            <a:pPr marL="0" indent="0" algn="ctr">
               <a:buNone/>
             </a:pPr>
             <a:r>
@@ -23882,7 +23602,7 @@
           <a:bodyPr wrap="square" lIns="0" tIns="0" rIns="0" bIns="0" rtlCol="0" anchor="ctr"/>
           <a:lstStyle/>
           <a:p>
-            <a:pPr algn="ctr" indent="0" marL="0">
+            <a:pPr marL="0" indent="0" algn="ctr">
               <a:buNone/>
             </a:pPr>
             <a:r>
@@ -23921,7 +23641,7 @@
           <a:bodyPr wrap="square" lIns="0" tIns="0" rIns="0" bIns="0" rtlCol="0" anchor="ctr"/>
           <a:lstStyle/>
           <a:p>
-            <a:pPr algn="ctr" indent="0" marL="0">
+            <a:pPr marL="0" indent="0" algn="ctr">
               <a:buNone/>
             </a:pPr>
             <a:r>
@@ -23982,7 +23702,7 @@
           <a:bodyPr wrap="square" lIns="0" tIns="0" rIns="0" bIns="0" rtlCol="0" anchor="ctr"/>
           <a:lstStyle/>
           <a:p>
-            <a:pPr algn="ctr" indent="0" marL="0">
+            <a:pPr marL="0" indent="0" algn="ctr">
               <a:buNone/>
             </a:pPr>
             <a:r>
@@ -24021,7 +23741,7 @@
           <a:bodyPr wrap="square" lIns="0" tIns="0" rIns="0" bIns="0" rtlCol="0" anchor="ctr"/>
           <a:lstStyle/>
           <a:p>
-            <a:pPr algn="r" indent="0" marL="0">
+            <a:pPr marL="0" indent="0" algn="r">
               <a:buNone/>
             </a:pPr>
             <a:r>
@@ -24055,6 +23775,7 @@
         <a:solidFill>
           <a:srgbClr val="FFFFFF"/>
         </a:solidFill>
+        <a:effectLst/>
       </p:bgPr>
     </p:bg>
     <p:spTree>
@@ -24092,11 +23813,11 @@
           <a:bodyPr wrap="square" lIns="0" tIns="0" rIns="0" bIns="0" rtlCol="0" anchor="ctr"/>
           <a:lstStyle/>
           <a:p>
-            <a:pPr algn="l" indent="0" marL="0">
-              <a:buNone/>
-            </a:pPr>
-            <a:r>
-              <a:rPr lang="en-US" sz="1200" b="1" spc="200" kern="0" dirty="0">
+            <a:pPr marL="0" indent="0" algn="l">
+              <a:buNone/>
+            </a:pPr>
+            <a:r>
+              <a:rPr lang="en-US" sz="1200" b="1" kern="0" spc="200" dirty="0">
                 <a:solidFill>
                   <a:srgbClr val="6C4BC1"/>
                 </a:solidFill>
@@ -24132,14 +23853,14 @@
       </p:sp>
       <p:pic>
         <p:nvPicPr>
-          <p:cNvPr id="4" name="Image 0" descr="preencoded.png">    </p:cNvPr>
+          <p:cNvPr id="4" name="Image 0" descr="preencoded.png"/>
           <p:cNvPicPr>
             <a:picLocks noChangeAspect="1"/>
           </p:cNvPicPr>
           <p:nvPr/>
         </p:nvPicPr>
         <p:blipFill>
-          <a:blip r:embed="rId1"/>
+          <a:blip r:embed="rId3"/>
           <a:stretch>
             <a:fillRect/>
           </a:stretch>
@@ -24175,7 +23896,7 @@
           <a:bodyPr wrap="square" lIns="0" tIns="0" rIns="0" bIns="0" rtlCol="0" anchor="ctr"/>
           <a:lstStyle/>
           <a:p>
-            <a:pPr indent="0" marL="0">
+            <a:pPr marL="0" indent="0">
               <a:buNone/>
             </a:pPr>
             <a:r>
@@ -24214,7 +23935,7 @@
           <a:bodyPr wrap="square" lIns="0" tIns="0" rIns="0" bIns="0" rtlCol="0" anchor="ctr"/>
           <a:lstStyle/>
           <a:p>
-            <a:pPr indent="0" marL="0">
+            <a:pPr marL="0" indent="0">
               <a:lnSpc>
                 <a:spcPts val="1800"/>
               </a:lnSpc>
@@ -24327,7 +24048,7 @@
           <a:bodyPr wrap="square" lIns="0" tIns="0" rIns="0" bIns="0" rtlCol="0" anchor="ctr"/>
           <a:lstStyle/>
           <a:p>
-            <a:pPr algn="ctr" indent="0" marL="0">
+            <a:pPr marL="0" indent="0" algn="ctr">
               <a:buNone/>
             </a:pPr>
             <a:r>
@@ -24391,7 +24112,7 @@
           <a:bodyPr wrap="square" lIns="0" tIns="0" rIns="0" bIns="0" rtlCol="0" anchor="ctr"/>
           <a:lstStyle/>
           <a:p>
-            <a:pPr algn="ctr" indent="0" marL="0">
+            <a:pPr marL="0" indent="0" algn="ctr">
               <a:buNone/>
             </a:pPr>
             <a:r>
@@ -24455,7 +24176,7 @@
           <a:bodyPr wrap="square" lIns="0" tIns="0" rIns="0" bIns="0" rtlCol="0" anchor="ctr"/>
           <a:lstStyle/>
           <a:p>
-            <a:pPr algn="ctr" indent="0" marL="0">
+            <a:pPr marL="0" indent="0" algn="ctr">
               <a:buNone/>
             </a:pPr>
             <a:r>
@@ -24494,7 +24215,7 @@
           <a:bodyPr wrap="square" lIns="0" tIns="0" rIns="0" bIns="0" rtlCol="0" anchor="ctr"/>
           <a:lstStyle/>
           <a:p>
-            <a:pPr algn="ctr" indent="0" marL="0">
+            <a:pPr marL="0" indent="0" algn="ctr">
               <a:buNone/>
             </a:pPr>
             <a:r>
@@ -24533,7 +24254,7 @@
           <a:bodyPr wrap="square" lIns="0" tIns="0" rIns="0" bIns="0" rtlCol="0" anchor="ctr"/>
           <a:lstStyle/>
           <a:p>
-            <a:pPr algn="ctr" indent="0" marL="0">
+            <a:pPr marL="0" indent="0" algn="ctr">
               <a:buNone/>
             </a:pPr>
             <a:r>
@@ -24572,7 +24293,7 @@
           <a:bodyPr wrap="square" lIns="0" tIns="0" rIns="0" bIns="0" rtlCol="0" anchor="ctr"/>
           <a:lstStyle/>
           <a:p>
-            <a:pPr algn="ctr" indent="0" marL="0">
+            <a:pPr marL="0" indent="0" algn="ctr">
               <a:buNone/>
             </a:pPr>
             <a:r>
@@ -24638,7 +24359,7 @@
           <a:bodyPr wrap="square" lIns="0" tIns="0" rIns="0" bIns="0" rtlCol="0" anchor="ctr"/>
           <a:lstStyle/>
           <a:p>
-            <a:pPr algn="ctr" indent="0" marL="0">
+            <a:pPr marL="0" indent="0" algn="ctr">
               <a:buNone/>
             </a:pPr>
             <a:r>
@@ -24704,7 +24425,7 @@
           <a:bodyPr wrap="square" lIns="0" tIns="0" rIns="0" bIns="0" rtlCol="0" anchor="ctr"/>
           <a:lstStyle/>
           <a:p>
-            <a:pPr algn="ctr" indent="0" marL="0">
+            <a:pPr marL="0" indent="0" algn="ctr">
               <a:buNone/>
             </a:pPr>
             <a:r>
@@ -24765,7 +24486,7 @@
           <a:bodyPr wrap="square" lIns="0" tIns="0" rIns="0" bIns="0" rtlCol="0" anchor="ctr"/>
           <a:lstStyle/>
           <a:p>
-            <a:pPr algn="ctr" indent="0" marL="0">
+            <a:pPr marL="0" indent="0" algn="ctr">
               <a:buNone/>
             </a:pPr>
             <a:r>
@@ -24804,7 +24525,7 @@
           <a:bodyPr wrap="square" lIns="0" tIns="0" rIns="0" bIns="0" rtlCol="0" anchor="ctr"/>
           <a:lstStyle/>
           <a:p>
-            <a:pPr algn="r" indent="0" marL="0">
+            <a:pPr marL="0" indent="0" algn="r">
               <a:buNone/>
             </a:pPr>
             <a:r>
@@ -24838,6 +24559,7 @@
         <a:solidFill>
           <a:srgbClr val="FFFFFF"/>
         </a:solidFill>
+        <a:effectLst/>
       </p:bgPr>
     </p:bg>
     <p:spTree>
@@ -24875,11 +24597,11 @@
           <a:bodyPr wrap="square" lIns="0" tIns="0" rIns="0" bIns="0" rtlCol="0" anchor="ctr"/>
           <a:lstStyle/>
           <a:p>
-            <a:pPr algn="l" indent="0" marL="0">
-              <a:buNone/>
-            </a:pPr>
-            <a:r>
-              <a:rPr lang="en-US" sz="1200" b="1" spc="200" kern="0" dirty="0">
+            <a:pPr marL="0" indent="0" algn="l">
+              <a:buNone/>
+            </a:pPr>
+            <a:r>
+              <a:rPr lang="en-US" sz="1200" b="1" kern="0" spc="200" dirty="0">
                 <a:solidFill>
                   <a:srgbClr val="6C4BC1"/>
                 </a:solidFill>
@@ -24915,14 +24637,14 @@
       </p:sp>
       <p:pic>
         <p:nvPicPr>
-          <p:cNvPr id="4" name="Image 0" descr="preencoded.png">    </p:cNvPr>
+          <p:cNvPr id="4" name="Image 0" descr="preencoded.png"/>
           <p:cNvPicPr>
             <a:picLocks noChangeAspect="1"/>
           </p:cNvPicPr>
           <p:nvPr/>
         </p:nvPicPr>
         <p:blipFill>
-          <a:blip r:embed="rId1"/>
+          <a:blip r:embed="rId3"/>
           <a:stretch>
             <a:fillRect/>
           </a:stretch>
@@ -24958,7 +24680,7 @@
           <a:bodyPr wrap="square" lIns="0" tIns="0" rIns="0" bIns="0" rtlCol="0" anchor="ctr"/>
           <a:lstStyle/>
           <a:p>
-            <a:pPr indent="0" marL="0">
+            <a:pPr marL="0" indent="0">
               <a:buNone/>
             </a:pPr>
             <a:r>
@@ -24997,7 +24719,7 @@
           <a:bodyPr wrap="square" lIns="0" tIns="0" rIns="0" bIns="0" rtlCol="0" anchor="ctr"/>
           <a:lstStyle/>
           <a:p>
-            <a:pPr indent="0" marL="0">
+            <a:pPr marL="0" indent="0">
               <a:buNone/>
             </a:pPr>
             <a:r>
@@ -25109,7 +24831,7 @@
           <a:bodyPr wrap="square" lIns="0" tIns="0" rIns="0" bIns="0" rtlCol="0" anchor="ctr"/>
           <a:lstStyle/>
           <a:p>
-            <a:pPr algn="ctr" indent="0" marL="0">
+            <a:pPr marL="0" indent="0" algn="ctr">
               <a:buNone/>
             </a:pPr>
             <a:r>
@@ -25173,7 +24895,7 @@
           <a:bodyPr wrap="square" lIns="0" tIns="0" rIns="0" bIns="0" rtlCol="0" anchor="ctr"/>
           <a:lstStyle/>
           <a:p>
-            <a:pPr algn="ctr" indent="0" marL="0">
+            <a:pPr marL="0" indent="0" algn="ctr">
               <a:buNone/>
             </a:pPr>
             <a:r>
@@ -25237,7 +24959,7 @@
           <a:bodyPr wrap="square" lIns="0" tIns="0" rIns="0" bIns="0" rtlCol="0" anchor="ctr"/>
           <a:lstStyle/>
           <a:p>
-            <a:pPr algn="ctr" indent="0" marL="0">
+            <a:pPr marL="0" indent="0" algn="ctr">
               <a:buNone/>
             </a:pPr>
             <a:r>
@@ -25298,7 +25020,7 @@
           <a:bodyPr wrap="square" lIns="0" tIns="0" rIns="0" bIns="0" rtlCol="0" anchor="ctr"/>
           <a:lstStyle/>
           <a:p>
-            <a:pPr algn="ctr" indent="0" marL="0">
+            <a:pPr marL="0" indent="0" algn="ctr">
               <a:buNone/>
             </a:pPr>
             <a:r>
@@ -25337,7 +25059,7 @@
           <a:bodyPr wrap="square" lIns="0" tIns="0" rIns="0" bIns="0" rtlCol="0" anchor="ctr"/>
           <a:lstStyle/>
           <a:p>
-            <a:pPr algn="ctr" indent="0" marL="0">
+            <a:pPr marL="0" indent="0" algn="ctr">
               <a:lnSpc>
                 <a:spcPts val="1800"/>
               </a:lnSpc>
@@ -25379,7 +25101,7 @@
           <a:bodyPr wrap="square" lIns="0" tIns="0" rIns="0" bIns="0" rtlCol="0" anchor="ctr"/>
           <a:lstStyle/>
           <a:p>
-            <a:pPr algn="r" indent="0" marL="0">
+            <a:pPr marL="0" indent="0" algn="r">
               <a:buNone/>
             </a:pPr>
             <a:r>
@@ -25413,6 +25135,7 @@
         <a:solidFill>
           <a:srgbClr val="FFFFFF"/>
         </a:solidFill>
+        <a:effectLst/>
       </p:bgPr>
     </p:bg>
     <p:spTree>
@@ -25450,11 +25173,11 @@
           <a:bodyPr wrap="square" lIns="0" tIns="0" rIns="0" bIns="0" rtlCol="0" anchor="ctr"/>
           <a:lstStyle/>
           <a:p>
-            <a:pPr algn="l" indent="0" marL="0">
-              <a:buNone/>
-            </a:pPr>
-            <a:r>
-              <a:rPr lang="en-US" sz="1200" b="1" spc="200" kern="0" dirty="0">
+            <a:pPr marL="0" indent="0" algn="l">
+              <a:buNone/>
+            </a:pPr>
+            <a:r>
+              <a:rPr lang="en-US" sz="1200" b="1" kern="0" spc="200" dirty="0">
                 <a:solidFill>
                   <a:srgbClr val="6C4BC1"/>
                 </a:solidFill>
@@ -25489,7 +25212,7 @@
           <a:bodyPr wrap="square" lIns="0" tIns="0" rIns="0" bIns="0" rtlCol="0" anchor="ctr"/>
           <a:lstStyle/>
           <a:p>
-            <a:pPr indent="0" marL="0">
+            <a:pPr marL="0" indent="0">
               <a:buNone/>
             </a:pPr>
             <a:r>
@@ -25550,7 +25273,7 @@
           <a:bodyPr wrap="square" lIns="0" tIns="0" rIns="0" bIns="0" rtlCol="0" anchor="ctr"/>
           <a:lstStyle/>
           <a:p>
-            <a:pPr indent="0" marL="0">
+            <a:pPr marL="0" indent="0">
               <a:buNone/>
             </a:pPr>
             <a:r>
@@ -25589,7 +25312,7 @@
           <a:bodyPr wrap="square" lIns="0" tIns="0" rIns="0" bIns="0" rtlCol="0" anchor="ctr"/>
           <a:lstStyle/>
           <a:p>
-            <a:pPr indent="0" marL="0">
+            <a:pPr marL="0" indent="0">
               <a:buNone/>
             </a:pPr>
             <a:r>
@@ -25650,7 +25373,7 @@
           <a:bodyPr wrap="square" lIns="0" tIns="0" rIns="0" bIns="0" rtlCol="0" anchor="ctr"/>
           <a:lstStyle/>
           <a:p>
-            <a:pPr indent="0" marL="0">
+            <a:pPr marL="0" indent="0">
               <a:buNone/>
             </a:pPr>
             <a:r>
@@ -25689,7 +25412,7 @@
           <a:bodyPr wrap="square" lIns="0" tIns="0" rIns="0" bIns="0" rtlCol="0" anchor="ctr"/>
           <a:lstStyle/>
           <a:p>
-            <a:pPr indent="0" marL="0">
+            <a:pPr marL="0" indent="0">
               <a:buNone/>
             </a:pPr>
             <a:r>
@@ -25750,7 +25473,7 @@
           <a:bodyPr wrap="square" lIns="0" tIns="0" rIns="0" bIns="0" rtlCol="0" anchor="ctr"/>
           <a:lstStyle/>
           <a:p>
-            <a:pPr indent="0" marL="0">
+            <a:pPr marL="0" indent="0">
               <a:buNone/>
             </a:pPr>
             <a:r>
@@ -25789,7 +25512,7 @@
           <a:bodyPr wrap="square" lIns="0" tIns="0" rIns="0" bIns="0" rtlCol="0" anchor="ctr"/>
           <a:lstStyle/>
           <a:p>
-            <a:pPr indent="0" marL="0">
+            <a:pPr marL="0" indent="0">
               <a:buNone/>
             </a:pPr>
             <a:r>
@@ -25850,7 +25573,7 @@
           <a:bodyPr wrap="square" lIns="0" tIns="0" rIns="0" bIns="0" rtlCol="0" anchor="ctr"/>
           <a:lstStyle/>
           <a:p>
-            <a:pPr indent="0" marL="0">
+            <a:pPr marL="0" indent="0">
               <a:buNone/>
             </a:pPr>
             <a:r>
@@ -25889,7 +25612,7 @@
           <a:bodyPr wrap="square" lIns="0" tIns="0" rIns="0" bIns="0" rtlCol="0" anchor="ctr"/>
           <a:lstStyle/>
           <a:p>
-            <a:pPr indent="0" marL="0">
+            <a:pPr marL="0" indent="0">
               <a:buNone/>
             </a:pPr>
             <a:r>
@@ -25928,7 +25651,7 @@
           <a:bodyPr wrap="square" lIns="0" tIns="0" rIns="0" bIns="0" rtlCol="0" anchor="ctr"/>
           <a:lstStyle/>
           <a:p>
-            <a:pPr algn="r" indent="0" marL="0">
+            <a:pPr marL="0" indent="0" algn="r">
               <a:buNone/>
             </a:pPr>
             <a:r>
@@ -26247,4 +25970,319 @@
     </a:ext>
   </a:extLst>
 </a:theme>
+</file>
+
+<file path=ppt/theme/theme2.xml><?xml version="1.0" encoding="utf-8"?>
+<a:theme xmlns:a="http://schemas.openxmlformats.org/drawingml/2006/main" name="Tema do Office">
+  <a:themeElements>
+    <a:clrScheme name="Office">
+      <a:dk1>
+        <a:sysClr val="windowText" lastClr="000000"/>
+      </a:dk1>
+      <a:lt1>
+        <a:sysClr val="window" lastClr="FFFFFF"/>
+      </a:lt1>
+      <a:dk2>
+        <a:srgbClr val="0E2841"/>
+      </a:dk2>
+      <a:lt2>
+        <a:srgbClr val="E8E8E8"/>
+      </a:lt2>
+      <a:accent1>
+        <a:srgbClr val="156082"/>
+      </a:accent1>
+      <a:accent2>
+        <a:srgbClr val="E97132"/>
+      </a:accent2>
+      <a:accent3>
+        <a:srgbClr val="196B24"/>
+      </a:accent3>
+      <a:accent4>
+        <a:srgbClr val="0F9ED5"/>
+      </a:accent4>
+      <a:accent5>
+        <a:srgbClr val="A02B93"/>
+      </a:accent5>
+      <a:accent6>
+        <a:srgbClr val="4EA72E"/>
+      </a:accent6>
+      <a:hlink>
+        <a:srgbClr val="467886"/>
+      </a:hlink>
+      <a:folHlink>
+        <a:srgbClr val="96607D"/>
+      </a:folHlink>
+    </a:clrScheme>
+    <a:fontScheme name="Office">
+      <a:majorFont>
+        <a:latin typeface="Aptos Display" panose="02110004020202020204"/>
+        <a:ea typeface=""/>
+        <a:cs typeface=""/>
+        <a:font script="Jpan" typeface="游ゴシック Light"/>
+        <a:font script="Hang" typeface="맑은 고딕"/>
+        <a:font script="Hans" typeface="等线 Light"/>
+        <a:font script="Hant" typeface="新細明體"/>
+        <a:font script="Arab" typeface="Times New Roman"/>
+        <a:font script="Hebr" typeface="Times New Roman"/>
+        <a:font script="Thai" typeface="Angsana New"/>
+        <a:font script="Ethi" typeface="Nyala"/>
+        <a:font script="Beng" typeface="Vrinda"/>
+        <a:font script="Gujr" typeface="Shruti"/>
+        <a:font script="Khmr" typeface="MoolBoran"/>
+        <a:font script="Knda" typeface="Tunga"/>
+        <a:font script="Guru" typeface="Raavi"/>
+        <a:font script="Cans" typeface="Euphemia"/>
+        <a:font script="Cher" typeface="Plantagenet Cherokee"/>
+        <a:font script="Yiii" typeface="Microsoft Yi Baiti"/>
+        <a:font script="Tibt" typeface="Microsoft Himalaya"/>
+        <a:font script="Thaa" typeface="MV Boli"/>
+        <a:font script="Deva" typeface="Mangal"/>
+        <a:font script="Telu" typeface="Gautami"/>
+        <a:font script="Taml" typeface="Latha"/>
+        <a:font script="Syrc" typeface="Estrangelo Edessa"/>
+        <a:font script="Orya" typeface="Kalinga"/>
+        <a:font script="Mlym" typeface="Kartika"/>
+        <a:font script="Laoo" typeface="DokChampa"/>
+        <a:font script="Sinh" typeface="Iskoola Pota"/>
+        <a:font script="Mong" typeface="Mongolian Baiti"/>
+        <a:font script="Viet" typeface="Times New Roman"/>
+        <a:font script="Uigh" typeface="Microsoft Uighur"/>
+        <a:font script="Geor" typeface="Sylfaen"/>
+        <a:font script="Armn" typeface="Arial"/>
+        <a:font script="Bugi" typeface="Leelawadee UI"/>
+        <a:font script="Bopo" typeface="Microsoft JhengHei"/>
+        <a:font script="Java" typeface="Javanese Text"/>
+        <a:font script="Lisu" typeface="Segoe UI"/>
+        <a:font script="Mymr" typeface="Myanmar Text"/>
+        <a:font script="Nkoo" typeface="Ebrima"/>
+        <a:font script="Olck" typeface="Nirmala UI"/>
+        <a:font script="Osma" typeface="Ebrima"/>
+        <a:font script="Phag" typeface="Phagspa"/>
+        <a:font script="Syrn" typeface="Estrangelo Edessa"/>
+        <a:font script="Syrj" typeface="Estrangelo Edessa"/>
+        <a:font script="Syre" typeface="Estrangelo Edessa"/>
+        <a:font script="Sora" typeface="Nirmala UI"/>
+        <a:font script="Tale" typeface="Microsoft Tai Le"/>
+        <a:font script="Talu" typeface="Microsoft New Tai Lue"/>
+        <a:font script="Tfng" typeface="Ebrima"/>
+      </a:majorFont>
+      <a:minorFont>
+        <a:latin typeface="Aptos" panose="02110004020202020204"/>
+        <a:ea typeface=""/>
+        <a:cs typeface=""/>
+        <a:font script="Jpan" typeface="游ゴシック"/>
+        <a:font script="Hang" typeface="맑은 고딕"/>
+        <a:font script="Hans" typeface="等线"/>
+        <a:font script="Hant" typeface="新細明體"/>
+        <a:font script="Arab" typeface="Arial"/>
+        <a:font script="Hebr" typeface="Arial"/>
+        <a:font script="Thai" typeface="Cordia New"/>
+        <a:font script="Ethi" typeface="Nyala"/>
+        <a:font script="Beng" typeface="Vrinda"/>
+        <a:font script="Gujr" typeface="Shruti"/>
+        <a:font script="Khmr" typeface="DaunPenh"/>
+        <a:font script="Knda" typeface="Tunga"/>
+        <a:font script="Guru" typeface="Raavi"/>
+        <a:font script="Cans" typeface="Euphemia"/>
+        <a:font script="Cher" typeface="Plantagenet Cherokee"/>
+        <a:font script="Yiii" typeface="Microsoft Yi Baiti"/>
+        <a:font script="Tibt" typeface="Microsoft Himalaya"/>
+        <a:font script="Thaa" typeface="MV Boli"/>
+        <a:font script="Deva" typeface="Mangal"/>
+        <a:font script="Telu" typeface="Gautami"/>
+        <a:font script="Taml" typeface="Latha"/>
+        <a:font script="Syrc" typeface="Estrangelo Edessa"/>
+        <a:font script="Orya" typeface="Kalinga"/>
+        <a:font script="Mlym" typeface="Kartika"/>
+        <a:font script="Laoo" typeface="DokChampa"/>
+        <a:font script="Sinh" typeface="Iskoola Pota"/>
+        <a:font script="Mong" typeface="Mongolian Baiti"/>
+        <a:font script="Viet" typeface="Arial"/>
+        <a:font script="Uigh" typeface="Microsoft Uighur"/>
+        <a:font script="Geor" typeface="Sylfaen"/>
+        <a:font script="Armn" typeface="Arial"/>
+        <a:font script="Bugi" typeface="Leelawadee UI"/>
+        <a:font script="Bopo" typeface="Microsoft JhengHei"/>
+        <a:font script="Java" typeface="Javanese Text"/>
+        <a:font script="Lisu" typeface="Segoe UI"/>
+        <a:font script="Mymr" typeface="Myanmar Text"/>
+        <a:font script="Nkoo" typeface="Ebrima"/>
+        <a:font script="Olck" typeface="Nirmala UI"/>
+        <a:font script="Osma" typeface="Ebrima"/>
+        <a:font script="Phag" typeface="Phagspa"/>
+        <a:font script="Syrn" typeface="Estrangelo Edessa"/>
+        <a:font script="Syrj" typeface="Estrangelo Edessa"/>
+        <a:font script="Syre" typeface="Estrangelo Edessa"/>
+        <a:font script="Sora" typeface="Nirmala UI"/>
+        <a:font script="Tale" typeface="Microsoft Tai Le"/>
+        <a:font script="Talu" typeface="Microsoft New Tai Lue"/>
+        <a:font script="Tfng" typeface="Ebrima"/>
+      </a:minorFont>
+    </a:fontScheme>
+    <a:fmtScheme name="Office">
+      <a:fillStyleLst>
+        <a:solidFill>
+          <a:schemeClr val="phClr"/>
+        </a:solidFill>
+        <a:gradFill rotWithShape="1">
+          <a:gsLst>
+            <a:gs pos="0">
+              <a:schemeClr val="phClr">
+                <a:lumMod val="110000"/>
+                <a:satMod val="105000"/>
+                <a:tint val="67000"/>
+              </a:schemeClr>
+            </a:gs>
+            <a:gs pos="50000">
+              <a:schemeClr val="phClr">
+                <a:lumMod val="105000"/>
+                <a:satMod val="103000"/>
+                <a:tint val="73000"/>
+              </a:schemeClr>
+            </a:gs>
+            <a:gs pos="100000">
+              <a:schemeClr val="phClr">
+                <a:lumMod val="105000"/>
+                <a:satMod val="109000"/>
+                <a:tint val="81000"/>
+              </a:schemeClr>
+            </a:gs>
+          </a:gsLst>
+          <a:lin ang="5400000" scaled="0"/>
+        </a:gradFill>
+        <a:gradFill rotWithShape="1">
+          <a:gsLst>
+            <a:gs pos="0">
+              <a:schemeClr val="phClr">
+                <a:satMod val="103000"/>
+                <a:lumMod val="102000"/>
+                <a:tint val="94000"/>
+              </a:schemeClr>
+            </a:gs>
+            <a:gs pos="50000">
+              <a:schemeClr val="phClr">
+                <a:satMod val="110000"/>
+                <a:lumMod val="100000"/>
+                <a:shade val="100000"/>
+              </a:schemeClr>
+            </a:gs>
+            <a:gs pos="100000">
+              <a:schemeClr val="phClr">
+                <a:lumMod val="99000"/>
+                <a:satMod val="120000"/>
+                <a:shade val="78000"/>
+              </a:schemeClr>
+            </a:gs>
+          </a:gsLst>
+          <a:lin ang="5400000" scaled="0"/>
+        </a:gradFill>
+      </a:fillStyleLst>
+      <a:lnStyleLst>
+        <a:ln w="12700" cap="flat" cmpd="sng" algn="ctr">
+          <a:solidFill>
+            <a:schemeClr val="phClr"/>
+          </a:solidFill>
+          <a:prstDash val="solid"/>
+          <a:miter lim="800000"/>
+        </a:ln>
+        <a:ln w="19050" cap="flat" cmpd="sng" algn="ctr">
+          <a:solidFill>
+            <a:schemeClr val="phClr"/>
+          </a:solidFill>
+          <a:prstDash val="solid"/>
+          <a:miter lim="800000"/>
+        </a:ln>
+        <a:ln w="25400" cap="flat" cmpd="sng" algn="ctr">
+          <a:solidFill>
+            <a:schemeClr val="phClr"/>
+          </a:solidFill>
+          <a:prstDash val="solid"/>
+          <a:miter lim="800000"/>
+        </a:ln>
+      </a:lnStyleLst>
+      <a:effectStyleLst>
+        <a:effectStyle>
+          <a:effectLst/>
+        </a:effectStyle>
+        <a:effectStyle>
+          <a:effectLst/>
+        </a:effectStyle>
+        <a:effectStyle>
+          <a:effectLst>
+            <a:outerShdw blurRad="57150" dist="19050" dir="5400000" algn="ctr" rotWithShape="0">
+              <a:srgbClr val="000000">
+                <a:alpha val="63000"/>
+              </a:srgbClr>
+            </a:outerShdw>
+          </a:effectLst>
+        </a:effectStyle>
+      </a:effectStyleLst>
+      <a:bgFillStyleLst>
+        <a:solidFill>
+          <a:schemeClr val="phClr"/>
+        </a:solidFill>
+        <a:solidFill>
+          <a:schemeClr val="phClr">
+            <a:tint val="95000"/>
+            <a:satMod val="170000"/>
+          </a:schemeClr>
+        </a:solidFill>
+        <a:gradFill rotWithShape="1">
+          <a:gsLst>
+            <a:gs pos="0">
+              <a:schemeClr val="phClr">
+                <a:tint val="93000"/>
+                <a:satMod val="150000"/>
+                <a:shade val="98000"/>
+                <a:lumMod val="102000"/>
+              </a:schemeClr>
+            </a:gs>
+            <a:gs pos="50000">
+              <a:schemeClr val="phClr">
+                <a:tint val="98000"/>
+                <a:satMod val="130000"/>
+                <a:shade val="90000"/>
+                <a:lumMod val="103000"/>
+              </a:schemeClr>
+            </a:gs>
+            <a:gs pos="100000">
+              <a:schemeClr val="phClr">
+                <a:shade val="63000"/>
+                <a:satMod val="120000"/>
+              </a:schemeClr>
+            </a:gs>
+          </a:gsLst>
+          <a:lin ang="5400000" scaled="0"/>
+        </a:gradFill>
+      </a:bgFillStyleLst>
+    </a:fmtScheme>
+  </a:themeElements>
+  <a:objectDefaults>
+    <a:lnDef>
+      <a:spPr/>
+      <a:bodyPr/>
+      <a:lstStyle/>
+      <a:style>
+        <a:lnRef idx="2">
+          <a:schemeClr val="accent1"/>
+        </a:lnRef>
+        <a:fillRef idx="0">
+          <a:schemeClr val="accent1"/>
+        </a:fillRef>
+        <a:effectRef idx="1">
+          <a:schemeClr val="accent1"/>
+        </a:effectRef>
+        <a:fontRef idx="minor">
+          <a:schemeClr val="tx1"/>
+        </a:fontRef>
+      </a:style>
+    </a:lnDef>
+  </a:objectDefaults>
+  <a:extraClrSchemeLst/>
+  <a:extLst>
+    <a:ext uri="{05A4C25C-085E-4340-85A3-A5531E510DB2}">
+      <thm15:themeFamily xmlns:thm15="http://schemas.microsoft.com/office/thememl/2012/main" name="Office Theme" id="{2E142A2C-CD16-42D6-873A-C26D2A0506FA}" vid="{1BDDFF52-6CD6-40A5-AB3C-68EB2F1E4D0A}"/>
+    </a:ext>
+  </a:extLst>
+</a:theme>
 </file>